--- a/Python/Lesson 06 - Data Structures/Data Structures Basics.pptx
+++ b/Python/Lesson 06 - Data Structures/Data Structures Basics.pptx
@@ -5,20 +5,27 @@
     <p:sldMasterId id="2147483660" r:id="rId1"/>
   </p:sldMasterIdLst>
   <p:notesMasterIdLst>
-    <p:notesMasterId r:id="rId13"/>
+    <p:notesMasterId r:id="rId20"/>
   </p:notesMasterIdLst>
   <p:sldIdLst>
     <p:sldId id="256" r:id="rId2"/>
-    <p:sldId id="281" r:id="rId3"/>
-    <p:sldId id="276" r:id="rId4"/>
-    <p:sldId id="257" r:id="rId5"/>
-    <p:sldId id="278" r:id="rId6"/>
-    <p:sldId id="279" r:id="rId7"/>
-    <p:sldId id="280" r:id="rId8"/>
-    <p:sldId id="261" r:id="rId9"/>
-    <p:sldId id="277" r:id="rId10"/>
-    <p:sldId id="273" r:id="rId11"/>
-    <p:sldId id="259" r:id="rId12"/>
+    <p:sldId id="486" r:id="rId3"/>
+    <p:sldId id="496" r:id="rId4"/>
+    <p:sldId id="497" r:id="rId5"/>
+    <p:sldId id="498" r:id="rId6"/>
+    <p:sldId id="276" r:id="rId7"/>
+    <p:sldId id="278" r:id="rId8"/>
+    <p:sldId id="499" r:id="rId9"/>
+    <p:sldId id="279" r:id="rId10"/>
+    <p:sldId id="500" r:id="rId11"/>
+    <p:sldId id="501" r:id="rId12"/>
+    <p:sldId id="502" r:id="rId13"/>
+    <p:sldId id="280" r:id="rId14"/>
+    <p:sldId id="503" r:id="rId15"/>
+    <p:sldId id="261" r:id="rId16"/>
+    <p:sldId id="504" r:id="rId17"/>
+    <p:sldId id="273" r:id="rId18"/>
+    <p:sldId id="259" r:id="rId19"/>
   </p:sldIdLst>
   <p:sldSz cx="12192000" cy="6858000"/>
   <p:notesSz cx="6858000" cy="9144000"/>
@@ -207,7 +214,7 @@
           <a:p>
             <a:fld id="{941F8BC1-DC94-491B-AA44-0232F744EE98}" type="datetimeFigureOut">
               <a:rPr lang="en-US" smtClean="0"/>
-              <a:t>12/23/25</a:t>
+              <a:t>6/22/2026</a:t>
             </a:fld>
             <a:endParaRPr lang="en-US"/>
           </a:p>
@@ -479,7 +486,13 @@
   <p:cSld>
     <p:spTree>
       <p:nvGrpSpPr>
-        <p:cNvPr id="1" name=""/>
+        <p:cNvPr id="1" name="">
+          <a:extLst>
+            <a:ext uri="{FF2B5EF4-FFF2-40B4-BE49-F238E27FC236}">
+              <a16:creationId xmlns:a16="http://schemas.microsoft.com/office/drawing/2014/main" id="{1CD64719-007A-9D20-6D43-3A4FCAADACE1}"/>
+            </a:ext>
+          </a:extLst>
+        </p:cNvPr>
         <p:cNvGrpSpPr/>
         <p:nvPr/>
       </p:nvGrpSpPr>
@@ -493,7 +506,13 @@
       </p:grpSpPr>
       <p:sp>
         <p:nvSpPr>
-          <p:cNvPr id="2" name="Slide Image Placeholder 1"/>
+          <p:cNvPr id="2" name="Slide Image Placeholder 1">
+            <a:extLst>
+              <a:ext uri="{FF2B5EF4-FFF2-40B4-BE49-F238E27FC236}">
+                <a16:creationId xmlns:a16="http://schemas.microsoft.com/office/drawing/2014/main" id="{E432F23C-3B6C-06AD-FDEF-F55DEF812C1E}"/>
+              </a:ext>
+            </a:extLst>
+          </p:cNvPr>
           <p:cNvSpPr>
             <a:spLocks noGrp="1" noRot="1" noChangeAspect="1"/>
           </p:cNvSpPr>
@@ -501,11 +520,22 @@
             <p:ph type="sldImg"/>
           </p:nvPr>
         </p:nvSpPr>
-        <p:spPr/>
-      </p:sp>
-      <p:sp>
-        <p:nvSpPr>
-          <p:cNvPr id="3" name="Notes Placeholder 2"/>
+        <p:spPr>
+          <a:xfrm>
+            <a:off x="381000" y="685800"/>
+            <a:ext cx="6096000" cy="3429000"/>
+          </a:xfrm>
+        </p:spPr>
+      </p:sp>
+      <p:sp>
+        <p:nvSpPr>
+          <p:cNvPr id="3" name="Notes Placeholder 2">
+            <a:extLst>
+              <a:ext uri="{FF2B5EF4-FFF2-40B4-BE49-F238E27FC236}">
+                <a16:creationId xmlns:a16="http://schemas.microsoft.com/office/drawing/2014/main" id="{0784E9A6-CB51-3C7D-DF18-0DDEC1AC4207}"/>
+              </a:ext>
+            </a:extLst>
+          </p:cNvPr>
           <p:cNvSpPr>
             <a:spLocks noGrp="1"/>
           </p:cNvSpPr>
@@ -524,7 +554,13 @@
       </p:sp>
       <p:sp>
         <p:nvSpPr>
-          <p:cNvPr id="4" name="Slide Number Placeholder 3"/>
+          <p:cNvPr id="4" name="Slide Number Placeholder 3">
+            <a:extLst>
+              <a:ext uri="{FF2B5EF4-FFF2-40B4-BE49-F238E27FC236}">
+                <a16:creationId xmlns:a16="http://schemas.microsoft.com/office/drawing/2014/main" id="{D045C7A3-AEE3-A283-A203-B801AB559F92}"/>
+              </a:ext>
+            </a:extLst>
+          </p:cNvPr>
           <p:cNvSpPr>
             <a:spLocks noGrp="1"/>
           </p:cNvSpPr>
@@ -537,9 +573,9 @@
           <a:bodyPr/>
           <a:lstStyle/>
           <a:p>
-            <a:fld id="{2D8B709C-82E0-4ADF-BDA3-CCA1C8B22229}" type="slidenum">
+            <a:fld id="{292570D5-C374-43AE-876B-55C2A221664E}" type="slidenum">
               <a:rPr lang="en-US" smtClean="0"/>
-              <a:t>4</a:t>
+              <a:t>2</a:t>
             </a:fld>
             <a:endParaRPr lang="en-US"/>
           </a:p>
@@ -548,7 +584,488 @@
     </p:spTree>
     <p:extLst>
       <p:ext uri="{BB962C8B-B14F-4D97-AF65-F5344CB8AC3E}">
-        <p14:creationId xmlns:p14="http://schemas.microsoft.com/office/powerpoint/2010/main" val="517618840"/>
+        <p14:creationId xmlns:p14="http://schemas.microsoft.com/office/powerpoint/2010/main" val="2731214060"/>
+      </p:ext>
+    </p:extLst>
+  </p:cSld>
+  <p:clrMapOvr>
+    <a:masterClrMapping/>
+  </p:clrMapOvr>
+</p:notes>
+</file>
+
+<file path=ppt/notesSlides/notesSlide2.xml><?xml version="1.0" encoding="utf-8"?>
+<p:notes xmlns:a="http://schemas.openxmlformats.org/drawingml/2006/main" xmlns:r="http://schemas.openxmlformats.org/officeDocument/2006/relationships" xmlns:p="http://schemas.openxmlformats.org/presentationml/2006/main" showMasterSp="0" showMasterPhAnim="0">
+  <p:cSld>
+    <p:spTree>
+      <p:nvGrpSpPr>
+        <p:cNvPr id="1" name="Shape 467">
+          <a:extLst>
+            <a:ext uri="{FF2B5EF4-FFF2-40B4-BE49-F238E27FC236}">
+              <a16:creationId xmlns:a16="http://schemas.microsoft.com/office/drawing/2014/main" id="{E6376FA9-B5F0-B037-8046-B6615FDA6FF6}"/>
+            </a:ext>
+          </a:extLst>
+        </p:cNvPr>
+        <p:cNvGrpSpPr/>
+        <p:nvPr/>
+      </p:nvGrpSpPr>
+      <p:grpSpPr>
+        <a:xfrm>
+          <a:off x="0" y="0"/>
+          <a:ext cx="0" cy="0"/>
+          <a:chOff x="0" y="0"/>
+          <a:chExt cx="0" cy="0"/>
+        </a:xfrm>
+      </p:grpSpPr>
+      <p:sp>
+        <p:nvSpPr>
+          <p:cNvPr id="468" name="Google Shape;468;p17:notes">
+            <a:extLst>
+              <a:ext uri="{FF2B5EF4-FFF2-40B4-BE49-F238E27FC236}">
+                <a16:creationId xmlns:a16="http://schemas.microsoft.com/office/drawing/2014/main" id="{DD419411-177D-3D00-B750-FE80CE812B25}"/>
+              </a:ext>
+            </a:extLst>
+          </p:cNvPr>
+          <p:cNvSpPr>
+            <a:spLocks noGrp="1" noRot="1" noChangeAspect="1"/>
+          </p:cNvSpPr>
+          <p:nvPr>
+            <p:ph type="sldImg" idx="2"/>
+          </p:nvPr>
+        </p:nvSpPr>
+        <p:spPr>
+          <a:xfrm>
+            <a:off x="381000" y="685800"/>
+            <a:ext cx="6096000" cy="3429000"/>
+          </a:xfrm>
+          <a:custGeom>
+            <a:avLst/>
+            <a:gdLst/>
+            <a:ahLst/>
+            <a:cxnLst/>
+            <a:rect l="l" t="t" r="r" b="b"/>
+            <a:pathLst>
+              <a:path w="120000" h="120000" extrusionOk="0">
+                <a:moveTo>
+                  <a:pt x="0" y="0"/>
+                </a:moveTo>
+                <a:lnTo>
+                  <a:pt x="120000" y="0"/>
+                </a:lnTo>
+                <a:lnTo>
+                  <a:pt x="120000" y="120000"/>
+                </a:lnTo>
+                <a:lnTo>
+                  <a:pt x="0" y="120000"/>
+                </a:lnTo>
+                <a:close/>
+              </a:path>
+            </a:pathLst>
+          </a:custGeom>
+          <a:noFill/>
+          <a:ln w="9525" cap="flat" cmpd="sng">
+            <a:solidFill>
+              <a:srgbClr val="000000"/>
+            </a:solidFill>
+            <a:prstDash val="solid"/>
+            <a:round/>
+            <a:headEnd type="none" w="sm" len="sm"/>
+            <a:tailEnd type="none" w="sm" len="sm"/>
+          </a:ln>
+        </p:spPr>
+      </p:sp>
+      <p:sp>
+        <p:nvSpPr>
+          <p:cNvPr id="469" name="Google Shape;469;p17:notes">
+            <a:extLst>
+              <a:ext uri="{FF2B5EF4-FFF2-40B4-BE49-F238E27FC236}">
+                <a16:creationId xmlns:a16="http://schemas.microsoft.com/office/drawing/2014/main" id="{78A8749A-07B8-1837-285F-24B38AB73009}"/>
+              </a:ext>
+            </a:extLst>
+          </p:cNvPr>
+          <p:cNvSpPr txBox="1">
+            <a:spLocks noGrp="1"/>
+          </p:cNvSpPr>
+          <p:nvPr>
+            <p:ph type="body" idx="1"/>
+          </p:nvPr>
+        </p:nvSpPr>
+        <p:spPr>
+          <a:xfrm>
+            <a:off x="685800" y="4343400"/>
+            <a:ext cx="5486400" cy="4114800"/>
+          </a:xfrm>
+          <a:prstGeom prst="rect">
+            <a:avLst/>
+          </a:prstGeom>
+          <a:noFill/>
+          <a:ln>
+            <a:noFill/>
+          </a:ln>
+        </p:spPr>
+        <p:txBody>
+          <a:bodyPr spcFirstLastPara="1" wrap="square" lIns="91425" tIns="91425" rIns="91425" bIns="91425" anchor="t" anchorCtr="0">
+            <a:noAutofit/>
+          </a:bodyPr>
+          <a:lstStyle/>
+          <a:p>
+            <a:pPr marL="0" lvl="0" indent="0" algn="l" rtl="0">
+              <a:lnSpc>
+                <a:spcPct val="100000"/>
+              </a:lnSpc>
+              <a:spcBef>
+                <a:spcPts val="0"/>
+              </a:spcBef>
+              <a:spcAft>
+                <a:spcPts val="0"/>
+              </a:spcAft>
+              <a:buSzPts val="1100"/>
+              <a:buNone/>
+            </a:pPr>
+            <a:endParaRPr/>
+          </a:p>
+        </p:txBody>
+      </p:sp>
+    </p:spTree>
+    <p:extLst>
+      <p:ext uri="{BB962C8B-B14F-4D97-AF65-F5344CB8AC3E}">
+        <p14:creationId xmlns:p14="http://schemas.microsoft.com/office/powerpoint/2010/main" val="1678703663"/>
+      </p:ext>
+    </p:extLst>
+  </p:cSld>
+  <p:clrMapOvr>
+    <a:masterClrMapping/>
+  </p:clrMapOvr>
+</p:notes>
+</file>
+
+<file path=ppt/notesSlides/notesSlide3.xml><?xml version="1.0" encoding="utf-8"?>
+<p:notes xmlns:a="http://schemas.openxmlformats.org/drawingml/2006/main" xmlns:r="http://schemas.openxmlformats.org/officeDocument/2006/relationships" xmlns:p="http://schemas.openxmlformats.org/presentationml/2006/main" showMasterSp="0" showMasterPhAnim="0">
+  <p:cSld>
+    <p:spTree>
+      <p:nvGrpSpPr>
+        <p:cNvPr id="1" name="Shape 467">
+          <a:extLst>
+            <a:ext uri="{FF2B5EF4-FFF2-40B4-BE49-F238E27FC236}">
+              <a16:creationId xmlns:a16="http://schemas.microsoft.com/office/drawing/2014/main" id="{043152F8-3649-B807-263D-B391F303EF9A}"/>
+            </a:ext>
+          </a:extLst>
+        </p:cNvPr>
+        <p:cNvGrpSpPr/>
+        <p:nvPr/>
+      </p:nvGrpSpPr>
+      <p:grpSpPr>
+        <a:xfrm>
+          <a:off x="0" y="0"/>
+          <a:ext cx="0" cy="0"/>
+          <a:chOff x="0" y="0"/>
+          <a:chExt cx="0" cy="0"/>
+        </a:xfrm>
+      </p:grpSpPr>
+      <p:sp>
+        <p:nvSpPr>
+          <p:cNvPr id="468" name="Google Shape;468;p17:notes">
+            <a:extLst>
+              <a:ext uri="{FF2B5EF4-FFF2-40B4-BE49-F238E27FC236}">
+                <a16:creationId xmlns:a16="http://schemas.microsoft.com/office/drawing/2014/main" id="{D1E0B138-BDAD-22BA-9A52-5E4F9D1697D6}"/>
+              </a:ext>
+            </a:extLst>
+          </p:cNvPr>
+          <p:cNvSpPr>
+            <a:spLocks noGrp="1" noRot="1" noChangeAspect="1"/>
+          </p:cNvSpPr>
+          <p:nvPr>
+            <p:ph type="sldImg" idx="2"/>
+          </p:nvPr>
+        </p:nvSpPr>
+        <p:spPr>
+          <a:xfrm>
+            <a:off x="381000" y="685800"/>
+            <a:ext cx="6096000" cy="3429000"/>
+          </a:xfrm>
+          <a:custGeom>
+            <a:avLst/>
+            <a:gdLst/>
+            <a:ahLst/>
+            <a:cxnLst/>
+            <a:rect l="l" t="t" r="r" b="b"/>
+            <a:pathLst>
+              <a:path w="120000" h="120000" extrusionOk="0">
+                <a:moveTo>
+                  <a:pt x="0" y="0"/>
+                </a:moveTo>
+                <a:lnTo>
+                  <a:pt x="120000" y="0"/>
+                </a:lnTo>
+                <a:lnTo>
+                  <a:pt x="120000" y="120000"/>
+                </a:lnTo>
+                <a:lnTo>
+                  <a:pt x="0" y="120000"/>
+                </a:lnTo>
+                <a:close/>
+              </a:path>
+            </a:pathLst>
+          </a:custGeom>
+          <a:noFill/>
+          <a:ln w="9525" cap="flat" cmpd="sng">
+            <a:solidFill>
+              <a:srgbClr val="000000"/>
+            </a:solidFill>
+            <a:prstDash val="solid"/>
+            <a:round/>
+            <a:headEnd type="none" w="sm" len="sm"/>
+            <a:tailEnd type="none" w="sm" len="sm"/>
+          </a:ln>
+        </p:spPr>
+      </p:sp>
+      <p:sp>
+        <p:nvSpPr>
+          <p:cNvPr id="469" name="Google Shape;469;p17:notes">
+            <a:extLst>
+              <a:ext uri="{FF2B5EF4-FFF2-40B4-BE49-F238E27FC236}">
+                <a16:creationId xmlns:a16="http://schemas.microsoft.com/office/drawing/2014/main" id="{CF3F03FE-85F3-88C7-4359-C593C7C6F22B}"/>
+              </a:ext>
+            </a:extLst>
+          </p:cNvPr>
+          <p:cNvSpPr txBox="1">
+            <a:spLocks noGrp="1"/>
+          </p:cNvSpPr>
+          <p:nvPr>
+            <p:ph type="body" idx="1"/>
+          </p:nvPr>
+        </p:nvSpPr>
+        <p:spPr>
+          <a:xfrm>
+            <a:off x="685800" y="4343400"/>
+            <a:ext cx="5486400" cy="4114800"/>
+          </a:xfrm>
+          <a:prstGeom prst="rect">
+            <a:avLst/>
+          </a:prstGeom>
+          <a:noFill/>
+          <a:ln>
+            <a:noFill/>
+          </a:ln>
+        </p:spPr>
+        <p:txBody>
+          <a:bodyPr spcFirstLastPara="1" wrap="square" lIns="91425" tIns="91425" rIns="91425" bIns="91425" anchor="t" anchorCtr="0">
+            <a:noAutofit/>
+          </a:bodyPr>
+          <a:lstStyle/>
+          <a:p>
+            <a:pPr marL="0" lvl="0" indent="0" algn="l" rtl="0">
+              <a:lnSpc>
+                <a:spcPct val="100000"/>
+              </a:lnSpc>
+              <a:spcBef>
+                <a:spcPts val="0"/>
+              </a:spcBef>
+              <a:spcAft>
+                <a:spcPts val="0"/>
+              </a:spcAft>
+              <a:buSzPts val="1100"/>
+              <a:buNone/>
+            </a:pPr>
+            <a:endParaRPr/>
+          </a:p>
+        </p:txBody>
+      </p:sp>
+    </p:spTree>
+    <p:extLst>
+      <p:ext uri="{BB962C8B-B14F-4D97-AF65-F5344CB8AC3E}">
+        <p14:creationId xmlns:p14="http://schemas.microsoft.com/office/powerpoint/2010/main" val="612688048"/>
+      </p:ext>
+    </p:extLst>
+  </p:cSld>
+  <p:clrMapOvr>
+    <a:masterClrMapping/>
+  </p:clrMapOvr>
+</p:notes>
+</file>
+
+<file path=ppt/notesSlides/notesSlide4.xml><?xml version="1.0" encoding="utf-8"?>
+<p:notes xmlns:a="http://schemas.openxmlformats.org/drawingml/2006/main" xmlns:r="http://schemas.openxmlformats.org/officeDocument/2006/relationships" xmlns:p="http://schemas.openxmlformats.org/presentationml/2006/main" showMasterSp="0" showMasterPhAnim="0">
+  <p:cSld>
+    <p:spTree>
+      <p:nvGrpSpPr>
+        <p:cNvPr id="1" name="Shape 467">
+          <a:extLst>
+            <a:ext uri="{FF2B5EF4-FFF2-40B4-BE49-F238E27FC236}">
+              <a16:creationId xmlns:a16="http://schemas.microsoft.com/office/drawing/2014/main" id="{421EBE75-3C92-49AA-FC30-2E3C377B6D1C}"/>
+            </a:ext>
+          </a:extLst>
+        </p:cNvPr>
+        <p:cNvGrpSpPr/>
+        <p:nvPr/>
+      </p:nvGrpSpPr>
+      <p:grpSpPr>
+        <a:xfrm>
+          <a:off x="0" y="0"/>
+          <a:ext cx="0" cy="0"/>
+          <a:chOff x="0" y="0"/>
+          <a:chExt cx="0" cy="0"/>
+        </a:xfrm>
+      </p:grpSpPr>
+      <p:sp>
+        <p:nvSpPr>
+          <p:cNvPr id="468" name="Google Shape;468;p17:notes">
+            <a:extLst>
+              <a:ext uri="{FF2B5EF4-FFF2-40B4-BE49-F238E27FC236}">
+                <a16:creationId xmlns:a16="http://schemas.microsoft.com/office/drawing/2014/main" id="{3D4EEE32-92BF-3AE2-885A-C618F8483D25}"/>
+              </a:ext>
+            </a:extLst>
+          </p:cNvPr>
+          <p:cNvSpPr>
+            <a:spLocks noGrp="1" noRot="1" noChangeAspect="1"/>
+          </p:cNvSpPr>
+          <p:nvPr>
+            <p:ph type="sldImg" idx="2"/>
+          </p:nvPr>
+        </p:nvSpPr>
+        <p:spPr>
+          <a:xfrm>
+            <a:off x="381000" y="685800"/>
+            <a:ext cx="6096000" cy="3429000"/>
+          </a:xfrm>
+          <a:custGeom>
+            <a:avLst/>
+            <a:gdLst/>
+            <a:ahLst/>
+            <a:cxnLst/>
+            <a:rect l="l" t="t" r="r" b="b"/>
+            <a:pathLst>
+              <a:path w="120000" h="120000" extrusionOk="0">
+                <a:moveTo>
+                  <a:pt x="0" y="0"/>
+                </a:moveTo>
+                <a:lnTo>
+                  <a:pt x="120000" y="0"/>
+                </a:lnTo>
+                <a:lnTo>
+                  <a:pt x="120000" y="120000"/>
+                </a:lnTo>
+                <a:lnTo>
+                  <a:pt x="0" y="120000"/>
+                </a:lnTo>
+                <a:close/>
+              </a:path>
+            </a:pathLst>
+          </a:custGeom>
+          <a:noFill/>
+          <a:ln w="9525" cap="flat" cmpd="sng">
+            <a:solidFill>
+              <a:srgbClr val="000000"/>
+            </a:solidFill>
+            <a:prstDash val="solid"/>
+            <a:round/>
+            <a:headEnd type="none" w="sm" len="sm"/>
+            <a:tailEnd type="none" w="sm" len="sm"/>
+          </a:ln>
+        </p:spPr>
+      </p:sp>
+      <p:sp>
+        <p:nvSpPr>
+          <p:cNvPr id="469" name="Google Shape;469;p17:notes">
+            <a:extLst>
+              <a:ext uri="{FF2B5EF4-FFF2-40B4-BE49-F238E27FC236}">
+                <a16:creationId xmlns:a16="http://schemas.microsoft.com/office/drawing/2014/main" id="{880F97B4-481F-18FB-2C4C-5968159F6488}"/>
+              </a:ext>
+            </a:extLst>
+          </p:cNvPr>
+          <p:cNvSpPr txBox="1">
+            <a:spLocks noGrp="1"/>
+          </p:cNvSpPr>
+          <p:nvPr>
+            <p:ph type="body" idx="1"/>
+          </p:nvPr>
+        </p:nvSpPr>
+        <p:spPr>
+          <a:xfrm>
+            <a:off x="685800" y="4343400"/>
+            <a:ext cx="5486400" cy="4114800"/>
+          </a:xfrm>
+          <a:prstGeom prst="rect">
+            <a:avLst/>
+          </a:prstGeom>
+          <a:noFill/>
+          <a:ln>
+            <a:noFill/>
+          </a:ln>
+        </p:spPr>
+        <p:txBody>
+          <a:bodyPr spcFirstLastPara="1" wrap="square" lIns="91425" tIns="91425" rIns="91425" bIns="91425" anchor="t" anchorCtr="0">
+            <a:noAutofit/>
+          </a:bodyPr>
+          <a:lstStyle/>
+          <a:p>
+            <a:r>
+              <a:rPr lang="en-US" b="1" dirty="0">
+                <a:effectLst/>
+              </a:rPr>
+              <a:t>✅ The answer students should get: Grid coordinate </a:t>
+            </a:r>
+            <a:r>
+              <a:rPr lang="en-US" sz="1200" b="1" kern="1200" dirty="0">
+                <a:solidFill>
+                  <a:schemeClr val="tx1"/>
+                </a:solidFill>
+                <a:effectLst/>
+                <a:latin typeface="+mn-lt"/>
+                <a:ea typeface="+mn-ea"/>
+                <a:cs typeface="+mn-cs"/>
+              </a:rPr>
+              <a:t>47.3</a:t>
+            </a:r>
+            <a:br>
+              <a:rPr lang="en-US" dirty="0">
+                <a:effectLst/>
+              </a:rPr>
+            </a:br>
+            <a:r>
+              <a:rPr lang="en-US" i="1" dirty="0">
+                <a:effectLst/>
+              </a:rPr>
+              <a:t>(Top 5 values: 98, 96, 95, 92, 92 → sum = 473 → ÷ 10 = </a:t>
+            </a:r>
+            <a:r>
+              <a:rPr lang="en-US" b="1" i="1" dirty="0">
+                <a:effectLst/>
+              </a:rPr>
+              <a:t>47.3</a:t>
+            </a:r>
+            <a:r>
+              <a:rPr lang="en-US" i="1" dirty="0">
+                <a:effectLst/>
+              </a:rPr>
+              <a:t>)</a:t>
+            </a:r>
+            <a:endParaRPr lang="en-US" dirty="0">
+              <a:effectLst/>
+            </a:endParaRPr>
+          </a:p>
+          <a:p>
+            <a:pPr marL="0" lvl="0" indent="0" algn="l" rtl="0">
+              <a:lnSpc>
+                <a:spcPct val="100000"/>
+              </a:lnSpc>
+              <a:spcBef>
+                <a:spcPts val="0"/>
+              </a:spcBef>
+              <a:spcAft>
+                <a:spcPts val="0"/>
+              </a:spcAft>
+              <a:buSzPts val="1100"/>
+              <a:buNone/>
+            </a:pPr>
+            <a:endParaRPr dirty="0"/>
+          </a:p>
+        </p:txBody>
+      </p:sp>
+    </p:spTree>
+    <p:extLst>
+      <p:ext uri="{BB962C8B-B14F-4D97-AF65-F5344CB8AC3E}">
+        <p14:creationId xmlns:p14="http://schemas.microsoft.com/office/powerpoint/2010/main" val="1445632963"/>
       </p:ext>
     </p:extLst>
   </p:cSld>
@@ -606,7 +1123,7 @@
           <a:p>
             <a:fld id="{7A3E0868-4E26-4CDC-8A56-D70E2D8B12FE}" type="datetime3">
               <a:rPr lang="en-US" smtClean="0"/>
-              <a:t>23 December 2025</a:t>
+              <a:t>22 June 2026</a:t>
             </a:fld>
             <a:endParaRPr lang="en-US"/>
           </a:p>
@@ -3167,7 +3684,7 @@
           <a:p>
             <a:fld id="{A7B8021B-6105-4216-96FC-94348F216D0E}" type="datetime3">
               <a:rPr lang="en-US" smtClean="0"/>
-              <a:t>23 December 2025</a:t>
+              <a:t>22 June 2026</a:t>
             </a:fld>
             <a:endParaRPr lang="en-US"/>
           </a:p>
@@ -4864,7 +5381,7 @@
           <a:p>
             <a:fld id="{5D27CFAB-73E6-44A8-B862-B3306344E3F2}" type="datetime3">
               <a:rPr lang="en-US" smtClean="0"/>
-              <a:t>23 December 2025</a:t>
+              <a:t>22 June 2026</a:t>
             </a:fld>
             <a:endParaRPr lang="en-US"/>
           </a:p>
@@ -6654,7 +7171,7 @@
           <a:p>
             <a:fld id="{A9B2E784-A5F5-4301-881B-94AC8DBF9DED}" type="datetime3">
               <a:rPr lang="en-US" smtClean="0"/>
-              <a:t>23 December 2025</a:t>
+              <a:t>22 June 2026</a:t>
             </a:fld>
             <a:endParaRPr lang="en-US"/>
           </a:p>
@@ -6833,7 +7350,7 @@
           <a:p>
             <a:fld id="{18EAB3A5-9E92-4BB9-8F22-9632B4FBEDBA}" type="datetime3">
               <a:rPr lang="en-US" smtClean="0"/>
-              <a:t>23 December 2025</a:t>
+              <a:t>22 June 2026</a:t>
             </a:fld>
             <a:endParaRPr lang="en-US"/>
           </a:p>
@@ -7060,7 +7577,7 @@
           <a:p>
             <a:fld id="{40923810-5FB2-48C9-96CA-1DE2C4773142}" type="datetime3">
               <a:rPr lang="en-US" smtClean="0"/>
-              <a:t>23 December 2025</a:t>
+              <a:t>22 June 2026</a:t>
             </a:fld>
             <a:endParaRPr lang="en-US"/>
           </a:p>
@@ -7350,7 +7867,7 @@
           <a:p>
             <a:fld id="{E50EFF4B-86EB-42FB-93EA-7D8F9CB2466F}" type="datetime3">
               <a:rPr lang="en-US" smtClean="0"/>
-              <a:t>23 December 2025</a:t>
+              <a:t>22 June 2026</a:t>
             </a:fld>
             <a:endParaRPr lang="en-US"/>
           </a:p>
@@ -7962,7 +8479,7 @@
           <a:p>
             <a:fld id="{FB14FC24-E041-45E9-9A72-E5755A86890F}" type="datetime3">
               <a:rPr lang="en-US" smtClean="0"/>
-              <a:t>23 December 2025</a:t>
+              <a:t>22 June 2026</a:t>
             </a:fld>
             <a:endParaRPr lang="en-US"/>
           </a:p>
@@ -8822,7 +9339,7 @@
           <a:p>
             <a:fld id="{98A19125-94A7-4474-858C-FD9C4ABE9DDA}" type="datetime3">
               <a:rPr lang="en-US" smtClean="0"/>
-              <a:t>23 December 2025</a:t>
+              <a:t>22 June 2026</a:t>
             </a:fld>
             <a:endParaRPr lang="en-US"/>
           </a:p>
@@ -9925,7 +10442,7 @@
           <a:p>
             <a:fld id="{3BA0343D-C8D8-43CE-BB79-50DEA219DB07}" type="datetime3">
               <a:rPr lang="en-US" smtClean="0"/>
-              <a:t>23 December 2025</a:t>
+              <a:t>22 June 2026</a:t>
             </a:fld>
             <a:endParaRPr lang="en-US"/>
           </a:p>
@@ -10214,7 +10731,7 @@
           <a:p>
             <a:fld id="{453BD212-0B9F-4987-965F-AC83B2FC354F}" type="datetime3">
               <a:rPr lang="en-US" smtClean="0"/>
-              <a:t>23 December 2025</a:t>
+              <a:t>22 June 2026</a:t>
             </a:fld>
             <a:endParaRPr lang="en-US"/>
           </a:p>
@@ -10457,7 +10974,7 @@
           <a:p>
             <a:fld id="{6DDC931E-8CBE-4A3F-A034-9B6122C6DCDB}" type="datetime3">
               <a:rPr lang="en-US" smtClean="0"/>
-              <a:t>23 December 2025</a:t>
+              <a:t>22 June 2026</a:t>
             </a:fld>
             <a:endParaRPr lang="en-US"/>
           </a:p>
@@ -12223,7 +12740,7 @@
           <a:p>
             <a:fld id="{220AF9C2-5E8A-4308-AE6B-CA9B65007D0E}" type="datetime3">
               <a:rPr lang="en-US" smtClean="0"/>
-              <a:t>23 December 2025</a:t>
+              <a:t>22 June 2026</a:t>
             </a:fld>
             <a:endParaRPr lang="en-US"/>
           </a:p>
@@ -12536,7 +13053,7 @@
           <a:p>
             <a:fld id="{FF31E861-D2AF-431D-860B-DCF67C218052}" type="datetime3">
               <a:rPr lang="en-US" smtClean="0"/>
-              <a:t>23 December 2025</a:t>
+              <a:t>22 June 2026</a:t>
             </a:fld>
             <a:endParaRPr lang="en-US"/>
           </a:p>
@@ -12815,7 +13332,7 @@
           <a:p>
             <a:fld id="{D1DA25B2-AAF1-4C1F-AA38-12D5BFA7D4C8}" type="datetime3">
               <a:rPr lang="en-US" smtClean="0"/>
-              <a:t>23 December 2025</a:t>
+              <a:t>22 June 2026</a:t>
             </a:fld>
             <a:endParaRPr lang="en-US"/>
           </a:p>
@@ -13094,7 +13611,7 @@
           <a:p>
             <a:fld id="{A25C0F39-45D0-48E9-90B3-7FE8FCE561C8}" type="datetime3">
               <a:rPr lang="en-US" smtClean="0"/>
-              <a:t>23 December 2025</a:t>
+              <a:t>22 June 2026</a:t>
             </a:fld>
             <a:endParaRPr lang="en-US"/>
           </a:p>
@@ -13595,7 +14112,7 @@
           <a:p>
             <a:fld id="{9BAF1A3D-92FA-4F24-9781-74AFA516A230}" type="datetime3">
               <a:rPr lang="en-US" smtClean="0"/>
-              <a:t>23 December 2025</a:t>
+              <a:t>22 June 2026</a:t>
             </a:fld>
             <a:endParaRPr lang="en-US"/>
           </a:p>
@@ -13722,7 +14239,7 @@
           <a:p>
             <a:fld id="{5719C672-856D-4617-A693-8FE15749A9B7}" type="datetime3">
               <a:rPr lang="en-US" smtClean="0"/>
-              <a:t>23 December 2025</a:t>
+              <a:t>22 June 2026</a:t>
             </a:fld>
             <a:endParaRPr lang="en-US"/>
           </a:p>
@@ -13857,7 +14374,7 @@
           <a:p>
             <a:fld id="{5F6C764D-A39E-4C03-B161-E0BC66E8883B}" type="datetime3">
               <a:rPr lang="en-US" smtClean="0"/>
-              <a:t>23 December 2025</a:t>
+              <a:t>22 June 2026</a:t>
             </a:fld>
             <a:endParaRPr lang="en-US"/>
           </a:p>
@@ -14095,7 +14612,7 @@
           <a:p>
             <a:fld id="{6E3E33F9-20B7-4995-BE7D-165DBB597850}" type="datetime3">
               <a:rPr lang="en-US" smtClean="0"/>
-              <a:t>23 December 2025</a:t>
+              <a:t>22 June 2026</a:t>
             </a:fld>
             <a:endParaRPr lang="en-US"/>
           </a:p>
@@ -14208,7 +14725,7 @@
           <a:p>
             <a:fld id="{CD41C263-3501-4369-A962-62B6BF915CDE}" type="datetime3">
               <a:rPr lang="en-US" smtClean="0"/>
-              <a:t>23 December 2025</a:t>
+              <a:t>22 June 2026</a:t>
             </a:fld>
             <a:endParaRPr lang="en-US"/>
           </a:p>
@@ -14611,7 +15128,7 @@
           <a:p>
             <a:fld id="{B06F3EBE-B2E8-4992-9F00-9E4B44F057C0}" type="datetime3">
               <a:rPr lang="en-US" smtClean="0"/>
-              <a:t>23 December 2025</a:t>
+              <a:t>22 June 2026</a:t>
             </a:fld>
             <a:endParaRPr lang="en-US"/>
           </a:p>
@@ -14743,7 +15260,7 @@
           <a:p>
             <a:fld id="{D41656AB-D2E1-472E-8B95-0DF5C6E1D623}" type="datetime3">
               <a:rPr lang="en-US" smtClean="0"/>
-              <a:t>23 December 2025</a:t>
+              <a:t>22 June 2026</a:t>
             </a:fld>
             <a:endParaRPr lang="en-US"/>
           </a:p>
@@ -16628,7 +17145,7 @@
           <a:p>
             <a:fld id="{971AFA9C-17DA-4726-B9E3-ADECF7729AF7}" type="datetimeFigureOut">
               <a:rPr lang="en-US" smtClean="0"/>
-              <a:t>12/23/25</a:t>
+              <a:t>6/22/2026</a:t>
             </a:fld>
             <a:endParaRPr lang="en-US"/>
           </a:p>
@@ -16939,7 +17456,7 @@
           <a:p>
             <a:fld id="{971AFA9C-17DA-4726-B9E3-ADECF7729AF7}" type="datetimeFigureOut">
               <a:rPr lang="en-US" smtClean="0"/>
-              <a:t>12/23/25</a:t>
+              <a:t>6/22/2026</a:t>
             </a:fld>
             <a:endParaRPr lang="en-US"/>
           </a:p>
@@ -17009,6 +17526,727 @@
   <p:clrMapOvr>
     <a:masterClrMapping/>
   </p:clrMapOvr>
+</p:sldLayout>
+</file>
+
+<file path=ppt/slideLayouts/slideLayout33.xml><?xml version="1.0" encoding="utf-8"?>
+<p:sldLayout xmlns:a="http://schemas.openxmlformats.org/drawingml/2006/main" xmlns:r="http://schemas.openxmlformats.org/officeDocument/2006/relationships" xmlns:p="http://schemas.openxmlformats.org/presentationml/2006/main" showMasterSp="0" matchingName="Section Header">
+  <p:cSld name="1_Section Header">
+    <p:bg>
+      <p:bgPr>
+        <a:solidFill>
+          <a:srgbClr val="221F20"/>
+        </a:solidFill>
+        <a:effectLst/>
+      </p:bgPr>
+    </p:bg>
+    <p:spTree>
+      <p:nvGrpSpPr>
+        <p:cNvPr id="1" name="Shape 276"/>
+        <p:cNvGrpSpPr/>
+        <p:nvPr/>
+      </p:nvGrpSpPr>
+      <p:grpSpPr>
+        <a:xfrm>
+          <a:off x="0" y="0"/>
+          <a:ext cx="0" cy="0"/>
+          <a:chOff x="0" y="0"/>
+          <a:chExt cx="0" cy="0"/>
+        </a:xfrm>
+      </p:grpSpPr>
+      <p:sp>
+        <p:nvSpPr>
+          <p:cNvPr id="277" name="Google Shape;277;p21"/>
+          <p:cNvSpPr txBox="1">
+            <a:spLocks noGrp="1"/>
+          </p:cNvSpPr>
+          <p:nvPr>
+            <p:ph type="title"/>
+          </p:nvPr>
+        </p:nvSpPr>
+        <p:spPr>
+          <a:xfrm>
+            <a:off x="548640" y="411482"/>
+            <a:ext cx="8231293" cy="1189037"/>
+          </a:xfrm>
+          <a:prstGeom prst="rect">
+            <a:avLst/>
+          </a:prstGeom>
+          <a:noFill/>
+          <a:ln>
+            <a:noFill/>
+          </a:ln>
+        </p:spPr>
+        <p:txBody>
+          <a:bodyPr spcFirstLastPara="1" wrap="square" lIns="0" tIns="0" rIns="0" bIns="0" anchor="t" anchorCtr="0">
+            <a:noAutofit/>
+          </a:bodyPr>
+          <a:lstStyle>
+            <a:lvl1pPr lvl="0" algn="l">
+              <a:lnSpc>
+                <a:spcPct val="80000"/>
+              </a:lnSpc>
+              <a:spcBef>
+                <a:spcPts val="0"/>
+              </a:spcBef>
+              <a:spcAft>
+                <a:spcPts val="0"/>
+              </a:spcAft>
+              <a:buClr>
+                <a:schemeClr val="lt2"/>
+              </a:buClr>
+              <a:buSzPts val="3000"/>
+              <a:buFont typeface="Arial"/>
+              <a:buNone/>
+              <a:defRPr sz="4000">
+                <a:solidFill>
+                  <a:schemeClr val="lt2"/>
+                </a:solidFill>
+              </a:defRPr>
+            </a:lvl1pPr>
+            <a:lvl2pPr lvl="1">
+              <a:spcBef>
+                <a:spcPts val="0"/>
+              </a:spcBef>
+              <a:spcAft>
+                <a:spcPts val="0"/>
+              </a:spcAft>
+              <a:buSzPts val="1400"/>
+              <a:buNone/>
+              <a:defRPr/>
+            </a:lvl2pPr>
+            <a:lvl3pPr lvl="2">
+              <a:spcBef>
+                <a:spcPts val="0"/>
+              </a:spcBef>
+              <a:spcAft>
+                <a:spcPts val="0"/>
+              </a:spcAft>
+              <a:buSzPts val="1400"/>
+              <a:buNone/>
+              <a:defRPr/>
+            </a:lvl3pPr>
+            <a:lvl4pPr lvl="3">
+              <a:spcBef>
+                <a:spcPts val="0"/>
+              </a:spcBef>
+              <a:spcAft>
+                <a:spcPts val="0"/>
+              </a:spcAft>
+              <a:buSzPts val="1400"/>
+              <a:buNone/>
+              <a:defRPr/>
+            </a:lvl4pPr>
+            <a:lvl5pPr lvl="4">
+              <a:spcBef>
+                <a:spcPts val="0"/>
+              </a:spcBef>
+              <a:spcAft>
+                <a:spcPts val="0"/>
+              </a:spcAft>
+              <a:buSzPts val="1400"/>
+              <a:buNone/>
+              <a:defRPr/>
+            </a:lvl5pPr>
+            <a:lvl6pPr lvl="5">
+              <a:spcBef>
+                <a:spcPts val="0"/>
+              </a:spcBef>
+              <a:spcAft>
+                <a:spcPts val="0"/>
+              </a:spcAft>
+              <a:buSzPts val="1400"/>
+              <a:buNone/>
+              <a:defRPr/>
+            </a:lvl6pPr>
+            <a:lvl7pPr lvl="6">
+              <a:spcBef>
+                <a:spcPts val="0"/>
+              </a:spcBef>
+              <a:spcAft>
+                <a:spcPts val="0"/>
+              </a:spcAft>
+              <a:buSzPts val="1400"/>
+              <a:buNone/>
+              <a:defRPr/>
+            </a:lvl7pPr>
+            <a:lvl8pPr lvl="7">
+              <a:spcBef>
+                <a:spcPts val="0"/>
+              </a:spcBef>
+              <a:spcAft>
+                <a:spcPts val="0"/>
+              </a:spcAft>
+              <a:buSzPts val="1400"/>
+              <a:buNone/>
+              <a:defRPr/>
+            </a:lvl8pPr>
+            <a:lvl9pPr lvl="8">
+              <a:spcBef>
+                <a:spcPts val="0"/>
+              </a:spcBef>
+              <a:spcAft>
+                <a:spcPts val="0"/>
+              </a:spcAft>
+              <a:buSzPts val="1400"/>
+              <a:buNone/>
+              <a:defRPr/>
+            </a:lvl9pPr>
+          </a:lstStyle>
+          <a:p>
+            <a:endParaRPr/>
+          </a:p>
+        </p:txBody>
+      </p:sp>
+      <p:sp>
+        <p:nvSpPr>
+          <p:cNvPr id="278" name="Google Shape;278;p21"/>
+          <p:cNvSpPr txBox="1">
+            <a:spLocks noGrp="1"/>
+          </p:cNvSpPr>
+          <p:nvPr>
+            <p:ph type="body" idx="1"/>
+          </p:nvPr>
+        </p:nvSpPr>
+        <p:spPr>
+          <a:xfrm>
+            <a:off x="548640" y="2148840"/>
+            <a:ext cx="6795135" cy="4023360"/>
+          </a:xfrm>
+          <a:prstGeom prst="rect">
+            <a:avLst/>
+          </a:prstGeom>
+          <a:noFill/>
+          <a:ln>
+            <a:noFill/>
+          </a:ln>
+        </p:spPr>
+        <p:txBody>
+          <a:bodyPr spcFirstLastPara="1" wrap="square" lIns="0" tIns="0" rIns="0" bIns="0" anchor="t" anchorCtr="0">
+            <a:noAutofit/>
+          </a:bodyPr>
+          <a:lstStyle>
+            <a:lvl1pPr marL="609585" lvl="0" indent="-304792" algn="l">
+              <a:lnSpc>
+                <a:spcPct val="95000"/>
+              </a:lnSpc>
+              <a:spcBef>
+                <a:spcPts val="0"/>
+              </a:spcBef>
+              <a:spcAft>
+                <a:spcPts val="0"/>
+              </a:spcAft>
+              <a:buClr>
+                <a:schemeClr val="lt1"/>
+              </a:buClr>
+              <a:buSzPts val="2100"/>
+              <a:buFont typeface="Arial"/>
+              <a:buNone/>
+              <a:defRPr sz="2800"/>
+            </a:lvl1pPr>
+            <a:lvl2pPr marL="1219170" lvl="1" indent="-412739" algn="l">
+              <a:lnSpc>
+                <a:spcPct val="95000"/>
+              </a:lnSpc>
+              <a:spcBef>
+                <a:spcPts val="1000"/>
+              </a:spcBef>
+              <a:spcAft>
+                <a:spcPts val="0"/>
+              </a:spcAft>
+              <a:buClr>
+                <a:schemeClr val="lt1"/>
+              </a:buClr>
+              <a:buSzPts val="1275"/>
+              <a:buFont typeface="Arial"/>
+              <a:buChar char="▪"/>
+              <a:defRPr/>
+            </a:lvl2pPr>
+            <a:lvl3pPr marL="1828754" lvl="2" indent="-412739" algn="l">
+              <a:lnSpc>
+                <a:spcPct val="95000"/>
+              </a:lnSpc>
+              <a:spcBef>
+                <a:spcPts val="500"/>
+              </a:spcBef>
+              <a:spcAft>
+                <a:spcPts val="0"/>
+              </a:spcAft>
+              <a:buClr>
+                <a:schemeClr val="lt1"/>
+              </a:buClr>
+              <a:buSzPts val="1275"/>
+              <a:buChar char="–"/>
+              <a:defRPr/>
+            </a:lvl3pPr>
+            <a:lvl4pPr marL="2438339" lvl="3" indent="-412739" algn="l">
+              <a:lnSpc>
+                <a:spcPct val="95000"/>
+              </a:lnSpc>
+              <a:spcBef>
+                <a:spcPts val="500"/>
+              </a:spcBef>
+              <a:spcAft>
+                <a:spcPts val="0"/>
+              </a:spcAft>
+              <a:buClr>
+                <a:schemeClr val="lt1"/>
+              </a:buClr>
+              <a:buSzPts val="1275"/>
+              <a:buChar char="–"/>
+              <a:defRPr/>
+            </a:lvl4pPr>
+            <a:lvl5pPr marL="3047924" lvl="4" indent="-412739" algn="l">
+              <a:lnSpc>
+                <a:spcPct val="95000"/>
+              </a:lnSpc>
+              <a:spcBef>
+                <a:spcPts val="500"/>
+              </a:spcBef>
+              <a:spcAft>
+                <a:spcPts val="0"/>
+              </a:spcAft>
+              <a:buClr>
+                <a:schemeClr val="lt1"/>
+              </a:buClr>
+              <a:buSzPts val="1275"/>
+              <a:buChar char="–"/>
+              <a:defRPr/>
+            </a:lvl5pPr>
+            <a:lvl6pPr marL="3657509" lvl="5" indent="-412739" algn="l">
+              <a:lnSpc>
+                <a:spcPct val="95000"/>
+              </a:lnSpc>
+              <a:spcBef>
+                <a:spcPts val="500"/>
+              </a:spcBef>
+              <a:spcAft>
+                <a:spcPts val="0"/>
+              </a:spcAft>
+              <a:buClr>
+                <a:schemeClr val="lt1"/>
+              </a:buClr>
+              <a:buSzPts val="1275"/>
+              <a:buChar char="–"/>
+              <a:defRPr/>
+            </a:lvl6pPr>
+            <a:lvl7pPr marL="4267093" lvl="6" indent="-412739" algn="l">
+              <a:lnSpc>
+                <a:spcPct val="95000"/>
+              </a:lnSpc>
+              <a:spcBef>
+                <a:spcPts val="500"/>
+              </a:spcBef>
+              <a:spcAft>
+                <a:spcPts val="0"/>
+              </a:spcAft>
+              <a:buClr>
+                <a:schemeClr val="lt1"/>
+              </a:buClr>
+              <a:buSzPts val="1275"/>
+              <a:buChar char="–"/>
+              <a:defRPr/>
+            </a:lvl7pPr>
+            <a:lvl8pPr marL="4876678" lvl="7" indent="-412739" algn="l">
+              <a:lnSpc>
+                <a:spcPct val="95000"/>
+              </a:lnSpc>
+              <a:spcBef>
+                <a:spcPts val="500"/>
+              </a:spcBef>
+              <a:spcAft>
+                <a:spcPts val="0"/>
+              </a:spcAft>
+              <a:buClr>
+                <a:schemeClr val="lt1"/>
+              </a:buClr>
+              <a:buSzPts val="1275"/>
+              <a:buChar char="–"/>
+              <a:defRPr/>
+            </a:lvl8pPr>
+            <a:lvl9pPr marL="5486263" lvl="8" indent="-412739" algn="l">
+              <a:lnSpc>
+                <a:spcPct val="95000"/>
+              </a:lnSpc>
+              <a:spcBef>
+                <a:spcPts val="500"/>
+              </a:spcBef>
+              <a:spcAft>
+                <a:spcPts val="0"/>
+              </a:spcAft>
+              <a:buClr>
+                <a:schemeClr val="lt1"/>
+              </a:buClr>
+              <a:buSzPts val="1275"/>
+              <a:buChar char="–"/>
+              <a:defRPr/>
+            </a:lvl9pPr>
+          </a:lstStyle>
+          <a:p>
+            <a:endParaRPr/>
+          </a:p>
+        </p:txBody>
+      </p:sp>
+      <p:sp>
+        <p:nvSpPr>
+          <p:cNvPr id="279" name="Google Shape;279;p21"/>
+          <p:cNvSpPr txBox="1">
+            <a:spLocks noGrp="1"/>
+          </p:cNvSpPr>
+          <p:nvPr>
+            <p:ph type="dt" idx="10"/>
+          </p:nvPr>
+        </p:nvSpPr>
+        <p:spPr>
+          <a:xfrm>
+            <a:off x="547688" y="6629400"/>
+            <a:ext cx="823912" cy="228600"/>
+          </a:xfrm>
+          <a:prstGeom prst="rect">
+            <a:avLst/>
+          </a:prstGeom>
+          <a:noFill/>
+          <a:ln>
+            <a:noFill/>
+          </a:ln>
+        </p:spPr>
+        <p:txBody>
+          <a:bodyPr spcFirstLastPara="1" wrap="square" lIns="0" tIns="45700" rIns="0" bIns="45700" anchor="b" anchorCtr="0">
+            <a:noAutofit/>
+          </a:bodyPr>
+          <a:lstStyle>
+            <a:lvl1pPr lvl="0" algn="l">
+              <a:spcBef>
+                <a:spcPts val="0"/>
+              </a:spcBef>
+              <a:spcAft>
+                <a:spcPts val="0"/>
+              </a:spcAft>
+              <a:buSzPts val="1400"/>
+              <a:buNone/>
+              <a:defRPr/>
+            </a:lvl1pPr>
+            <a:lvl2pPr lvl="1" algn="l">
+              <a:spcBef>
+                <a:spcPts val="0"/>
+              </a:spcBef>
+              <a:spcAft>
+                <a:spcPts val="0"/>
+              </a:spcAft>
+              <a:buSzPts val="1400"/>
+              <a:buNone/>
+              <a:defRPr/>
+            </a:lvl2pPr>
+            <a:lvl3pPr lvl="2" algn="l">
+              <a:spcBef>
+                <a:spcPts val="0"/>
+              </a:spcBef>
+              <a:spcAft>
+                <a:spcPts val="0"/>
+              </a:spcAft>
+              <a:buSzPts val="1400"/>
+              <a:buNone/>
+              <a:defRPr/>
+            </a:lvl3pPr>
+            <a:lvl4pPr lvl="3" algn="l">
+              <a:spcBef>
+                <a:spcPts val="0"/>
+              </a:spcBef>
+              <a:spcAft>
+                <a:spcPts val="0"/>
+              </a:spcAft>
+              <a:buSzPts val="1400"/>
+              <a:buNone/>
+              <a:defRPr/>
+            </a:lvl4pPr>
+            <a:lvl5pPr lvl="4" algn="l">
+              <a:spcBef>
+                <a:spcPts val="0"/>
+              </a:spcBef>
+              <a:spcAft>
+                <a:spcPts val="0"/>
+              </a:spcAft>
+              <a:buSzPts val="1400"/>
+              <a:buNone/>
+              <a:defRPr/>
+            </a:lvl5pPr>
+            <a:lvl6pPr lvl="5" algn="l">
+              <a:spcBef>
+                <a:spcPts val="0"/>
+              </a:spcBef>
+              <a:spcAft>
+                <a:spcPts val="0"/>
+              </a:spcAft>
+              <a:buSzPts val="1400"/>
+              <a:buNone/>
+              <a:defRPr/>
+            </a:lvl6pPr>
+            <a:lvl7pPr lvl="6" algn="l">
+              <a:spcBef>
+                <a:spcPts val="0"/>
+              </a:spcBef>
+              <a:spcAft>
+                <a:spcPts val="0"/>
+              </a:spcAft>
+              <a:buSzPts val="1400"/>
+              <a:buNone/>
+              <a:defRPr/>
+            </a:lvl7pPr>
+            <a:lvl8pPr lvl="7" algn="l">
+              <a:spcBef>
+                <a:spcPts val="0"/>
+              </a:spcBef>
+              <a:spcAft>
+                <a:spcPts val="0"/>
+              </a:spcAft>
+              <a:buSzPts val="1400"/>
+              <a:buNone/>
+              <a:defRPr/>
+            </a:lvl8pPr>
+            <a:lvl9pPr lvl="8" algn="l">
+              <a:spcBef>
+                <a:spcPts val="0"/>
+              </a:spcBef>
+              <a:spcAft>
+                <a:spcPts val="0"/>
+              </a:spcAft>
+              <a:buSzPts val="1400"/>
+              <a:buNone/>
+              <a:defRPr/>
+            </a:lvl9pPr>
+          </a:lstStyle>
+          <a:p>
+            <a:endParaRPr/>
+          </a:p>
+        </p:txBody>
+      </p:sp>
+      <p:sp>
+        <p:nvSpPr>
+          <p:cNvPr id="280" name="Google Shape;280;p21"/>
+          <p:cNvSpPr txBox="1">
+            <a:spLocks noGrp="1"/>
+          </p:cNvSpPr>
+          <p:nvPr>
+            <p:ph type="sldNum" idx="12"/>
+          </p:nvPr>
+        </p:nvSpPr>
+        <p:spPr>
+          <a:xfrm>
+            <a:off x="11210717" y="6629400"/>
+            <a:ext cx="442001" cy="228600"/>
+          </a:xfrm>
+          <a:prstGeom prst="rect">
+            <a:avLst/>
+          </a:prstGeom>
+          <a:noFill/>
+          <a:ln>
+            <a:noFill/>
+          </a:ln>
+        </p:spPr>
+        <p:txBody>
+          <a:bodyPr spcFirstLastPara="1" wrap="square" lIns="0" tIns="45700" rIns="0" bIns="45700" anchor="b" anchorCtr="0">
+            <a:noAutofit/>
+          </a:bodyPr>
+          <a:lstStyle>
+            <a:lvl1pPr marL="0" lvl="0" indent="0" algn="r">
+              <a:spcBef>
+                <a:spcPts val="0"/>
+              </a:spcBef>
+              <a:spcAft>
+                <a:spcPts val="0"/>
+              </a:spcAft>
+              <a:buClr>
+                <a:schemeClr val="lt1"/>
+              </a:buClr>
+              <a:buSzPts val="500"/>
+              <a:buFont typeface="Arial"/>
+              <a:buNone/>
+              <a:defRPr/>
+            </a:lvl1pPr>
+            <a:lvl2pPr marL="0" lvl="1" indent="0" algn="r">
+              <a:spcBef>
+                <a:spcPts val="0"/>
+              </a:spcBef>
+              <a:spcAft>
+                <a:spcPts val="0"/>
+              </a:spcAft>
+              <a:buClr>
+                <a:schemeClr val="lt1"/>
+              </a:buClr>
+              <a:buSzPts val="500"/>
+              <a:buFont typeface="Arial"/>
+              <a:buNone/>
+              <a:defRPr/>
+            </a:lvl2pPr>
+            <a:lvl3pPr marL="0" lvl="2" indent="0" algn="r">
+              <a:spcBef>
+                <a:spcPts val="0"/>
+              </a:spcBef>
+              <a:spcAft>
+                <a:spcPts val="0"/>
+              </a:spcAft>
+              <a:buClr>
+                <a:schemeClr val="lt1"/>
+              </a:buClr>
+              <a:buSzPts val="500"/>
+              <a:buFont typeface="Arial"/>
+              <a:buNone/>
+              <a:defRPr/>
+            </a:lvl3pPr>
+            <a:lvl4pPr marL="0" lvl="3" indent="0" algn="r">
+              <a:spcBef>
+                <a:spcPts val="0"/>
+              </a:spcBef>
+              <a:spcAft>
+                <a:spcPts val="0"/>
+              </a:spcAft>
+              <a:buClr>
+                <a:schemeClr val="lt1"/>
+              </a:buClr>
+              <a:buSzPts val="500"/>
+              <a:buFont typeface="Arial"/>
+              <a:buNone/>
+              <a:defRPr/>
+            </a:lvl4pPr>
+            <a:lvl5pPr marL="0" lvl="4" indent="0" algn="r">
+              <a:spcBef>
+                <a:spcPts val="0"/>
+              </a:spcBef>
+              <a:spcAft>
+                <a:spcPts val="0"/>
+              </a:spcAft>
+              <a:buClr>
+                <a:schemeClr val="lt1"/>
+              </a:buClr>
+              <a:buSzPts val="500"/>
+              <a:buFont typeface="Arial"/>
+              <a:buNone/>
+              <a:defRPr/>
+            </a:lvl5pPr>
+            <a:lvl6pPr marL="0" lvl="5" indent="0" algn="r">
+              <a:spcBef>
+                <a:spcPts val="0"/>
+              </a:spcBef>
+              <a:spcAft>
+                <a:spcPts val="0"/>
+              </a:spcAft>
+              <a:buClr>
+                <a:schemeClr val="lt1"/>
+              </a:buClr>
+              <a:buSzPts val="500"/>
+              <a:buFont typeface="Arial"/>
+              <a:buNone/>
+              <a:defRPr/>
+            </a:lvl6pPr>
+            <a:lvl7pPr marL="0" lvl="6" indent="0" algn="r">
+              <a:spcBef>
+                <a:spcPts val="0"/>
+              </a:spcBef>
+              <a:spcAft>
+                <a:spcPts val="0"/>
+              </a:spcAft>
+              <a:buClr>
+                <a:schemeClr val="lt1"/>
+              </a:buClr>
+              <a:buSzPts val="500"/>
+              <a:buFont typeface="Arial"/>
+              <a:buNone/>
+              <a:defRPr/>
+            </a:lvl7pPr>
+            <a:lvl8pPr marL="0" lvl="7" indent="0" algn="r">
+              <a:spcBef>
+                <a:spcPts val="0"/>
+              </a:spcBef>
+              <a:spcAft>
+                <a:spcPts val="0"/>
+              </a:spcAft>
+              <a:buClr>
+                <a:schemeClr val="lt1"/>
+              </a:buClr>
+              <a:buSzPts val="500"/>
+              <a:buFont typeface="Arial"/>
+              <a:buNone/>
+              <a:defRPr/>
+            </a:lvl8pPr>
+            <a:lvl9pPr marL="0" lvl="8" indent="0" algn="r">
+              <a:spcBef>
+                <a:spcPts val="0"/>
+              </a:spcBef>
+              <a:spcAft>
+                <a:spcPts val="0"/>
+              </a:spcAft>
+              <a:buClr>
+                <a:schemeClr val="lt1"/>
+              </a:buClr>
+              <a:buSzPts val="500"/>
+              <a:buFont typeface="Arial"/>
+              <a:buNone/>
+              <a:defRPr/>
+            </a:lvl9pPr>
+          </a:lstStyle>
+          <a:p>
+            <a:fld id="{00000000-1234-1234-1234-123412341234}" type="slidenum">
+              <a:rPr lang="en" smtClean="0"/>
+              <a:pPr/>
+              <a:t>‹#›</a:t>
+            </a:fld>
+            <a:endParaRPr lang="en"/>
+          </a:p>
+        </p:txBody>
+      </p:sp>
+      <p:pic>
+        <p:nvPicPr>
+          <p:cNvPr id="283" name="Google Shape;283;p21"/>
+          <p:cNvPicPr preferRelativeResize="0"/>
+          <p:nvPr/>
+        </p:nvPicPr>
+        <p:blipFill rotWithShape="1">
+          <a:blip r:embed="rId2">
+            <a:alphaModFix/>
+          </a:blip>
+          <a:srcRect/>
+          <a:stretch/>
+        </p:blipFill>
+        <p:spPr>
+          <a:xfrm>
+            <a:off x="10004616" y="411163"/>
+            <a:ext cx="1629707" cy="478023"/>
+          </a:xfrm>
+          <a:prstGeom prst="rect">
+            <a:avLst/>
+          </a:prstGeom>
+          <a:noFill/>
+          <a:ln>
+            <a:noFill/>
+          </a:ln>
+        </p:spPr>
+      </p:pic>
+    </p:spTree>
+    <p:extLst>
+      <p:ext uri="{BB962C8B-B14F-4D97-AF65-F5344CB8AC3E}">
+        <p14:creationId xmlns:p14="http://schemas.microsoft.com/office/powerpoint/2010/main" val="3091597697"/>
+      </p:ext>
+    </p:extLst>
+  </p:cSld>
+  <p:clrMapOvr>
+    <a:masterClrMapping/>
+  </p:clrMapOvr>
+  <p:extLst>
+    <p:ext uri="{DCECCB84-F9BA-43D5-87BE-67443E8EF086}">
+      <p15:sldGuideLst xmlns:p15="http://schemas.microsoft.com/office/powerpoint/2012/main">
+        <p15:guide id="1" orient="horz" pos="1354">
+          <p15:clr>
+            <a:srgbClr val="A4A3A4"/>
+          </p15:clr>
+        </p15:guide>
+        <p15:guide id="2" orient="horz" pos="3888">
+          <p15:clr>
+            <a:srgbClr val="A4A3A4"/>
+          </p15:clr>
+        </p15:guide>
+      </p15:sldGuideLst>
+    </p:ext>
+  </p:extLst>
 </p:sldLayout>
 </file>
 
@@ -17135,7 +18373,7 @@
           <a:p>
             <a:fld id="{AD622D1A-DF83-41A8-85FF-04D90BF831D3}" type="datetime3">
               <a:rPr lang="en-US" smtClean="0"/>
-              <a:t>23 December 2025</a:t>
+              <a:t>22 June 2026</a:t>
             </a:fld>
             <a:endParaRPr lang="en-US"/>
           </a:p>
@@ -17385,7 +18623,7 @@
           <a:p>
             <a:fld id="{334F72C3-CDF3-44A8-B602-1649B1728485}" type="datetime3">
               <a:rPr lang="en-US" smtClean="0"/>
-              <a:t>23 December 2025</a:t>
+              <a:t>22 June 2026</a:t>
             </a:fld>
             <a:endParaRPr lang="en-US"/>
           </a:p>
@@ -17692,7 +18930,7 @@
           <a:p>
             <a:fld id="{1E0132BA-B5E7-4FFD-AF6C-169169D47D4A}" type="datetime3">
               <a:rPr lang="en-US" smtClean="0"/>
-              <a:t>23 December 2025</a:t>
+              <a:t>22 June 2026</a:t>
             </a:fld>
             <a:endParaRPr lang="en-US"/>
           </a:p>
@@ -18173,7 +19411,7 @@
           <a:p>
             <a:fld id="{81A30091-1C2A-4151-8D3C-D1E47A72615F}" type="datetime3">
               <a:rPr lang="en-US" smtClean="0"/>
-              <a:t>23 December 2025</a:t>
+              <a:t>22 June 2026</a:t>
             </a:fld>
             <a:endParaRPr lang="en-US"/>
           </a:p>
@@ -18810,7 +20048,7 @@
           <a:p>
             <a:fld id="{35D703CE-07B4-4C05-A488-B4566700621F}" type="datetime3">
               <a:rPr lang="en-US" smtClean="0"/>
-              <a:t>23 December 2025</a:t>
+              <a:t>22 June 2026</a:t>
             </a:fld>
             <a:endParaRPr lang="en-US"/>
           </a:p>
@@ -19868,7 +21106,7 @@
           <a:p>
             <a:fld id="{694BD61C-20BA-43AF-A21F-1DAFB3200099}" type="datetime3">
               <a:rPr lang="en-US" smtClean="0"/>
-              <a:t>23 December 2025</a:t>
+              <a:t>22 June 2026</a:t>
             </a:fld>
             <a:endParaRPr lang="en-US"/>
           </a:p>
@@ -20103,7 +21341,7 @@
           <p:nvPr userDrawn="1"/>
         </p:nvPicPr>
         <p:blipFill>
-          <a:blip r:embed="rId34"/>
+          <a:blip r:embed="rId35"/>
           <a:srcRect l="26274" t="67"/>
           <a:stretch>
             <a:fillRect/>
@@ -20355,7 +21593,7 @@
           <a:p>
             <a:fld id="{CABCB1B0-B6E5-4DD1-BB55-95C076D6C0C8}" type="datetime3">
               <a:rPr lang="en-US" smtClean="0"/>
-              <a:t>23 December 2025</a:t>
+              <a:t>22 June 2026</a:t>
             </a:fld>
             <a:endParaRPr lang="en-US"/>
           </a:p>
@@ -20422,7 +21660,7 @@
           <p:nvPr userDrawn="1"/>
         </p:nvPicPr>
         <p:blipFill>
-          <a:blip r:embed="rId35"/>
+          <a:blip r:embed="rId36"/>
           <a:stretch>
             <a:fillRect/>
           </a:stretch>
@@ -20478,6 +21716,7 @@
     <p:sldLayoutId id="2147483690" r:id="rId30"/>
     <p:sldLayoutId id="2147483691" r:id="rId31"/>
     <p:sldLayoutId id="2147483692" r:id="rId32"/>
+    <p:sldLayoutId id="2147483693" r:id="rId33"/>
   </p:sldLayoutIdLst>
   <p:hf hdr="0"/>
   <p:txStyles>
@@ -21225,6 +22464,2427 @@
   <p:cSld>
     <p:spTree>
       <p:nvGrpSpPr>
+        <p:cNvPr id="1" name="">
+          <a:extLst>
+            <a:ext uri="{FF2B5EF4-FFF2-40B4-BE49-F238E27FC236}">
+              <a16:creationId xmlns:a16="http://schemas.microsoft.com/office/drawing/2014/main" id="{CA6C9053-3BA7-4689-91DA-53BA32F2788D}"/>
+            </a:ext>
+          </a:extLst>
+        </p:cNvPr>
+        <p:cNvGrpSpPr/>
+        <p:nvPr/>
+      </p:nvGrpSpPr>
+      <p:grpSpPr>
+        <a:xfrm>
+          <a:off x="0" y="0"/>
+          <a:ext cx="0" cy="0"/>
+          <a:chOff x="0" y="0"/>
+          <a:chExt cx="0" cy="0"/>
+        </a:xfrm>
+      </p:grpSpPr>
+      <p:sp>
+        <p:nvSpPr>
+          <p:cNvPr id="2" name="Title 1">
+            <a:extLst>
+              <a:ext uri="{FF2B5EF4-FFF2-40B4-BE49-F238E27FC236}">
+                <a16:creationId xmlns:a16="http://schemas.microsoft.com/office/drawing/2014/main" id="{D967FADC-A473-4437-B98E-A54159E58ADA}"/>
+              </a:ext>
+            </a:extLst>
+          </p:cNvPr>
+          <p:cNvSpPr>
+            <a:spLocks noGrp="1"/>
+          </p:cNvSpPr>
+          <p:nvPr>
+            <p:ph type="title"/>
+          </p:nvPr>
+        </p:nvSpPr>
+        <p:spPr/>
+        <p:txBody>
+          <a:bodyPr/>
+          <a:lstStyle/>
+          <a:p>
+            <a:r>
+              <a:rPr lang="en-US" dirty="0"/>
+              <a:t>Initializing Lists</a:t>
+            </a:r>
+          </a:p>
+        </p:txBody>
+      </p:sp>
+      <p:sp>
+        <p:nvSpPr>
+          <p:cNvPr id="7" name="TextBox 6">
+            <a:extLst>
+              <a:ext uri="{FF2B5EF4-FFF2-40B4-BE49-F238E27FC236}">
+                <a16:creationId xmlns:a16="http://schemas.microsoft.com/office/drawing/2014/main" id="{7E9C9183-4CF2-2C57-D8E4-2AB6AE7813E7}"/>
+              </a:ext>
+            </a:extLst>
+          </p:cNvPr>
+          <p:cNvSpPr txBox="1"/>
+          <p:nvPr/>
+        </p:nvSpPr>
+        <p:spPr>
+          <a:xfrm>
+            <a:off x="873493" y="1277675"/>
+            <a:ext cx="6097604" cy="1477328"/>
+          </a:xfrm>
+          <a:prstGeom prst="rect">
+            <a:avLst/>
+          </a:prstGeom>
+          <a:noFill/>
+        </p:spPr>
+        <p:txBody>
+          <a:bodyPr wrap="square">
+            <a:spAutoFit/>
+          </a:bodyPr>
+          <a:lstStyle/>
+          <a:p>
+            <a:r>
+              <a:rPr lang="en-US" dirty="0"/>
+              <a:t># Empty list</a:t>
+            </a:r>
+          </a:p>
+          <a:p>
+            <a:r>
+              <a:rPr lang="en-US" dirty="0" err="1"/>
+              <a:t>my_list</a:t>
+            </a:r>
+            <a:r>
+              <a:rPr lang="en-US" dirty="0"/>
+              <a:t> = []</a:t>
+            </a:r>
+          </a:p>
+          <a:p>
+            <a:r>
+              <a:rPr lang="en-US" dirty="0" err="1"/>
+              <a:t>my_list</a:t>
+            </a:r>
+            <a:r>
+              <a:rPr lang="en-US" dirty="0"/>
+              <a:t> = list()</a:t>
+            </a:r>
+          </a:p>
+          <a:p>
+            <a:endParaRPr lang="en-US" dirty="0"/>
+          </a:p>
+          <a:p>
+            <a:endParaRPr lang="en-US" dirty="0"/>
+          </a:p>
+        </p:txBody>
+      </p:sp>
+      <p:sp>
+        <p:nvSpPr>
+          <p:cNvPr id="9" name="TextBox 8">
+            <a:extLst>
+              <a:ext uri="{FF2B5EF4-FFF2-40B4-BE49-F238E27FC236}">
+                <a16:creationId xmlns:a16="http://schemas.microsoft.com/office/drawing/2014/main" id="{C0A3BA37-A210-F85E-A06E-8980DAAF79EF}"/>
+              </a:ext>
+            </a:extLst>
+          </p:cNvPr>
+          <p:cNvSpPr txBox="1"/>
+          <p:nvPr/>
+        </p:nvSpPr>
+        <p:spPr>
+          <a:xfrm>
+            <a:off x="873493" y="2380192"/>
+            <a:ext cx="6097604" cy="1200329"/>
+          </a:xfrm>
+          <a:prstGeom prst="rect">
+            <a:avLst/>
+          </a:prstGeom>
+          <a:noFill/>
+        </p:spPr>
+        <p:txBody>
+          <a:bodyPr wrap="square">
+            <a:spAutoFit/>
+          </a:bodyPr>
+          <a:lstStyle/>
+          <a:p>
+            <a:r>
+              <a:rPr lang="en-US" dirty="0"/>
+              <a:t># With values</a:t>
+            </a:r>
+          </a:p>
+          <a:p>
+            <a:r>
+              <a:rPr lang="en-US" dirty="0" err="1"/>
+              <a:t>my_list</a:t>
+            </a:r>
+            <a:r>
+              <a:rPr lang="en-US" dirty="0"/>
+              <a:t> = [1, 2, 3]</a:t>
+            </a:r>
+          </a:p>
+          <a:p>
+            <a:endParaRPr lang="en-US" dirty="0"/>
+          </a:p>
+          <a:p>
+            <a:endParaRPr lang="en-US" dirty="0"/>
+          </a:p>
+        </p:txBody>
+      </p:sp>
+      <p:sp>
+        <p:nvSpPr>
+          <p:cNvPr id="11" name="TextBox 10">
+            <a:extLst>
+              <a:ext uri="{FF2B5EF4-FFF2-40B4-BE49-F238E27FC236}">
+                <a16:creationId xmlns:a16="http://schemas.microsoft.com/office/drawing/2014/main" id="{1F2FF212-E770-B425-1D93-B1B9601CD17E}"/>
+              </a:ext>
+            </a:extLst>
+          </p:cNvPr>
+          <p:cNvSpPr txBox="1"/>
+          <p:nvPr/>
+        </p:nvSpPr>
+        <p:spPr>
+          <a:xfrm>
+            <a:off x="873493" y="3364334"/>
+            <a:ext cx="6097604" cy="1477328"/>
+          </a:xfrm>
+          <a:prstGeom prst="rect">
+            <a:avLst/>
+          </a:prstGeom>
+          <a:noFill/>
+        </p:spPr>
+        <p:txBody>
+          <a:bodyPr wrap="square">
+            <a:spAutoFit/>
+          </a:bodyPr>
+          <a:lstStyle/>
+          <a:p>
+            <a:r>
+              <a:rPr lang="en-US" dirty="0"/>
+              <a:t># From another </a:t>
+            </a:r>
+            <a:r>
+              <a:rPr lang="en-US" dirty="0" err="1"/>
+              <a:t>iterable</a:t>
+            </a:r>
+            <a:endParaRPr lang="en-US" dirty="0"/>
+          </a:p>
+          <a:p>
+            <a:r>
+              <a:rPr lang="en-US" dirty="0" err="1"/>
+              <a:t>my_list</a:t>
+            </a:r>
+            <a:r>
+              <a:rPr lang="en-US" dirty="0"/>
+              <a:t> = list("hello")        # ['h', 'e', 'l', 'l', 'o']</a:t>
+            </a:r>
+          </a:p>
+          <a:p>
+            <a:r>
+              <a:rPr lang="en-US" dirty="0" err="1"/>
+              <a:t>my_list</a:t>
+            </a:r>
+            <a:r>
+              <a:rPr lang="en-US" dirty="0"/>
+              <a:t> = list((1, 2, 3))      # [1, 2, 3]  (from a tuple)</a:t>
+            </a:r>
+          </a:p>
+          <a:p>
+            <a:r>
+              <a:rPr lang="en-US" dirty="0" err="1"/>
+              <a:t>my_list</a:t>
+            </a:r>
+            <a:r>
+              <a:rPr lang="en-US" dirty="0"/>
+              <a:t> = list(range(5))       # [0, 1, 2, 3, 4]</a:t>
+            </a:r>
+          </a:p>
+          <a:p>
+            <a:endParaRPr lang="en-US" dirty="0"/>
+          </a:p>
+        </p:txBody>
+      </p:sp>
+      <p:sp>
+        <p:nvSpPr>
+          <p:cNvPr id="13" name="TextBox 12">
+            <a:extLst>
+              <a:ext uri="{FF2B5EF4-FFF2-40B4-BE49-F238E27FC236}">
+                <a16:creationId xmlns:a16="http://schemas.microsoft.com/office/drawing/2014/main" id="{C87170AB-0615-06E2-F05B-73F418AE8775}"/>
+              </a:ext>
+            </a:extLst>
+          </p:cNvPr>
+          <p:cNvSpPr txBox="1"/>
+          <p:nvPr/>
+        </p:nvSpPr>
+        <p:spPr>
+          <a:xfrm>
+            <a:off x="873493" y="4760040"/>
+            <a:ext cx="6097604" cy="923330"/>
+          </a:xfrm>
+          <a:prstGeom prst="rect">
+            <a:avLst/>
+          </a:prstGeom>
+          <a:noFill/>
+        </p:spPr>
+        <p:txBody>
+          <a:bodyPr wrap="square">
+            <a:spAutoFit/>
+          </a:bodyPr>
+          <a:lstStyle/>
+          <a:p>
+            <a:r>
+              <a:rPr lang="en-US" dirty="0"/>
+              <a:t># List comprehension</a:t>
+            </a:r>
+          </a:p>
+          <a:p>
+            <a:r>
+              <a:rPr lang="en-US" dirty="0" err="1"/>
+              <a:t>my_list</a:t>
+            </a:r>
+            <a:r>
+              <a:rPr lang="en-US" dirty="0"/>
+              <a:t> = [x * 2 for x in range(5)]   # [0, 2, 4, 6, 8]</a:t>
+            </a:r>
+          </a:p>
+          <a:p>
+            <a:endParaRPr lang="en-US" dirty="0"/>
+          </a:p>
+        </p:txBody>
+      </p:sp>
+      <p:sp>
+        <p:nvSpPr>
+          <p:cNvPr id="15" name="TextBox 14">
+            <a:extLst>
+              <a:ext uri="{FF2B5EF4-FFF2-40B4-BE49-F238E27FC236}">
+                <a16:creationId xmlns:a16="http://schemas.microsoft.com/office/drawing/2014/main" id="{E9A5A065-1C4A-16AE-7FAF-FEB554543234}"/>
+              </a:ext>
+            </a:extLst>
+          </p:cNvPr>
+          <p:cNvSpPr txBox="1"/>
+          <p:nvPr/>
+        </p:nvSpPr>
+        <p:spPr>
+          <a:xfrm>
+            <a:off x="873493" y="5683370"/>
+            <a:ext cx="6097604" cy="646331"/>
+          </a:xfrm>
+          <a:prstGeom prst="rect">
+            <a:avLst/>
+          </a:prstGeom>
+          <a:noFill/>
+        </p:spPr>
+        <p:txBody>
+          <a:bodyPr wrap="square">
+            <a:spAutoFit/>
+          </a:bodyPr>
+          <a:lstStyle/>
+          <a:p>
+            <a:r>
+              <a:rPr lang="en-US" dirty="0"/>
+              <a:t># Repeated values</a:t>
+            </a:r>
+          </a:p>
+          <a:p>
+            <a:r>
+              <a:rPr lang="en-US" dirty="0" err="1"/>
+              <a:t>my_list</a:t>
+            </a:r>
+            <a:r>
+              <a:rPr lang="en-US" dirty="0"/>
+              <a:t> = [0] * 5              # [0, 0, 0, 0, 0]</a:t>
+            </a:r>
+          </a:p>
+        </p:txBody>
+      </p:sp>
+    </p:spTree>
+    <p:extLst>
+      <p:ext uri="{BB962C8B-B14F-4D97-AF65-F5344CB8AC3E}">
+        <p14:creationId xmlns:p14="http://schemas.microsoft.com/office/powerpoint/2010/main" val="1788262769"/>
+      </p:ext>
+    </p:extLst>
+  </p:cSld>
+  <p:clrMapOvr>
+    <a:masterClrMapping/>
+  </p:clrMapOvr>
+  <p:timing>
+    <p:tnLst>
+      <p:par>
+        <p:cTn id="1" dur="indefinite" restart="never" nodeType="tmRoot">
+          <p:childTnLst>
+            <p:seq concurrent="1" nextAc="seek">
+              <p:cTn id="2" dur="indefinite" nodeType="mainSeq">
+                <p:childTnLst>
+                  <p:par>
+                    <p:cTn id="3" fill="hold">
+                      <p:stCondLst>
+                        <p:cond delay="indefinite"/>
+                      </p:stCondLst>
+                      <p:childTnLst>
+                        <p:par>
+                          <p:cTn id="4" fill="hold">
+                            <p:stCondLst>
+                              <p:cond delay="0"/>
+                            </p:stCondLst>
+                            <p:childTnLst>
+                              <p:par>
+                                <p:cTn id="5" presetID="1" presetClass="entr" presetSubtype="0" fill="hold" grpId="0" nodeType="clickEffect">
+                                  <p:stCondLst>
+                                    <p:cond delay="0"/>
+                                  </p:stCondLst>
+                                  <p:childTnLst>
+                                    <p:set>
+                                      <p:cBhvr>
+                                        <p:cTn id="6" dur="1" fill="hold">
+                                          <p:stCondLst>
+                                            <p:cond delay="0"/>
+                                          </p:stCondLst>
+                                        </p:cTn>
+                                        <p:tgtEl>
+                                          <p:spTgt spid="7"/>
+                                        </p:tgtEl>
+                                        <p:attrNameLst>
+                                          <p:attrName>style.visibility</p:attrName>
+                                        </p:attrNameLst>
+                                      </p:cBhvr>
+                                      <p:to>
+                                        <p:strVal val="visible"/>
+                                      </p:to>
+                                    </p:set>
+                                  </p:childTnLst>
+                                </p:cTn>
+                              </p:par>
+                            </p:childTnLst>
+                          </p:cTn>
+                        </p:par>
+                      </p:childTnLst>
+                    </p:cTn>
+                  </p:par>
+                  <p:par>
+                    <p:cTn id="7" fill="hold">
+                      <p:stCondLst>
+                        <p:cond delay="indefinite"/>
+                      </p:stCondLst>
+                      <p:childTnLst>
+                        <p:par>
+                          <p:cTn id="8" fill="hold">
+                            <p:stCondLst>
+                              <p:cond delay="0"/>
+                            </p:stCondLst>
+                            <p:childTnLst>
+                              <p:par>
+                                <p:cTn id="9" presetID="1" presetClass="entr" presetSubtype="0" fill="hold" grpId="0" nodeType="clickEffect">
+                                  <p:stCondLst>
+                                    <p:cond delay="0"/>
+                                  </p:stCondLst>
+                                  <p:childTnLst>
+                                    <p:set>
+                                      <p:cBhvr>
+                                        <p:cTn id="10" dur="1" fill="hold">
+                                          <p:stCondLst>
+                                            <p:cond delay="0"/>
+                                          </p:stCondLst>
+                                        </p:cTn>
+                                        <p:tgtEl>
+                                          <p:spTgt spid="9"/>
+                                        </p:tgtEl>
+                                        <p:attrNameLst>
+                                          <p:attrName>style.visibility</p:attrName>
+                                        </p:attrNameLst>
+                                      </p:cBhvr>
+                                      <p:to>
+                                        <p:strVal val="visible"/>
+                                      </p:to>
+                                    </p:set>
+                                  </p:childTnLst>
+                                </p:cTn>
+                              </p:par>
+                            </p:childTnLst>
+                          </p:cTn>
+                        </p:par>
+                      </p:childTnLst>
+                    </p:cTn>
+                  </p:par>
+                  <p:par>
+                    <p:cTn id="11" fill="hold">
+                      <p:stCondLst>
+                        <p:cond delay="indefinite"/>
+                      </p:stCondLst>
+                      <p:childTnLst>
+                        <p:par>
+                          <p:cTn id="12" fill="hold">
+                            <p:stCondLst>
+                              <p:cond delay="0"/>
+                            </p:stCondLst>
+                            <p:childTnLst>
+                              <p:par>
+                                <p:cTn id="13" presetID="1" presetClass="entr" presetSubtype="0" fill="hold" grpId="0" nodeType="clickEffect">
+                                  <p:stCondLst>
+                                    <p:cond delay="0"/>
+                                  </p:stCondLst>
+                                  <p:childTnLst>
+                                    <p:set>
+                                      <p:cBhvr>
+                                        <p:cTn id="14" dur="1" fill="hold">
+                                          <p:stCondLst>
+                                            <p:cond delay="0"/>
+                                          </p:stCondLst>
+                                        </p:cTn>
+                                        <p:tgtEl>
+                                          <p:spTgt spid="11"/>
+                                        </p:tgtEl>
+                                        <p:attrNameLst>
+                                          <p:attrName>style.visibility</p:attrName>
+                                        </p:attrNameLst>
+                                      </p:cBhvr>
+                                      <p:to>
+                                        <p:strVal val="visible"/>
+                                      </p:to>
+                                    </p:set>
+                                  </p:childTnLst>
+                                </p:cTn>
+                              </p:par>
+                            </p:childTnLst>
+                          </p:cTn>
+                        </p:par>
+                      </p:childTnLst>
+                    </p:cTn>
+                  </p:par>
+                  <p:par>
+                    <p:cTn id="15" fill="hold">
+                      <p:stCondLst>
+                        <p:cond delay="indefinite"/>
+                      </p:stCondLst>
+                      <p:childTnLst>
+                        <p:par>
+                          <p:cTn id="16" fill="hold">
+                            <p:stCondLst>
+                              <p:cond delay="0"/>
+                            </p:stCondLst>
+                            <p:childTnLst>
+                              <p:par>
+                                <p:cTn id="17" presetID="1" presetClass="entr" presetSubtype="0" fill="hold" grpId="0" nodeType="clickEffect">
+                                  <p:stCondLst>
+                                    <p:cond delay="0"/>
+                                  </p:stCondLst>
+                                  <p:childTnLst>
+                                    <p:set>
+                                      <p:cBhvr>
+                                        <p:cTn id="18" dur="1" fill="hold">
+                                          <p:stCondLst>
+                                            <p:cond delay="0"/>
+                                          </p:stCondLst>
+                                        </p:cTn>
+                                        <p:tgtEl>
+                                          <p:spTgt spid="13"/>
+                                        </p:tgtEl>
+                                        <p:attrNameLst>
+                                          <p:attrName>style.visibility</p:attrName>
+                                        </p:attrNameLst>
+                                      </p:cBhvr>
+                                      <p:to>
+                                        <p:strVal val="visible"/>
+                                      </p:to>
+                                    </p:set>
+                                  </p:childTnLst>
+                                </p:cTn>
+                              </p:par>
+                            </p:childTnLst>
+                          </p:cTn>
+                        </p:par>
+                      </p:childTnLst>
+                    </p:cTn>
+                  </p:par>
+                  <p:par>
+                    <p:cTn id="19" fill="hold">
+                      <p:stCondLst>
+                        <p:cond delay="indefinite"/>
+                      </p:stCondLst>
+                      <p:childTnLst>
+                        <p:par>
+                          <p:cTn id="20" fill="hold">
+                            <p:stCondLst>
+                              <p:cond delay="0"/>
+                            </p:stCondLst>
+                            <p:childTnLst>
+                              <p:par>
+                                <p:cTn id="21" presetID="1" presetClass="entr" presetSubtype="0" fill="hold" grpId="0" nodeType="clickEffect">
+                                  <p:stCondLst>
+                                    <p:cond delay="0"/>
+                                  </p:stCondLst>
+                                  <p:childTnLst>
+                                    <p:set>
+                                      <p:cBhvr>
+                                        <p:cTn id="22" dur="1" fill="hold">
+                                          <p:stCondLst>
+                                            <p:cond delay="0"/>
+                                          </p:stCondLst>
+                                        </p:cTn>
+                                        <p:tgtEl>
+                                          <p:spTgt spid="15"/>
+                                        </p:tgtEl>
+                                        <p:attrNameLst>
+                                          <p:attrName>style.visibility</p:attrName>
+                                        </p:attrNameLst>
+                                      </p:cBhvr>
+                                      <p:to>
+                                        <p:strVal val="visible"/>
+                                      </p:to>
+                                    </p:set>
+                                  </p:childTnLst>
+                                </p:cTn>
+                              </p:par>
+                            </p:childTnLst>
+                          </p:cTn>
+                        </p:par>
+                      </p:childTnLst>
+                    </p:cTn>
+                  </p:par>
+                </p:childTnLst>
+              </p:cTn>
+              <p:prevCondLst>
+                <p:cond evt="onPrev" delay="0">
+                  <p:tgtEl>
+                    <p:sldTgt/>
+                  </p:tgtEl>
+                </p:cond>
+              </p:prevCondLst>
+              <p:nextCondLst>
+                <p:cond evt="onNext" delay="0">
+                  <p:tgtEl>
+                    <p:sldTgt/>
+                  </p:tgtEl>
+                </p:cond>
+              </p:nextCondLst>
+            </p:seq>
+          </p:childTnLst>
+        </p:cTn>
+      </p:par>
+    </p:tnLst>
+    <p:bldLst>
+      <p:bldP spid="7" grpId="0"/>
+      <p:bldP spid="9" grpId="0"/>
+      <p:bldP spid="11" grpId="0"/>
+      <p:bldP spid="13" grpId="0"/>
+      <p:bldP spid="15" grpId="0"/>
+    </p:bldLst>
+  </p:timing>
+</p:sld>
+</file>
+
+<file path=ppt/slides/slide11.xml><?xml version="1.0" encoding="utf-8"?>
+<p:sld xmlns:a="http://schemas.openxmlformats.org/drawingml/2006/main" xmlns:r="http://schemas.openxmlformats.org/officeDocument/2006/relationships" xmlns:p="http://schemas.openxmlformats.org/presentationml/2006/main">
+  <p:cSld>
+    <p:spTree>
+      <p:nvGrpSpPr>
+        <p:cNvPr id="1" name="">
+          <a:extLst>
+            <a:ext uri="{FF2B5EF4-FFF2-40B4-BE49-F238E27FC236}">
+              <a16:creationId xmlns:a16="http://schemas.microsoft.com/office/drawing/2014/main" id="{95E0D2DD-08CD-D892-FC09-8012B904E49F}"/>
+            </a:ext>
+          </a:extLst>
+        </p:cNvPr>
+        <p:cNvGrpSpPr/>
+        <p:nvPr/>
+      </p:nvGrpSpPr>
+      <p:grpSpPr>
+        <a:xfrm>
+          <a:off x="0" y="0"/>
+          <a:ext cx="0" cy="0"/>
+          <a:chOff x="0" y="0"/>
+          <a:chExt cx="0" cy="0"/>
+        </a:xfrm>
+      </p:grpSpPr>
+      <p:sp>
+        <p:nvSpPr>
+          <p:cNvPr id="2" name="Title 1">
+            <a:extLst>
+              <a:ext uri="{FF2B5EF4-FFF2-40B4-BE49-F238E27FC236}">
+                <a16:creationId xmlns:a16="http://schemas.microsoft.com/office/drawing/2014/main" id="{AF52B93B-3316-AA40-8EEC-110DC4815B8B}"/>
+              </a:ext>
+            </a:extLst>
+          </p:cNvPr>
+          <p:cNvSpPr>
+            <a:spLocks noGrp="1"/>
+          </p:cNvSpPr>
+          <p:nvPr>
+            <p:ph type="title"/>
+          </p:nvPr>
+        </p:nvSpPr>
+        <p:spPr/>
+        <p:txBody>
+          <a:bodyPr/>
+          <a:lstStyle/>
+          <a:p>
+            <a:r>
+              <a:rPr lang="en-US" dirty="0"/>
+              <a:t>Initializing TUPLES</a:t>
+            </a:r>
+          </a:p>
+        </p:txBody>
+      </p:sp>
+      <p:sp>
+        <p:nvSpPr>
+          <p:cNvPr id="4" name="TextBox 3">
+            <a:extLst>
+              <a:ext uri="{FF2B5EF4-FFF2-40B4-BE49-F238E27FC236}">
+                <a16:creationId xmlns:a16="http://schemas.microsoft.com/office/drawing/2014/main" id="{5653488E-E6D4-8785-85F1-4EE90C3C7549}"/>
+              </a:ext>
+            </a:extLst>
+          </p:cNvPr>
+          <p:cNvSpPr txBox="1"/>
+          <p:nvPr/>
+        </p:nvSpPr>
+        <p:spPr>
+          <a:xfrm>
+            <a:off x="548640" y="1223451"/>
+            <a:ext cx="6097604" cy="1200329"/>
+          </a:xfrm>
+          <a:prstGeom prst="rect">
+            <a:avLst/>
+          </a:prstGeom>
+          <a:noFill/>
+        </p:spPr>
+        <p:txBody>
+          <a:bodyPr wrap="square">
+            <a:spAutoFit/>
+          </a:bodyPr>
+          <a:lstStyle/>
+          <a:p>
+            <a:r>
+              <a:rPr lang="en-US" dirty="0"/>
+              <a:t># Empty tuple</a:t>
+            </a:r>
+          </a:p>
+          <a:p>
+            <a:r>
+              <a:rPr lang="en-US" dirty="0" err="1"/>
+              <a:t>my_tuple</a:t>
+            </a:r>
+            <a:r>
+              <a:rPr lang="en-US" dirty="0"/>
+              <a:t> = ()</a:t>
+            </a:r>
+          </a:p>
+          <a:p>
+            <a:r>
+              <a:rPr lang="en-US" dirty="0" err="1"/>
+              <a:t>my_tuple</a:t>
+            </a:r>
+            <a:r>
+              <a:rPr lang="en-US" dirty="0"/>
+              <a:t> = tuple()</a:t>
+            </a:r>
+          </a:p>
+          <a:p>
+            <a:endParaRPr lang="en-US" dirty="0"/>
+          </a:p>
+        </p:txBody>
+      </p:sp>
+      <p:sp>
+        <p:nvSpPr>
+          <p:cNvPr id="6" name="TextBox 5">
+            <a:extLst>
+              <a:ext uri="{FF2B5EF4-FFF2-40B4-BE49-F238E27FC236}">
+                <a16:creationId xmlns:a16="http://schemas.microsoft.com/office/drawing/2014/main" id="{AB9AA283-2046-FB97-A3A7-3EECA30EFD57}"/>
+              </a:ext>
+            </a:extLst>
+          </p:cNvPr>
+          <p:cNvSpPr txBox="1"/>
+          <p:nvPr/>
+        </p:nvSpPr>
+        <p:spPr>
+          <a:xfrm>
+            <a:off x="548640" y="2423780"/>
+            <a:ext cx="6097604" cy="923330"/>
+          </a:xfrm>
+          <a:prstGeom prst="rect">
+            <a:avLst/>
+          </a:prstGeom>
+          <a:noFill/>
+        </p:spPr>
+        <p:txBody>
+          <a:bodyPr wrap="square">
+            <a:spAutoFit/>
+          </a:bodyPr>
+          <a:lstStyle/>
+          <a:p>
+            <a:r>
+              <a:rPr lang="en-US" dirty="0"/>
+              <a:t># With values</a:t>
+            </a:r>
+          </a:p>
+          <a:p>
+            <a:r>
+              <a:rPr lang="en-US" dirty="0" err="1"/>
+              <a:t>my_tuple</a:t>
+            </a:r>
+            <a:r>
+              <a:rPr lang="en-US" dirty="0"/>
+              <a:t> = (1, 2, 3)</a:t>
+            </a:r>
+          </a:p>
+          <a:p>
+            <a:endParaRPr lang="en-US" dirty="0"/>
+          </a:p>
+        </p:txBody>
+      </p:sp>
+      <p:sp>
+        <p:nvSpPr>
+          <p:cNvPr id="10" name="TextBox 9">
+            <a:extLst>
+              <a:ext uri="{FF2B5EF4-FFF2-40B4-BE49-F238E27FC236}">
+                <a16:creationId xmlns:a16="http://schemas.microsoft.com/office/drawing/2014/main" id="{5136A6A9-4D4A-8264-6D0B-5009D29CFB4F}"/>
+              </a:ext>
+            </a:extLst>
+          </p:cNvPr>
+          <p:cNvSpPr txBox="1"/>
+          <p:nvPr/>
+        </p:nvSpPr>
+        <p:spPr>
+          <a:xfrm>
+            <a:off x="548640" y="3374382"/>
+            <a:ext cx="6097604" cy="923330"/>
+          </a:xfrm>
+          <a:prstGeom prst="rect">
+            <a:avLst/>
+          </a:prstGeom>
+          <a:noFill/>
+        </p:spPr>
+        <p:txBody>
+          <a:bodyPr wrap="square">
+            <a:spAutoFit/>
+          </a:bodyPr>
+          <a:lstStyle/>
+          <a:p>
+            <a:r>
+              <a:rPr lang="en-US" dirty="0"/>
+              <a:t># Parentheses are actually optional</a:t>
+            </a:r>
+          </a:p>
+          <a:p>
+            <a:r>
+              <a:rPr lang="en-US" dirty="0" err="1"/>
+              <a:t>my_tuple</a:t>
+            </a:r>
+            <a:r>
+              <a:rPr lang="en-US" dirty="0"/>
+              <a:t> = 1, 2, 3             # (1, 2, 3)</a:t>
+            </a:r>
+          </a:p>
+          <a:p>
+            <a:endParaRPr lang="en-US" dirty="0"/>
+          </a:p>
+        </p:txBody>
+      </p:sp>
+      <p:sp>
+        <p:nvSpPr>
+          <p:cNvPr id="14" name="TextBox 13">
+            <a:extLst>
+              <a:ext uri="{FF2B5EF4-FFF2-40B4-BE49-F238E27FC236}">
+                <a16:creationId xmlns:a16="http://schemas.microsoft.com/office/drawing/2014/main" id="{0609B7BB-7250-7390-EE3F-979E92830AE2}"/>
+              </a:ext>
+            </a:extLst>
+          </p:cNvPr>
+          <p:cNvSpPr txBox="1"/>
+          <p:nvPr/>
+        </p:nvSpPr>
+        <p:spPr>
+          <a:xfrm>
+            <a:off x="548640" y="4158279"/>
+            <a:ext cx="6097604" cy="1200329"/>
+          </a:xfrm>
+          <a:prstGeom prst="rect">
+            <a:avLst/>
+          </a:prstGeom>
+          <a:noFill/>
+        </p:spPr>
+        <p:txBody>
+          <a:bodyPr wrap="square">
+            <a:spAutoFit/>
+          </a:bodyPr>
+          <a:lstStyle/>
+          <a:p>
+            <a:r>
+              <a:rPr lang="en-US" dirty="0"/>
+              <a:t># Single item (trailing comma is required!)</a:t>
+            </a:r>
+          </a:p>
+          <a:p>
+            <a:r>
+              <a:rPr lang="en-US" dirty="0" err="1"/>
+              <a:t>my_tuple</a:t>
+            </a:r>
+            <a:r>
+              <a:rPr lang="en-US" dirty="0"/>
+              <a:t> = (5,)                # (5,)  ✅</a:t>
+            </a:r>
+          </a:p>
+          <a:p>
+            <a:r>
+              <a:rPr lang="en-US" dirty="0" err="1"/>
+              <a:t>my_tuple</a:t>
+            </a:r>
+            <a:r>
+              <a:rPr lang="en-US" dirty="0"/>
+              <a:t> = (5)                 # 5     ❌ this is just an integer</a:t>
+            </a:r>
+          </a:p>
+          <a:p>
+            <a:endParaRPr lang="en-US" dirty="0"/>
+          </a:p>
+        </p:txBody>
+      </p:sp>
+      <p:sp>
+        <p:nvSpPr>
+          <p:cNvPr id="17" name="TextBox 16">
+            <a:extLst>
+              <a:ext uri="{FF2B5EF4-FFF2-40B4-BE49-F238E27FC236}">
+                <a16:creationId xmlns:a16="http://schemas.microsoft.com/office/drawing/2014/main" id="{7DBB1E0A-FD56-0F7B-B7B6-C4D080B4DD12}"/>
+              </a:ext>
+            </a:extLst>
+          </p:cNvPr>
+          <p:cNvSpPr txBox="1"/>
+          <p:nvPr/>
+        </p:nvSpPr>
+        <p:spPr>
+          <a:xfrm>
+            <a:off x="548640" y="5279333"/>
+            <a:ext cx="6097604" cy="1200329"/>
+          </a:xfrm>
+          <a:prstGeom prst="rect">
+            <a:avLst/>
+          </a:prstGeom>
+          <a:noFill/>
+        </p:spPr>
+        <p:txBody>
+          <a:bodyPr wrap="square">
+            <a:spAutoFit/>
+          </a:bodyPr>
+          <a:lstStyle/>
+          <a:p>
+            <a:r>
+              <a:rPr lang="en-US" dirty="0"/>
+              <a:t># From another </a:t>
+            </a:r>
+            <a:r>
+              <a:rPr lang="en-US" dirty="0" err="1"/>
+              <a:t>iterable</a:t>
+            </a:r>
+            <a:endParaRPr lang="en-US" dirty="0"/>
+          </a:p>
+          <a:p>
+            <a:r>
+              <a:rPr lang="en-US" dirty="0" err="1"/>
+              <a:t>my_tuple</a:t>
+            </a:r>
+            <a:r>
+              <a:rPr lang="en-US" dirty="0"/>
+              <a:t> = tuple("hello")      # ('h', 'e', 'l', 'l', 'o')</a:t>
+            </a:r>
+          </a:p>
+          <a:p>
+            <a:r>
+              <a:rPr lang="en-US" dirty="0" err="1"/>
+              <a:t>my_tuple</a:t>
+            </a:r>
+            <a:r>
+              <a:rPr lang="en-US" dirty="0"/>
+              <a:t> = tuple([1, 2, 3])    # (1, 2, 3)  (from a list)</a:t>
+            </a:r>
+          </a:p>
+          <a:p>
+            <a:r>
+              <a:rPr lang="en-US" dirty="0" err="1"/>
+              <a:t>my_tuple</a:t>
+            </a:r>
+            <a:r>
+              <a:rPr lang="en-US" dirty="0"/>
+              <a:t> = tuple(range(5))     # (0, 1, 2, 3, 4)</a:t>
+            </a:r>
+          </a:p>
+        </p:txBody>
+      </p:sp>
+    </p:spTree>
+    <p:extLst>
+      <p:ext uri="{BB962C8B-B14F-4D97-AF65-F5344CB8AC3E}">
+        <p14:creationId xmlns:p14="http://schemas.microsoft.com/office/powerpoint/2010/main" val="2996942615"/>
+      </p:ext>
+    </p:extLst>
+  </p:cSld>
+  <p:clrMapOvr>
+    <a:masterClrMapping/>
+  </p:clrMapOvr>
+  <p:timing>
+    <p:tnLst>
+      <p:par>
+        <p:cTn id="1" dur="indefinite" restart="never" nodeType="tmRoot">
+          <p:childTnLst>
+            <p:seq concurrent="1" nextAc="seek">
+              <p:cTn id="2" dur="indefinite" nodeType="mainSeq">
+                <p:childTnLst>
+                  <p:par>
+                    <p:cTn id="3" fill="hold">
+                      <p:stCondLst>
+                        <p:cond delay="indefinite"/>
+                      </p:stCondLst>
+                      <p:childTnLst>
+                        <p:par>
+                          <p:cTn id="4" fill="hold">
+                            <p:stCondLst>
+                              <p:cond delay="0"/>
+                            </p:stCondLst>
+                            <p:childTnLst>
+                              <p:par>
+                                <p:cTn id="5" presetID="1" presetClass="entr" presetSubtype="0" fill="hold" grpId="0" nodeType="clickEffect">
+                                  <p:stCondLst>
+                                    <p:cond delay="0"/>
+                                  </p:stCondLst>
+                                  <p:childTnLst>
+                                    <p:set>
+                                      <p:cBhvr>
+                                        <p:cTn id="6" dur="1" fill="hold">
+                                          <p:stCondLst>
+                                            <p:cond delay="0"/>
+                                          </p:stCondLst>
+                                        </p:cTn>
+                                        <p:tgtEl>
+                                          <p:spTgt spid="4"/>
+                                        </p:tgtEl>
+                                        <p:attrNameLst>
+                                          <p:attrName>style.visibility</p:attrName>
+                                        </p:attrNameLst>
+                                      </p:cBhvr>
+                                      <p:to>
+                                        <p:strVal val="visible"/>
+                                      </p:to>
+                                    </p:set>
+                                  </p:childTnLst>
+                                </p:cTn>
+                              </p:par>
+                            </p:childTnLst>
+                          </p:cTn>
+                        </p:par>
+                      </p:childTnLst>
+                    </p:cTn>
+                  </p:par>
+                  <p:par>
+                    <p:cTn id="7" fill="hold">
+                      <p:stCondLst>
+                        <p:cond delay="indefinite"/>
+                      </p:stCondLst>
+                      <p:childTnLst>
+                        <p:par>
+                          <p:cTn id="8" fill="hold">
+                            <p:stCondLst>
+                              <p:cond delay="0"/>
+                            </p:stCondLst>
+                            <p:childTnLst>
+                              <p:par>
+                                <p:cTn id="9" presetID="1" presetClass="entr" presetSubtype="0" fill="hold" grpId="0" nodeType="clickEffect">
+                                  <p:stCondLst>
+                                    <p:cond delay="0"/>
+                                  </p:stCondLst>
+                                  <p:childTnLst>
+                                    <p:set>
+                                      <p:cBhvr>
+                                        <p:cTn id="10" dur="1" fill="hold">
+                                          <p:stCondLst>
+                                            <p:cond delay="0"/>
+                                          </p:stCondLst>
+                                        </p:cTn>
+                                        <p:tgtEl>
+                                          <p:spTgt spid="6"/>
+                                        </p:tgtEl>
+                                        <p:attrNameLst>
+                                          <p:attrName>style.visibility</p:attrName>
+                                        </p:attrNameLst>
+                                      </p:cBhvr>
+                                      <p:to>
+                                        <p:strVal val="visible"/>
+                                      </p:to>
+                                    </p:set>
+                                  </p:childTnLst>
+                                </p:cTn>
+                              </p:par>
+                            </p:childTnLst>
+                          </p:cTn>
+                        </p:par>
+                      </p:childTnLst>
+                    </p:cTn>
+                  </p:par>
+                  <p:par>
+                    <p:cTn id="11" fill="hold">
+                      <p:stCondLst>
+                        <p:cond delay="indefinite"/>
+                      </p:stCondLst>
+                      <p:childTnLst>
+                        <p:par>
+                          <p:cTn id="12" fill="hold">
+                            <p:stCondLst>
+                              <p:cond delay="0"/>
+                            </p:stCondLst>
+                            <p:childTnLst>
+                              <p:par>
+                                <p:cTn id="13" presetID="1" presetClass="entr" presetSubtype="0" fill="hold" grpId="0" nodeType="clickEffect">
+                                  <p:stCondLst>
+                                    <p:cond delay="0"/>
+                                  </p:stCondLst>
+                                  <p:childTnLst>
+                                    <p:set>
+                                      <p:cBhvr>
+                                        <p:cTn id="14" dur="1" fill="hold">
+                                          <p:stCondLst>
+                                            <p:cond delay="0"/>
+                                          </p:stCondLst>
+                                        </p:cTn>
+                                        <p:tgtEl>
+                                          <p:spTgt spid="10"/>
+                                        </p:tgtEl>
+                                        <p:attrNameLst>
+                                          <p:attrName>style.visibility</p:attrName>
+                                        </p:attrNameLst>
+                                      </p:cBhvr>
+                                      <p:to>
+                                        <p:strVal val="visible"/>
+                                      </p:to>
+                                    </p:set>
+                                  </p:childTnLst>
+                                </p:cTn>
+                              </p:par>
+                            </p:childTnLst>
+                          </p:cTn>
+                        </p:par>
+                      </p:childTnLst>
+                    </p:cTn>
+                  </p:par>
+                  <p:par>
+                    <p:cTn id="15" fill="hold">
+                      <p:stCondLst>
+                        <p:cond delay="indefinite"/>
+                      </p:stCondLst>
+                      <p:childTnLst>
+                        <p:par>
+                          <p:cTn id="16" fill="hold">
+                            <p:stCondLst>
+                              <p:cond delay="0"/>
+                            </p:stCondLst>
+                            <p:childTnLst>
+                              <p:par>
+                                <p:cTn id="17" presetID="1" presetClass="entr" presetSubtype="0" fill="hold" grpId="0" nodeType="clickEffect">
+                                  <p:stCondLst>
+                                    <p:cond delay="0"/>
+                                  </p:stCondLst>
+                                  <p:childTnLst>
+                                    <p:set>
+                                      <p:cBhvr>
+                                        <p:cTn id="18" dur="1" fill="hold">
+                                          <p:stCondLst>
+                                            <p:cond delay="0"/>
+                                          </p:stCondLst>
+                                        </p:cTn>
+                                        <p:tgtEl>
+                                          <p:spTgt spid="14"/>
+                                        </p:tgtEl>
+                                        <p:attrNameLst>
+                                          <p:attrName>style.visibility</p:attrName>
+                                        </p:attrNameLst>
+                                      </p:cBhvr>
+                                      <p:to>
+                                        <p:strVal val="visible"/>
+                                      </p:to>
+                                    </p:set>
+                                  </p:childTnLst>
+                                </p:cTn>
+                              </p:par>
+                            </p:childTnLst>
+                          </p:cTn>
+                        </p:par>
+                      </p:childTnLst>
+                    </p:cTn>
+                  </p:par>
+                  <p:par>
+                    <p:cTn id="19" fill="hold">
+                      <p:stCondLst>
+                        <p:cond delay="indefinite"/>
+                      </p:stCondLst>
+                      <p:childTnLst>
+                        <p:par>
+                          <p:cTn id="20" fill="hold">
+                            <p:stCondLst>
+                              <p:cond delay="0"/>
+                            </p:stCondLst>
+                            <p:childTnLst>
+                              <p:par>
+                                <p:cTn id="21" presetID="1" presetClass="entr" presetSubtype="0" fill="hold" grpId="0" nodeType="clickEffect">
+                                  <p:stCondLst>
+                                    <p:cond delay="0"/>
+                                  </p:stCondLst>
+                                  <p:childTnLst>
+                                    <p:set>
+                                      <p:cBhvr>
+                                        <p:cTn id="22" dur="1" fill="hold">
+                                          <p:stCondLst>
+                                            <p:cond delay="0"/>
+                                          </p:stCondLst>
+                                        </p:cTn>
+                                        <p:tgtEl>
+                                          <p:spTgt spid="17"/>
+                                        </p:tgtEl>
+                                        <p:attrNameLst>
+                                          <p:attrName>style.visibility</p:attrName>
+                                        </p:attrNameLst>
+                                      </p:cBhvr>
+                                      <p:to>
+                                        <p:strVal val="visible"/>
+                                      </p:to>
+                                    </p:set>
+                                  </p:childTnLst>
+                                </p:cTn>
+                              </p:par>
+                            </p:childTnLst>
+                          </p:cTn>
+                        </p:par>
+                      </p:childTnLst>
+                    </p:cTn>
+                  </p:par>
+                </p:childTnLst>
+              </p:cTn>
+              <p:prevCondLst>
+                <p:cond evt="onPrev" delay="0">
+                  <p:tgtEl>
+                    <p:sldTgt/>
+                  </p:tgtEl>
+                </p:cond>
+              </p:prevCondLst>
+              <p:nextCondLst>
+                <p:cond evt="onNext" delay="0">
+                  <p:tgtEl>
+                    <p:sldTgt/>
+                  </p:tgtEl>
+                </p:cond>
+              </p:nextCondLst>
+            </p:seq>
+          </p:childTnLst>
+        </p:cTn>
+      </p:par>
+    </p:tnLst>
+    <p:bldLst>
+      <p:bldP spid="4" grpId="0"/>
+      <p:bldP spid="6" grpId="0"/>
+      <p:bldP spid="10" grpId="0"/>
+      <p:bldP spid="14" grpId="0"/>
+      <p:bldP spid="17" grpId="0"/>
+    </p:bldLst>
+  </p:timing>
+</p:sld>
+</file>
+
+<file path=ppt/slides/slide12.xml><?xml version="1.0" encoding="utf-8"?>
+<p:sld xmlns:a="http://schemas.openxmlformats.org/drawingml/2006/main" xmlns:r="http://schemas.openxmlformats.org/officeDocument/2006/relationships" xmlns:p="http://schemas.openxmlformats.org/presentationml/2006/main">
+  <p:cSld>
+    <p:spTree>
+      <p:nvGrpSpPr>
+        <p:cNvPr id="1" name="">
+          <a:extLst>
+            <a:ext uri="{FF2B5EF4-FFF2-40B4-BE49-F238E27FC236}">
+              <a16:creationId xmlns:a16="http://schemas.microsoft.com/office/drawing/2014/main" id="{BDFC6BFE-A35B-EE92-3045-F70894EC50D9}"/>
+            </a:ext>
+          </a:extLst>
+        </p:cNvPr>
+        <p:cNvGrpSpPr/>
+        <p:nvPr/>
+      </p:nvGrpSpPr>
+      <p:grpSpPr>
+        <a:xfrm>
+          <a:off x="0" y="0"/>
+          <a:ext cx="0" cy="0"/>
+          <a:chOff x="0" y="0"/>
+          <a:chExt cx="0" cy="0"/>
+        </a:xfrm>
+      </p:grpSpPr>
+      <p:sp>
+        <p:nvSpPr>
+          <p:cNvPr id="2" name="Title 1">
+            <a:extLst>
+              <a:ext uri="{FF2B5EF4-FFF2-40B4-BE49-F238E27FC236}">
+                <a16:creationId xmlns:a16="http://schemas.microsoft.com/office/drawing/2014/main" id="{86869B43-812E-17E6-2E93-BBCEC1D5FC4B}"/>
+              </a:ext>
+            </a:extLst>
+          </p:cNvPr>
+          <p:cNvSpPr>
+            <a:spLocks noGrp="1"/>
+          </p:cNvSpPr>
+          <p:nvPr>
+            <p:ph type="title"/>
+          </p:nvPr>
+        </p:nvSpPr>
+        <p:spPr/>
+        <p:txBody>
+          <a:bodyPr/>
+          <a:lstStyle/>
+          <a:p>
+            <a:r>
+              <a:rPr lang="en-US" dirty="0"/>
+              <a:t>A NOTE ABOUT LISTS</a:t>
+            </a:r>
+          </a:p>
+        </p:txBody>
+      </p:sp>
+      <p:sp>
+        <p:nvSpPr>
+          <p:cNvPr id="5" name="TextBox 4">
+            <a:extLst>
+              <a:ext uri="{FF2B5EF4-FFF2-40B4-BE49-F238E27FC236}">
+                <a16:creationId xmlns:a16="http://schemas.microsoft.com/office/drawing/2014/main" id="{2CB20226-8296-5EAF-B028-288D546D5CF8}"/>
+              </a:ext>
+            </a:extLst>
+          </p:cNvPr>
+          <p:cNvSpPr txBox="1"/>
+          <p:nvPr/>
+        </p:nvSpPr>
+        <p:spPr>
+          <a:xfrm>
+            <a:off x="777240" y="1443841"/>
+            <a:ext cx="6097604" cy="2246769"/>
+          </a:xfrm>
+          <a:prstGeom prst="rect">
+            <a:avLst/>
+          </a:prstGeom>
+          <a:noFill/>
+        </p:spPr>
+        <p:txBody>
+          <a:bodyPr wrap="square">
+            <a:spAutoFit/>
+          </a:bodyPr>
+          <a:lstStyle/>
+          <a:p>
+            <a:r>
+              <a:rPr lang="en-US" sz="2800" dirty="0" err="1"/>
+              <a:t>my_list</a:t>
+            </a:r>
+            <a:r>
+              <a:rPr lang="en-US" sz="2800" dirty="0"/>
+              <a:t> = [1, 2, 3]</a:t>
+            </a:r>
+          </a:p>
+          <a:p>
+            <a:r>
+              <a:rPr lang="en-US" sz="2800" dirty="0" err="1"/>
+              <a:t>second_list</a:t>
+            </a:r>
+            <a:r>
+              <a:rPr lang="en-US" sz="2800" dirty="0"/>
+              <a:t> = </a:t>
+            </a:r>
+            <a:r>
+              <a:rPr lang="en-US" sz="2800" dirty="0" err="1"/>
+              <a:t>my_list</a:t>
+            </a:r>
+            <a:endParaRPr lang="en-US" sz="2800" dirty="0"/>
+          </a:p>
+          <a:p>
+            <a:endParaRPr lang="en-US" sz="2800" dirty="0"/>
+          </a:p>
+          <a:p>
+            <a:r>
+              <a:rPr lang="en-US" sz="2800" dirty="0" err="1"/>
+              <a:t>second_list</a:t>
+            </a:r>
+            <a:r>
+              <a:rPr lang="en-US" sz="2800" dirty="0"/>
+              <a:t>[0] = 100</a:t>
+            </a:r>
+          </a:p>
+          <a:p>
+            <a:r>
+              <a:rPr lang="en-US" sz="2800" dirty="0"/>
+              <a:t>print(</a:t>
+            </a:r>
+            <a:r>
+              <a:rPr lang="en-US" sz="2800" dirty="0" err="1"/>
+              <a:t>my_list</a:t>
+            </a:r>
+            <a:r>
+              <a:rPr lang="en-US" sz="2800" dirty="0"/>
+              <a:t>)</a:t>
+            </a:r>
+          </a:p>
+        </p:txBody>
+      </p:sp>
+    </p:spTree>
+    <p:extLst>
+      <p:ext uri="{BB962C8B-B14F-4D97-AF65-F5344CB8AC3E}">
+        <p14:creationId xmlns:p14="http://schemas.microsoft.com/office/powerpoint/2010/main" val="1548753185"/>
+      </p:ext>
+    </p:extLst>
+  </p:cSld>
+  <p:clrMapOvr>
+    <a:masterClrMapping/>
+  </p:clrMapOvr>
+</p:sld>
+</file>
+
+<file path=ppt/slides/slide13.xml><?xml version="1.0" encoding="utf-8"?>
+<p:sld xmlns:a="http://schemas.openxmlformats.org/drawingml/2006/main" xmlns:r="http://schemas.openxmlformats.org/officeDocument/2006/relationships" xmlns:p="http://schemas.openxmlformats.org/presentationml/2006/main">
+  <p:cSld>
+    <p:spTree>
+      <p:nvGrpSpPr>
+        <p:cNvPr id="1" name=""/>
+        <p:cNvGrpSpPr/>
+        <p:nvPr/>
+      </p:nvGrpSpPr>
+      <p:grpSpPr>
+        <a:xfrm>
+          <a:off x="0" y="0"/>
+          <a:ext cx="0" cy="0"/>
+          <a:chOff x="0" y="0"/>
+          <a:chExt cx="0" cy="0"/>
+        </a:xfrm>
+      </p:grpSpPr>
+      <p:sp>
+        <p:nvSpPr>
+          <p:cNvPr id="2" name="Title 1">
+            <a:extLst>
+              <a:ext uri="{FF2B5EF4-FFF2-40B4-BE49-F238E27FC236}">
+                <a16:creationId xmlns:a16="http://schemas.microsoft.com/office/drawing/2014/main" id="{6D975B9B-792C-0491-2A64-05D2E2B19FD7}"/>
+              </a:ext>
+            </a:extLst>
+          </p:cNvPr>
+          <p:cNvSpPr>
+            <a:spLocks noGrp="1"/>
+          </p:cNvSpPr>
+          <p:nvPr>
+            <p:ph type="title"/>
+          </p:nvPr>
+        </p:nvSpPr>
+        <p:spPr/>
+        <p:txBody>
+          <a:bodyPr/>
+          <a:lstStyle/>
+          <a:p>
+            <a:r>
+              <a:rPr lang="en-US" dirty="0"/>
+              <a:t>Copying Lists</a:t>
+            </a:r>
+          </a:p>
+        </p:txBody>
+      </p:sp>
+      <p:sp>
+        <p:nvSpPr>
+          <p:cNvPr id="5" name="TextBox 4">
+            <a:extLst>
+              <a:ext uri="{FF2B5EF4-FFF2-40B4-BE49-F238E27FC236}">
+                <a16:creationId xmlns:a16="http://schemas.microsoft.com/office/drawing/2014/main" id="{312AA55F-998E-E195-F31E-3E01275ED749}"/>
+              </a:ext>
+            </a:extLst>
+          </p:cNvPr>
+          <p:cNvSpPr txBox="1"/>
+          <p:nvPr/>
+        </p:nvSpPr>
+        <p:spPr>
+          <a:xfrm>
+            <a:off x="777240" y="1443841"/>
+            <a:ext cx="6097604" cy="646331"/>
+          </a:xfrm>
+          <a:prstGeom prst="rect">
+            <a:avLst/>
+          </a:prstGeom>
+          <a:noFill/>
+        </p:spPr>
+        <p:txBody>
+          <a:bodyPr wrap="square">
+            <a:spAutoFit/>
+          </a:bodyPr>
+          <a:lstStyle/>
+          <a:p>
+            <a:r>
+              <a:rPr lang="en-US" dirty="0" err="1"/>
+              <a:t>my_list</a:t>
+            </a:r>
+            <a:r>
+              <a:rPr lang="en-US" dirty="0"/>
+              <a:t> = [1, 2, 3]</a:t>
+            </a:r>
+          </a:p>
+          <a:p>
+            <a:endParaRPr lang="en-US" dirty="0"/>
+          </a:p>
+        </p:txBody>
+      </p:sp>
+      <p:sp>
+        <p:nvSpPr>
+          <p:cNvPr id="7" name="TextBox 6">
+            <a:extLst>
+              <a:ext uri="{FF2B5EF4-FFF2-40B4-BE49-F238E27FC236}">
+                <a16:creationId xmlns:a16="http://schemas.microsoft.com/office/drawing/2014/main" id="{AC7693D8-02C5-59F7-DE74-F713BB1C8BF9}"/>
+              </a:ext>
+            </a:extLst>
+          </p:cNvPr>
+          <p:cNvSpPr txBox="1"/>
+          <p:nvPr/>
+        </p:nvSpPr>
+        <p:spPr>
+          <a:xfrm>
+            <a:off x="777239" y="2090172"/>
+            <a:ext cx="6624587" cy="923330"/>
+          </a:xfrm>
+          <a:prstGeom prst="rect">
+            <a:avLst/>
+          </a:prstGeom>
+          <a:noFill/>
+        </p:spPr>
+        <p:txBody>
+          <a:bodyPr wrap="square">
+            <a:spAutoFit/>
+          </a:bodyPr>
+          <a:lstStyle/>
+          <a:p>
+            <a:r>
+              <a:rPr lang="en-US" dirty="0"/>
+              <a:t># Slice copy</a:t>
+            </a:r>
+          </a:p>
+          <a:p>
+            <a:r>
+              <a:rPr lang="en-US" dirty="0"/>
+              <a:t>copy = </a:t>
+            </a:r>
+            <a:r>
+              <a:rPr lang="en-US" dirty="0" err="1"/>
+              <a:t>my_list</a:t>
+            </a:r>
+            <a:r>
+              <a:rPr lang="en-US" dirty="0"/>
+              <a:t>[:]</a:t>
+            </a:r>
+          </a:p>
+          <a:p>
+            <a:endParaRPr lang="en-US" dirty="0"/>
+          </a:p>
+        </p:txBody>
+      </p:sp>
+      <p:sp>
+        <p:nvSpPr>
+          <p:cNvPr id="9" name="TextBox 8">
+            <a:extLst>
+              <a:ext uri="{FF2B5EF4-FFF2-40B4-BE49-F238E27FC236}">
+                <a16:creationId xmlns:a16="http://schemas.microsoft.com/office/drawing/2014/main" id="{3DF36BAB-3E84-18E3-3FE1-EA4D83CAE4A9}"/>
+              </a:ext>
+            </a:extLst>
+          </p:cNvPr>
+          <p:cNvSpPr txBox="1"/>
+          <p:nvPr/>
+        </p:nvSpPr>
+        <p:spPr>
+          <a:xfrm>
+            <a:off x="777239" y="3143640"/>
+            <a:ext cx="6097604" cy="923330"/>
+          </a:xfrm>
+          <a:prstGeom prst="rect">
+            <a:avLst/>
+          </a:prstGeom>
+          <a:noFill/>
+        </p:spPr>
+        <p:txBody>
+          <a:bodyPr wrap="square">
+            <a:spAutoFit/>
+          </a:bodyPr>
+          <a:lstStyle/>
+          <a:p>
+            <a:r>
+              <a:rPr lang="en-US" dirty="0"/>
+              <a:t># .copy() method</a:t>
+            </a:r>
+          </a:p>
+          <a:p>
+            <a:r>
+              <a:rPr lang="en-US" dirty="0"/>
+              <a:t>copy = </a:t>
+            </a:r>
+            <a:r>
+              <a:rPr lang="en-US" dirty="0" err="1"/>
+              <a:t>my_list.copy</a:t>
+            </a:r>
+            <a:r>
+              <a:rPr lang="en-US" dirty="0"/>
+              <a:t>()</a:t>
+            </a:r>
+          </a:p>
+          <a:p>
+            <a:endParaRPr lang="en-US" dirty="0"/>
+          </a:p>
+        </p:txBody>
+      </p:sp>
+      <p:sp>
+        <p:nvSpPr>
+          <p:cNvPr id="11" name="TextBox 10">
+            <a:extLst>
+              <a:ext uri="{FF2B5EF4-FFF2-40B4-BE49-F238E27FC236}">
+                <a16:creationId xmlns:a16="http://schemas.microsoft.com/office/drawing/2014/main" id="{ADF9935D-880D-0AC0-7920-5F40C0A54DF3}"/>
+              </a:ext>
+            </a:extLst>
+          </p:cNvPr>
+          <p:cNvSpPr txBox="1"/>
+          <p:nvPr/>
+        </p:nvSpPr>
+        <p:spPr>
+          <a:xfrm>
+            <a:off x="777239" y="4264128"/>
+            <a:ext cx="6097604" cy="646331"/>
+          </a:xfrm>
+          <a:prstGeom prst="rect">
+            <a:avLst/>
+          </a:prstGeom>
+          <a:noFill/>
+        </p:spPr>
+        <p:txBody>
+          <a:bodyPr wrap="square">
+            <a:spAutoFit/>
+          </a:bodyPr>
+          <a:lstStyle/>
+          <a:p>
+            <a:r>
+              <a:rPr lang="en-US" dirty="0"/>
+              <a:t># list() constructor</a:t>
+            </a:r>
+          </a:p>
+          <a:p>
+            <a:r>
+              <a:rPr lang="en-US" dirty="0"/>
+              <a:t>copy = list(</a:t>
+            </a:r>
+            <a:r>
+              <a:rPr lang="en-US" dirty="0" err="1"/>
+              <a:t>my_list</a:t>
+            </a:r>
+            <a:r>
+              <a:rPr lang="en-US" dirty="0"/>
+              <a:t>)</a:t>
+            </a:r>
+          </a:p>
+        </p:txBody>
+      </p:sp>
+      <p:sp>
+        <p:nvSpPr>
+          <p:cNvPr id="13" name="TextBox 12">
+            <a:extLst>
+              <a:ext uri="{FF2B5EF4-FFF2-40B4-BE49-F238E27FC236}">
+                <a16:creationId xmlns:a16="http://schemas.microsoft.com/office/drawing/2014/main" id="{B533274A-BA4E-8CBC-CDC8-AD981DF22270}"/>
+              </a:ext>
+            </a:extLst>
+          </p:cNvPr>
+          <p:cNvSpPr txBox="1"/>
+          <p:nvPr/>
+        </p:nvSpPr>
+        <p:spPr>
+          <a:xfrm>
+            <a:off x="777239" y="4982488"/>
+            <a:ext cx="6097604" cy="1200329"/>
+          </a:xfrm>
+          <a:prstGeom prst="rect">
+            <a:avLst/>
+          </a:prstGeom>
+          <a:noFill/>
+        </p:spPr>
+        <p:txBody>
+          <a:bodyPr wrap="square">
+            <a:spAutoFit/>
+          </a:bodyPr>
+          <a:lstStyle/>
+          <a:p>
+            <a:endParaRPr lang="en-US" dirty="0"/>
+          </a:p>
+          <a:p>
+            <a:r>
+              <a:rPr lang="en-US" dirty="0"/>
+              <a:t># Deep copy (use when list contains nested lists)</a:t>
+            </a:r>
+          </a:p>
+          <a:p>
+            <a:r>
+              <a:rPr lang="en-US" dirty="0"/>
+              <a:t>import copy</a:t>
+            </a:r>
+          </a:p>
+          <a:p>
+            <a:r>
+              <a:rPr lang="en-US" dirty="0"/>
+              <a:t>copy = </a:t>
+            </a:r>
+            <a:r>
+              <a:rPr lang="en-US" dirty="0" err="1"/>
+              <a:t>copy.deepcopy</a:t>
+            </a:r>
+            <a:r>
+              <a:rPr lang="en-US" dirty="0"/>
+              <a:t>(</a:t>
+            </a:r>
+            <a:r>
+              <a:rPr lang="en-US" dirty="0" err="1"/>
+              <a:t>my_list</a:t>
+            </a:r>
+            <a:r>
+              <a:rPr lang="en-US" dirty="0"/>
+              <a:t>)</a:t>
+            </a:r>
+          </a:p>
+        </p:txBody>
+      </p:sp>
+    </p:spTree>
+    <p:extLst>
+      <p:ext uri="{BB962C8B-B14F-4D97-AF65-F5344CB8AC3E}">
+        <p14:creationId xmlns:p14="http://schemas.microsoft.com/office/powerpoint/2010/main" val="2665607464"/>
+      </p:ext>
+    </p:extLst>
+  </p:cSld>
+  <p:clrMapOvr>
+    <a:masterClrMapping/>
+  </p:clrMapOvr>
+  <p:timing>
+    <p:tnLst>
+      <p:par>
+        <p:cTn id="1" dur="indefinite" restart="never" nodeType="tmRoot">
+          <p:childTnLst>
+            <p:seq concurrent="1" nextAc="seek">
+              <p:cTn id="2" dur="indefinite" nodeType="mainSeq">
+                <p:childTnLst>
+                  <p:par>
+                    <p:cTn id="3" fill="hold">
+                      <p:stCondLst>
+                        <p:cond delay="indefinite"/>
+                      </p:stCondLst>
+                      <p:childTnLst>
+                        <p:par>
+                          <p:cTn id="4" fill="hold">
+                            <p:stCondLst>
+                              <p:cond delay="0"/>
+                            </p:stCondLst>
+                            <p:childTnLst>
+                              <p:par>
+                                <p:cTn id="5" presetID="1" presetClass="entr" presetSubtype="0" fill="hold" grpId="0" nodeType="clickEffect">
+                                  <p:stCondLst>
+                                    <p:cond delay="0"/>
+                                  </p:stCondLst>
+                                  <p:childTnLst>
+                                    <p:set>
+                                      <p:cBhvr>
+                                        <p:cTn id="6" dur="1" fill="hold">
+                                          <p:stCondLst>
+                                            <p:cond delay="0"/>
+                                          </p:stCondLst>
+                                        </p:cTn>
+                                        <p:tgtEl>
+                                          <p:spTgt spid="7"/>
+                                        </p:tgtEl>
+                                        <p:attrNameLst>
+                                          <p:attrName>style.visibility</p:attrName>
+                                        </p:attrNameLst>
+                                      </p:cBhvr>
+                                      <p:to>
+                                        <p:strVal val="visible"/>
+                                      </p:to>
+                                    </p:set>
+                                  </p:childTnLst>
+                                </p:cTn>
+                              </p:par>
+                            </p:childTnLst>
+                          </p:cTn>
+                        </p:par>
+                      </p:childTnLst>
+                    </p:cTn>
+                  </p:par>
+                  <p:par>
+                    <p:cTn id="7" fill="hold">
+                      <p:stCondLst>
+                        <p:cond delay="indefinite"/>
+                      </p:stCondLst>
+                      <p:childTnLst>
+                        <p:par>
+                          <p:cTn id="8" fill="hold">
+                            <p:stCondLst>
+                              <p:cond delay="0"/>
+                            </p:stCondLst>
+                            <p:childTnLst>
+                              <p:par>
+                                <p:cTn id="9" presetID="1" presetClass="entr" presetSubtype="0" fill="hold" grpId="0" nodeType="clickEffect">
+                                  <p:stCondLst>
+                                    <p:cond delay="0"/>
+                                  </p:stCondLst>
+                                  <p:childTnLst>
+                                    <p:set>
+                                      <p:cBhvr>
+                                        <p:cTn id="10" dur="1" fill="hold">
+                                          <p:stCondLst>
+                                            <p:cond delay="0"/>
+                                          </p:stCondLst>
+                                        </p:cTn>
+                                        <p:tgtEl>
+                                          <p:spTgt spid="9"/>
+                                        </p:tgtEl>
+                                        <p:attrNameLst>
+                                          <p:attrName>style.visibility</p:attrName>
+                                        </p:attrNameLst>
+                                      </p:cBhvr>
+                                      <p:to>
+                                        <p:strVal val="visible"/>
+                                      </p:to>
+                                    </p:set>
+                                  </p:childTnLst>
+                                </p:cTn>
+                              </p:par>
+                            </p:childTnLst>
+                          </p:cTn>
+                        </p:par>
+                      </p:childTnLst>
+                    </p:cTn>
+                  </p:par>
+                  <p:par>
+                    <p:cTn id="11" fill="hold">
+                      <p:stCondLst>
+                        <p:cond delay="indefinite"/>
+                      </p:stCondLst>
+                      <p:childTnLst>
+                        <p:par>
+                          <p:cTn id="12" fill="hold">
+                            <p:stCondLst>
+                              <p:cond delay="0"/>
+                            </p:stCondLst>
+                            <p:childTnLst>
+                              <p:par>
+                                <p:cTn id="13" presetID="1" presetClass="entr" presetSubtype="0" fill="hold" grpId="0" nodeType="clickEffect">
+                                  <p:stCondLst>
+                                    <p:cond delay="0"/>
+                                  </p:stCondLst>
+                                  <p:childTnLst>
+                                    <p:set>
+                                      <p:cBhvr>
+                                        <p:cTn id="14" dur="1" fill="hold">
+                                          <p:stCondLst>
+                                            <p:cond delay="0"/>
+                                          </p:stCondLst>
+                                        </p:cTn>
+                                        <p:tgtEl>
+                                          <p:spTgt spid="11"/>
+                                        </p:tgtEl>
+                                        <p:attrNameLst>
+                                          <p:attrName>style.visibility</p:attrName>
+                                        </p:attrNameLst>
+                                      </p:cBhvr>
+                                      <p:to>
+                                        <p:strVal val="visible"/>
+                                      </p:to>
+                                    </p:set>
+                                  </p:childTnLst>
+                                </p:cTn>
+                              </p:par>
+                            </p:childTnLst>
+                          </p:cTn>
+                        </p:par>
+                      </p:childTnLst>
+                    </p:cTn>
+                  </p:par>
+                  <p:par>
+                    <p:cTn id="15" fill="hold">
+                      <p:stCondLst>
+                        <p:cond delay="indefinite"/>
+                      </p:stCondLst>
+                      <p:childTnLst>
+                        <p:par>
+                          <p:cTn id="16" fill="hold">
+                            <p:stCondLst>
+                              <p:cond delay="0"/>
+                            </p:stCondLst>
+                            <p:childTnLst>
+                              <p:par>
+                                <p:cTn id="17" presetID="1" presetClass="entr" presetSubtype="0" fill="hold" grpId="0" nodeType="clickEffect">
+                                  <p:stCondLst>
+                                    <p:cond delay="0"/>
+                                  </p:stCondLst>
+                                  <p:childTnLst>
+                                    <p:set>
+                                      <p:cBhvr>
+                                        <p:cTn id="18" dur="1" fill="hold">
+                                          <p:stCondLst>
+                                            <p:cond delay="0"/>
+                                          </p:stCondLst>
+                                        </p:cTn>
+                                        <p:tgtEl>
+                                          <p:spTgt spid="13"/>
+                                        </p:tgtEl>
+                                        <p:attrNameLst>
+                                          <p:attrName>style.visibility</p:attrName>
+                                        </p:attrNameLst>
+                                      </p:cBhvr>
+                                      <p:to>
+                                        <p:strVal val="visible"/>
+                                      </p:to>
+                                    </p:set>
+                                  </p:childTnLst>
+                                </p:cTn>
+                              </p:par>
+                            </p:childTnLst>
+                          </p:cTn>
+                        </p:par>
+                      </p:childTnLst>
+                    </p:cTn>
+                  </p:par>
+                </p:childTnLst>
+              </p:cTn>
+              <p:prevCondLst>
+                <p:cond evt="onPrev" delay="0">
+                  <p:tgtEl>
+                    <p:sldTgt/>
+                  </p:tgtEl>
+                </p:cond>
+              </p:prevCondLst>
+              <p:nextCondLst>
+                <p:cond evt="onNext" delay="0">
+                  <p:tgtEl>
+                    <p:sldTgt/>
+                  </p:tgtEl>
+                </p:cond>
+              </p:nextCondLst>
+            </p:seq>
+          </p:childTnLst>
+        </p:cTn>
+      </p:par>
+    </p:tnLst>
+    <p:bldLst>
+      <p:bldP spid="7" grpId="0"/>
+      <p:bldP spid="9" grpId="0"/>
+      <p:bldP spid="11" grpId="0"/>
+      <p:bldP spid="13" grpId="0"/>
+    </p:bldLst>
+  </p:timing>
+</p:sld>
+</file>
+
+<file path=ppt/slides/slide14.xml><?xml version="1.0" encoding="utf-8"?>
+<p:sld xmlns:a="http://schemas.openxmlformats.org/drawingml/2006/main" xmlns:r="http://schemas.openxmlformats.org/officeDocument/2006/relationships" xmlns:p="http://schemas.openxmlformats.org/presentationml/2006/main">
+  <p:cSld>
+    <p:spTree>
+      <p:nvGrpSpPr>
+        <p:cNvPr id="1" name="">
+          <a:extLst>
+            <a:ext uri="{FF2B5EF4-FFF2-40B4-BE49-F238E27FC236}">
+              <a16:creationId xmlns:a16="http://schemas.microsoft.com/office/drawing/2014/main" id="{0655750C-9CF6-EAE2-6DEA-7A03850A842A}"/>
+            </a:ext>
+          </a:extLst>
+        </p:cNvPr>
+        <p:cNvGrpSpPr/>
+        <p:nvPr/>
+      </p:nvGrpSpPr>
+      <p:grpSpPr>
+        <a:xfrm>
+          <a:off x="0" y="0"/>
+          <a:ext cx="0" cy="0"/>
+          <a:chOff x="0" y="0"/>
+          <a:chExt cx="0" cy="0"/>
+        </a:xfrm>
+      </p:grpSpPr>
+      <p:sp>
+        <p:nvSpPr>
+          <p:cNvPr id="2" name="Title 1">
+            <a:extLst>
+              <a:ext uri="{FF2B5EF4-FFF2-40B4-BE49-F238E27FC236}">
+                <a16:creationId xmlns:a16="http://schemas.microsoft.com/office/drawing/2014/main" id="{82C1586D-F8EA-11B6-DF13-FCABC199E3B3}"/>
+              </a:ext>
+            </a:extLst>
+          </p:cNvPr>
+          <p:cNvSpPr>
+            <a:spLocks noGrp="1"/>
+          </p:cNvSpPr>
+          <p:nvPr>
+            <p:ph type="title"/>
+          </p:nvPr>
+        </p:nvSpPr>
+        <p:spPr/>
+        <p:txBody>
+          <a:bodyPr/>
+          <a:lstStyle/>
+          <a:p>
+            <a:r>
+              <a:rPr lang="en-US" dirty="0"/>
+              <a:t>Copying TUPLES</a:t>
+            </a:r>
+          </a:p>
+        </p:txBody>
+      </p:sp>
+      <p:sp>
+        <p:nvSpPr>
+          <p:cNvPr id="4" name="TextBox 3">
+            <a:extLst>
+              <a:ext uri="{FF2B5EF4-FFF2-40B4-BE49-F238E27FC236}">
+                <a16:creationId xmlns:a16="http://schemas.microsoft.com/office/drawing/2014/main" id="{F16E354D-6DE8-1A66-EFAD-DE4A92076AFB}"/>
+              </a:ext>
+            </a:extLst>
+          </p:cNvPr>
+          <p:cNvSpPr txBox="1"/>
+          <p:nvPr/>
+        </p:nvSpPr>
+        <p:spPr>
+          <a:xfrm>
+            <a:off x="815740" y="1305341"/>
+            <a:ext cx="6097604" cy="923330"/>
+          </a:xfrm>
+          <a:prstGeom prst="rect">
+            <a:avLst/>
+          </a:prstGeom>
+          <a:noFill/>
+        </p:spPr>
+        <p:txBody>
+          <a:bodyPr wrap="square">
+            <a:spAutoFit/>
+          </a:bodyPr>
+          <a:lstStyle/>
+          <a:p>
+            <a:r>
+              <a:rPr lang="en-US" dirty="0" err="1"/>
+              <a:t>my_tuple</a:t>
+            </a:r>
+            <a:r>
+              <a:rPr lang="en-US" dirty="0"/>
+              <a:t> = (1, 2, 3)</a:t>
+            </a:r>
+          </a:p>
+          <a:p>
+            <a:endParaRPr lang="en-US" dirty="0"/>
+          </a:p>
+          <a:p>
+            <a:endParaRPr lang="en-US" dirty="0"/>
+          </a:p>
+        </p:txBody>
+      </p:sp>
+      <p:sp>
+        <p:nvSpPr>
+          <p:cNvPr id="8" name="TextBox 7">
+            <a:extLst>
+              <a:ext uri="{FF2B5EF4-FFF2-40B4-BE49-F238E27FC236}">
+                <a16:creationId xmlns:a16="http://schemas.microsoft.com/office/drawing/2014/main" id="{1E9DD2AD-20AD-EB44-2986-C11FD8E6B7EB}"/>
+              </a:ext>
+            </a:extLst>
+          </p:cNvPr>
+          <p:cNvSpPr txBox="1"/>
+          <p:nvPr/>
+        </p:nvSpPr>
+        <p:spPr>
+          <a:xfrm>
+            <a:off x="815740" y="1953246"/>
+            <a:ext cx="8068378" cy="1200329"/>
+          </a:xfrm>
+          <a:prstGeom prst="rect">
+            <a:avLst/>
+          </a:prstGeom>
+          <a:noFill/>
+        </p:spPr>
+        <p:txBody>
+          <a:bodyPr wrap="square">
+            <a:spAutoFit/>
+          </a:bodyPr>
+          <a:lstStyle/>
+          <a:p>
+            <a:r>
+              <a:rPr lang="en-US" dirty="0"/>
+              <a:t># Since tuples are immutable, you rarely need to copy them</a:t>
+            </a:r>
+          </a:p>
+          <a:p>
+            <a:r>
+              <a:rPr lang="en-US" dirty="0"/>
+              <a:t># Simply assign — both variables safely point to the same object</a:t>
+            </a:r>
+          </a:p>
+          <a:p>
+            <a:r>
+              <a:rPr lang="en-US" dirty="0"/>
+              <a:t>copy = </a:t>
+            </a:r>
+            <a:r>
+              <a:rPr lang="en-US" dirty="0" err="1"/>
+              <a:t>my_tuple</a:t>
+            </a:r>
+            <a:endParaRPr lang="en-US" dirty="0"/>
+          </a:p>
+          <a:p>
+            <a:endParaRPr lang="en-US" dirty="0"/>
+          </a:p>
+        </p:txBody>
+      </p:sp>
+      <p:sp>
+        <p:nvSpPr>
+          <p:cNvPr id="12" name="TextBox 11">
+            <a:extLst>
+              <a:ext uri="{FF2B5EF4-FFF2-40B4-BE49-F238E27FC236}">
+                <a16:creationId xmlns:a16="http://schemas.microsoft.com/office/drawing/2014/main" id="{AB2228F6-9583-4767-010E-5EB5432A0B12}"/>
+              </a:ext>
+            </a:extLst>
+          </p:cNvPr>
+          <p:cNvSpPr txBox="1"/>
+          <p:nvPr/>
+        </p:nvSpPr>
+        <p:spPr>
+          <a:xfrm>
+            <a:off x="815739" y="3704426"/>
+            <a:ext cx="6460959" cy="923330"/>
+          </a:xfrm>
+          <a:prstGeom prst="rect">
+            <a:avLst/>
+          </a:prstGeom>
+          <a:noFill/>
+        </p:spPr>
+        <p:txBody>
+          <a:bodyPr wrap="square">
+            <a:spAutoFit/>
+          </a:bodyPr>
+          <a:lstStyle/>
+          <a:p>
+            <a:r>
+              <a:rPr lang="en-US" dirty="0"/>
+              <a:t># tuple() constructor (creates a new object)</a:t>
+            </a:r>
+          </a:p>
+          <a:p>
+            <a:r>
+              <a:rPr lang="en-US" dirty="0"/>
+              <a:t>copy = tuple(</a:t>
+            </a:r>
+            <a:r>
+              <a:rPr lang="en-US" dirty="0" err="1"/>
+              <a:t>my_tuple</a:t>
+            </a:r>
+            <a:r>
+              <a:rPr lang="en-US" dirty="0"/>
+              <a:t>)</a:t>
+            </a:r>
+          </a:p>
+          <a:p>
+            <a:endParaRPr lang="en-US" dirty="0"/>
+          </a:p>
+        </p:txBody>
+      </p:sp>
+      <p:sp>
+        <p:nvSpPr>
+          <p:cNvPr id="15" name="TextBox 14">
+            <a:extLst>
+              <a:ext uri="{FF2B5EF4-FFF2-40B4-BE49-F238E27FC236}">
+                <a16:creationId xmlns:a16="http://schemas.microsoft.com/office/drawing/2014/main" id="{5BBACF4B-2712-C751-E9EF-DAD77DBC61F1}"/>
+              </a:ext>
+            </a:extLst>
+          </p:cNvPr>
+          <p:cNvSpPr txBox="1"/>
+          <p:nvPr/>
+        </p:nvSpPr>
+        <p:spPr>
+          <a:xfrm>
+            <a:off x="815739" y="4722607"/>
+            <a:ext cx="9146407" cy="923330"/>
+          </a:xfrm>
+          <a:prstGeom prst="rect">
+            <a:avLst/>
+          </a:prstGeom>
+          <a:noFill/>
+        </p:spPr>
+        <p:txBody>
+          <a:bodyPr wrap="square">
+            <a:spAutoFit/>
+          </a:bodyPr>
+          <a:lstStyle/>
+          <a:p>
+            <a:r>
+              <a:rPr lang="en-US" dirty="0"/>
+              <a:t># Deep copy (use when tuple contains nested mutable objects)</a:t>
+            </a:r>
+          </a:p>
+          <a:p>
+            <a:r>
+              <a:rPr lang="en-US" dirty="0"/>
+              <a:t>import copy</a:t>
+            </a:r>
+          </a:p>
+          <a:p>
+            <a:r>
+              <a:rPr lang="en-US" dirty="0"/>
+              <a:t>copy = </a:t>
+            </a:r>
+            <a:r>
+              <a:rPr lang="en-US" dirty="0" err="1"/>
+              <a:t>copy.deepcopy</a:t>
+            </a:r>
+            <a:r>
+              <a:rPr lang="en-US" dirty="0"/>
+              <a:t>(</a:t>
+            </a:r>
+            <a:r>
+              <a:rPr lang="en-US" dirty="0" err="1"/>
+              <a:t>my_tuple</a:t>
+            </a:r>
+            <a:r>
+              <a:rPr lang="en-US" dirty="0"/>
+              <a:t>)</a:t>
+            </a:r>
+          </a:p>
+        </p:txBody>
+      </p:sp>
+    </p:spTree>
+    <p:extLst>
+      <p:ext uri="{BB962C8B-B14F-4D97-AF65-F5344CB8AC3E}">
+        <p14:creationId xmlns:p14="http://schemas.microsoft.com/office/powerpoint/2010/main" val="3355754097"/>
+      </p:ext>
+    </p:extLst>
+  </p:cSld>
+  <p:clrMapOvr>
+    <a:masterClrMapping/>
+  </p:clrMapOvr>
+  <p:timing>
+    <p:tnLst>
+      <p:par>
+        <p:cTn id="1" dur="indefinite" restart="never" nodeType="tmRoot">
+          <p:childTnLst>
+            <p:seq concurrent="1" nextAc="seek">
+              <p:cTn id="2" dur="indefinite" nodeType="mainSeq">
+                <p:childTnLst>
+                  <p:par>
+                    <p:cTn id="3" fill="hold">
+                      <p:stCondLst>
+                        <p:cond delay="indefinite"/>
+                      </p:stCondLst>
+                      <p:childTnLst>
+                        <p:par>
+                          <p:cTn id="4" fill="hold">
+                            <p:stCondLst>
+                              <p:cond delay="0"/>
+                            </p:stCondLst>
+                            <p:childTnLst>
+                              <p:par>
+                                <p:cTn id="5" presetID="1" presetClass="entr" presetSubtype="0" fill="hold" grpId="0" nodeType="clickEffect">
+                                  <p:stCondLst>
+                                    <p:cond delay="0"/>
+                                  </p:stCondLst>
+                                  <p:childTnLst>
+                                    <p:set>
+                                      <p:cBhvr>
+                                        <p:cTn id="6" dur="1" fill="hold">
+                                          <p:stCondLst>
+                                            <p:cond delay="0"/>
+                                          </p:stCondLst>
+                                        </p:cTn>
+                                        <p:tgtEl>
+                                          <p:spTgt spid="8"/>
+                                        </p:tgtEl>
+                                        <p:attrNameLst>
+                                          <p:attrName>style.visibility</p:attrName>
+                                        </p:attrNameLst>
+                                      </p:cBhvr>
+                                      <p:to>
+                                        <p:strVal val="visible"/>
+                                      </p:to>
+                                    </p:set>
+                                  </p:childTnLst>
+                                </p:cTn>
+                              </p:par>
+                            </p:childTnLst>
+                          </p:cTn>
+                        </p:par>
+                      </p:childTnLst>
+                    </p:cTn>
+                  </p:par>
+                </p:childTnLst>
+              </p:cTn>
+              <p:prevCondLst>
+                <p:cond evt="onPrev" delay="0">
+                  <p:tgtEl>
+                    <p:sldTgt/>
+                  </p:tgtEl>
+                </p:cond>
+              </p:prevCondLst>
+              <p:nextCondLst>
+                <p:cond evt="onNext" delay="0">
+                  <p:tgtEl>
+                    <p:sldTgt/>
+                  </p:tgtEl>
+                </p:cond>
+              </p:nextCondLst>
+            </p:seq>
+          </p:childTnLst>
+        </p:cTn>
+      </p:par>
+    </p:tnLst>
+    <p:bldLst>
+      <p:bldP spid="8" grpId="0"/>
+    </p:bldLst>
+  </p:timing>
+</p:sld>
+</file>
+
+<file path=ppt/slides/slide15.xml><?xml version="1.0" encoding="utf-8"?>
+<p:sld xmlns:a="http://schemas.openxmlformats.org/drawingml/2006/main" xmlns:r="http://schemas.openxmlformats.org/officeDocument/2006/relationships" xmlns:p="http://schemas.openxmlformats.org/presentationml/2006/main">
+  <p:cSld>
+    <p:spTree>
+      <p:nvGrpSpPr>
+        <p:cNvPr id="1" name=""/>
+        <p:cNvGrpSpPr/>
+        <p:nvPr/>
+      </p:nvGrpSpPr>
+      <p:grpSpPr>
+        <a:xfrm>
+          <a:off x="0" y="0"/>
+          <a:ext cx="0" cy="0"/>
+          <a:chOff x="0" y="0"/>
+          <a:chExt cx="0" cy="0"/>
+        </a:xfrm>
+      </p:grpSpPr>
+      <p:sp>
+        <p:nvSpPr>
+          <p:cNvPr id="7" name="Title 6">
+            <a:extLst>
+              <a:ext uri="{FF2B5EF4-FFF2-40B4-BE49-F238E27FC236}">
+                <a16:creationId xmlns:a16="http://schemas.microsoft.com/office/drawing/2014/main" id="{A0A79DFE-CA6D-199F-1D8F-0A25E480F345}"/>
+              </a:ext>
+            </a:extLst>
+          </p:cNvPr>
+          <p:cNvSpPr>
+            <a:spLocks noGrp="1"/>
+          </p:cNvSpPr>
+          <p:nvPr>
+            <p:ph type="title"/>
+          </p:nvPr>
+        </p:nvSpPr>
+        <p:spPr/>
+        <p:txBody>
+          <a:bodyPr/>
+          <a:lstStyle/>
+          <a:p>
+            <a:r>
+              <a:rPr lang="en-US" dirty="0"/>
+              <a:t>Hands-On #1 – Basic algos</a:t>
+            </a:r>
+          </a:p>
+        </p:txBody>
+      </p:sp>
+      <p:sp>
+        <p:nvSpPr>
+          <p:cNvPr id="8" name="Content Placeholder 7">
+            <a:extLst>
+              <a:ext uri="{FF2B5EF4-FFF2-40B4-BE49-F238E27FC236}">
+                <a16:creationId xmlns:a16="http://schemas.microsoft.com/office/drawing/2014/main" id="{0C8DBF7A-ABA5-7245-19D0-84C717D30964}"/>
+              </a:ext>
+            </a:extLst>
+          </p:cNvPr>
+          <p:cNvSpPr>
+            <a:spLocks noGrp="1"/>
+          </p:cNvSpPr>
+          <p:nvPr>
+            <p:ph type="body" sz="quarter" idx="11"/>
+          </p:nvPr>
+        </p:nvSpPr>
+        <p:spPr>
+          <a:xfrm>
+            <a:off x="548640" y="2148840"/>
+            <a:ext cx="11008360" cy="4023360"/>
+          </a:xfrm>
+        </p:spPr>
+        <p:txBody>
+          <a:bodyPr/>
+          <a:lstStyle/>
+          <a:p>
+            <a:pPr marL="457200" indent="-457200">
+              <a:buFont typeface="Arial" panose="020B0604020202020204" pitchFamily="34" charset="0"/>
+              <a:buChar char="•"/>
+            </a:pPr>
+            <a:r>
+              <a:rPr lang="en-US" dirty="0"/>
+              <a:t>Mutable and immutable structures</a:t>
+            </a:r>
+          </a:p>
+          <a:p>
+            <a:pPr marL="457200" indent="-457200">
+              <a:buFont typeface="Arial" panose="020B0604020202020204" pitchFamily="34" charset="0"/>
+              <a:buChar char="•"/>
+            </a:pPr>
+            <a:r>
+              <a:rPr lang="en-US" dirty="0"/>
+              <a:t>Working with tuples and lists</a:t>
+            </a:r>
+          </a:p>
+          <a:p>
+            <a:endParaRPr lang="en-US" dirty="0"/>
+          </a:p>
+        </p:txBody>
+      </p:sp>
+    </p:spTree>
+    <p:extLst>
+      <p:ext uri="{BB962C8B-B14F-4D97-AF65-F5344CB8AC3E}">
+        <p14:creationId xmlns:p14="http://schemas.microsoft.com/office/powerpoint/2010/main" val="4018436934"/>
+      </p:ext>
+    </p:extLst>
+  </p:cSld>
+  <p:clrMapOvr>
+    <a:masterClrMapping/>
+  </p:clrMapOvr>
+</p:sld>
+</file>
+
+<file path=ppt/slides/slide16.xml><?xml version="1.0" encoding="utf-8"?>
+<p:sld xmlns:a="http://schemas.openxmlformats.org/drawingml/2006/main" xmlns:r="http://schemas.openxmlformats.org/officeDocument/2006/relationships" xmlns:p="http://schemas.openxmlformats.org/presentationml/2006/main">
+  <p:cSld>
+    <p:spTree>
+      <p:nvGrpSpPr>
+        <p:cNvPr id="1" name="">
+          <a:extLst>
+            <a:ext uri="{FF2B5EF4-FFF2-40B4-BE49-F238E27FC236}">
+              <a16:creationId xmlns:a16="http://schemas.microsoft.com/office/drawing/2014/main" id="{548FEE81-699F-1ADA-85CB-3532288FB914}"/>
+            </a:ext>
+          </a:extLst>
+        </p:cNvPr>
+        <p:cNvGrpSpPr/>
+        <p:nvPr/>
+      </p:nvGrpSpPr>
+      <p:grpSpPr>
+        <a:xfrm>
+          <a:off x="0" y="0"/>
+          <a:ext cx="0" cy="0"/>
+          <a:chOff x="0" y="0"/>
+          <a:chExt cx="0" cy="0"/>
+        </a:xfrm>
+      </p:grpSpPr>
+      <p:sp>
+        <p:nvSpPr>
+          <p:cNvPr id="2" name="Title 1">
+            <a:extLst>
+              <a:ext uri="{FF2B5EF4-FFF2-40B4-BE49-F238E27FC236}">
+                <a16:creationId xmlns:a16="http://schemas.microsoft.com/office/drawing/2014/main" id="{8C2285A6-A544-7EFA-83E0-DC2F466F7790}"/>
+              </a:ext>
+            </a:extLst>
+          </p:cNvPr>
+          <p:cNvSpPr>
+            <a:spLocks noGrp="1"/>
+          </p:cNvSpPr>
+          <p:nvPr>
+            <p:ph type="title"/>
+          </p:nvPr>
+        </p:nvSpPr>
+        <p:spPr/>
+        <p:txBody>
+          <a:bodyPr/>
+          <a:lstStyle/>
+          <a:p>
+            <a:r>
+              <a:rPr lang="en-US" dirty="0"/>
+              <a:t>Add stuff about dictionaries</a:t>
+            </a:r>
+          </a:p>
+        </p:txBody>
+      </p:sp>
+    </p:spTree>
+    <p:extLst>
+      <p:ext uri="{BB962C8B-B14F-4D97-AF65-F5344CB8AC3E}">
+        <p14:creationId xmlns:p14="http://schemas.microsoft.com/office/powerpoint/2010/main" val="3773540485"/>
+      </p:ext>
+    </p:extLst>
+  </p:cSld>
+  <p:clrMapOvr>
+    <a:masterClrMapping/>
+  </p:clrMapOvr>
+</p:sld>
+</file>
+
+<file path=ppt/slides/slide17.xml><?xml version="1.0" encoding="utf-8"?>
+<p:sld xmlns:a="http://schemas.openxmlformats.org/drawingml/2006/main" xmlns:r="http://schemas.openxmlformats.org/officeDocument/2006/relationships" xmlns:p="http://schemas.openxmlformats.org/presentationml/2006/main">
+  <p:cSld>
+    <p:spTree>
+      <p:nvGrpSpPr>
         <p:cNvPr id="1" name=""/>
         <p:cNvGrpSpPr/>
         <p:nvPr/>
@@ -21306,7 +24966,7 @@
 </p:sld>
 </file>
 
-<file path=ppt/slides/slide11.xml><?xml version="1.0" encoding="utf-8"?>
+<file path=ppt/slides/slide18.xml><?xml version="1.0" encoding="utf-8"?>
 <p:sld xmlns:a="http://schemas.openxmlformats.org/drawingml/2006/main" xmlns:r="http://schemas.openxmlformats.org/officeDocument/2006/relationships" xmlns:p="http://schemas.openxmlformats.org/presentationml/2006/main">
   <p:cSld>
     <p:spTree>
@@ -21394,7 +25054,13 @@
   <p:cSld>
     <p:spTree>
       <p:nvGrpSpPr>
-        <p:cNvPr id="1" name=""/>
+        <p:cNvPr id="1" name="">
+          <a:extLst>
+            <a:ext uri="{FF2B5EF4-FFF2-40B4-BE49-F238E27FC236}">
+              <a16:creationId xmlns:a16="http://schemas.microsoft.com/office/drawing/2014/main" id="{372D87CF-5E92-D709-ADC1-CD5AB2C3F775}"/>
+            </a:ext>
+          </a:extLst>
+        </p:cNvPr>
         <p:cNvGrpSpPr/>
         <p:nvPr/>
       </p:nvGrpSpPr>
@@ -21411,7 +25077,7 @@
           <p:cNvPr id="2" name="Title 1">
             <a:extLst>
               <a:ext uri="{FF2B5EF4-FFF2-40B4-BE49-F238E27FC236}">
-                <a16:creationId xmlns:a16="http://schemas.microsoft.com/office/drawing/2014/main" id="{E55B5497-1C4D-AF60-6011-F2E6D4F3527B}"/>
+                <a16:creationId xmlns:a16="http://schemas.microsoft.com/office/drawing/2014/main" id="{2AEBB9CF-99E0-34C2-13BD-CE711791B329}"/>
               </a:ext>
             </a:extLst>
           </p:cNvPr>
@@ -21427,42 +25093,108 @@
           <a:bodyPr/>
           <a:lstStyle/>
           <a:p>
-            <a:r>
+            <a:br>
               <a:rPr lang="en-US" dirty="0"/>
-              <a:t>Function arguments</a:t>
-            </a:r>
-          </a:p>
-        </p:txBody>
-      </p:sp>
-      <p:sp>
-        <p:nvSpPr>
-          <p:cNvPr id="4" name="Text Placeholder 3">
-            <a:extLst>
-              <a:ext uri="{FF2B5EF4-FFF2-40B4-BE49-F238E27FC236}">
-                <a16:creationId xmlns:a16="http://schemas.microsoft.com/office/drawing/2014/main" id="{AF641A81-F362-9698-1883-C3DE0409C4A3}"/>
-              </a:ext>
-            </a:extLst>
-          </p:cNvPr>
-          <p:cNvSpPr>
-            <a:spLocks noGrp="1"/>
-          </p:cNvSpPr>
+            </a:br>
+            <a:r>
+              <a:rPr lang="en-US" dirty="0"/>
+              <a:t>Course Schedule</a:t>
+            </a:r>
+          </a:p>
+        </p:txBody>
+      </p:sp>
+      <p:pic>
+        <p:nvPicPr>
+          <p:cNvPr id="7" name="Content Placeholder 6">
+            <a:extLst>
+              <a:ext uri="{FF2B5EF4-FFF2-40B4-BE49-F238E27FC236}">
+                <a16:creationId xmlns:a16="http://schemas.microsoft.com/office/drawing/2014/main" id="{D6C03BA8-C242-A7E3-06B9-2FDDD142A3E2}"/>
+              </a:ext>
+            </a:extLst>
+          </p:cNvPr>
+          <p:cNvPicPr>
+            <a:picLocks noGrp="1" noChangeAspect="1"/>
+          </p:cNvPicPr>
           <p:nvPr>
-            <p:ph type="body" sz="quarter" idx="11"/>
+            <p:ph idx="1"/>
           </p:nvPr>
-        </p:nvSpPr>
-        <p:spPr/>
-        <p:txBody>
-          <a:bodyPr/>
+        </p:nvPicPr>
+        <p:blipFill>
+          <a:blip r:embed="rId3"/>
+          <a:stretch>
+            <a:fillRect/>
+          </a:stretch>
+        </p:blipFill>
+        <p:spPr>
+          <a:xfrm>
+            <a:off x="508000" y="1318800"/>
+            <a:ext cx="11176000" cy="4955141"/>
+          </a:xfrm>
+          <a:prstGeom prst="rect">
+            <a:avLst/>
+          </a:prstGeom>
+          <a:noFill/>
+          <a:ln>
+            <a:noFill/>
+          </a:ln>
+        </p:spPr>
+      </p:pic>
+      <p:sp>
+        <p:nvSpPr>
+          <p:cNvPr id="8" name="Rectangle 7">
+            <a:extLst>
+              <a:ext uri="{FF2B5EF4-FFF2-40B4-BE49-F238E27FC236}">
+                <a16:creationId xmlns:a16="http://schemas.microsoft.com/office/drawing/2014/main" id="{0C366FE1-DAFA-E7EC-025F-E1D1E8686851}"/>
+              </a:ext>
+            </a:extLst>
+          </p:cNvPr>
+          <p:cNvSpPr/>
+          <p:nvPr/>
+        </p:nvSpPr>
+        <p:spPr>
+          <a:xfrm>
+            <a:off x="235884" y="3429000"/>
+            <a:ext cx="6284332" cy="302940"/>
+          </a:xfrm>
+          <a:prstGeom prst="rect">
+            <a:avLst/>
+          </a:prstGeom>
+          <a:noFill/>
+          <a:ln w="38100">
+            <a:solidFill>
+              <a:srgbClr val="FF0000"/>
+            </a:solidFill>
+          </a:ln>
+        </p:spPr>
+        <p:style>
+          <a:lnRef idx="2">
+            <a:schemeClr val="accent1">
+              <a:shade val="15000"/>
+            </a:schemeClr>
+          </a:lnRef>
+          <a:fillRef idx="1">
+            <a:schemeClr val="accent1"/>
+          </a:fillRef>
+          <a:effectRef idx="0">
+            <a:schemeClr val="accent1"/>
+          </a:effectRef>
+          <a:fontRef idx="minor">
+            <a:schemeClr val="lt1"/>
+          </a:fontRef>
+        </p:style>
+        <p:txBody>
+          <a:bodyPr rtlCol="0" anchor="ctr"/>
           <a:lstStyle/>
           <a:p>
-            <a:endParaRPr lang="en-US"/>
+            <a:pPr algn="ctr"/>
+            <a:endParaRPr lang="en-US" sz="2400" dirty="0"/>
           </a:p>
         </p:txBody>
       </p:sp>
     </p:spTree>
     <p:extLst>
       <p:ext uri="{BB962C8B-B14F-4D97-AF65-F5344CB8AC3E}">
-        <p14:creationId xmlns:p14="http://schemas.microsoft.com/office/powerpoint/2010/main" val="2621707105"/>
+        <p14:creationId xmlns:p14="http://schemas.microsoft.com/office/powerpoint/2010/main" val="1919185427"/>
       </p:ext>
     </p:extLst>
   </p:cSld>
@@ -21477,7 +25209,13 @@
   <p:cSld>
     <p:spTree>
       <p:nvGrpSpPr>
-        <p:cNvPr id="1" name=""/>
+        <p:cNvPr id="1" name="Shape 470">
+          <a:extLst>
+            <a:ext uri="{FF2B5EF4-FFF2-40B4-BE49-F238E27FC236}">
+              <a16:creationId xmlns:a16="http://schemas.microsoft.com/office/drawing/2014/main" id="{331C143A-1CF1-E401-0CB5-D7BA22316B98}"/>
+            </a:ext>
+          </a:extLst>
+        </p:cNvPr>
         <p:cNvGrpSpPr/>
         <p:nvPr/>
       </p:nvGrpSpPr>
@@ -21491,82 +25229,40 @@
       </p:grpSpPr>
       <p:sp>
         <p:nvSpPr>
-          <p:cNvPr id="2" name="Title 1">
-            <a:extLst>
-              <a:ext uri="{FF2B5EF4-FFF2-40B4-BE49-F238E27FC236}">
-                <a16:creationId xmlns:a16="http://schemas.microsoft.com/office/drawing/2014/main" id="{57EB4430-1F71-D899-34E4-0D4105CCE823}"/>
-              </a:ext>
-            </a:extLst>
-          </p:cNvPr>
-          <p:cNvSpPr>
+          <p:cNvPr id="471" name="Google Shape;471;p55">
+            <a:extLst>
+              <a:ext uri="{FF2B5EF4-FFF2-40B4-BE49-F238E27FC236}">
+                <a16:creationId xmlns:a16="http://schemas.microsoft.com/office/drawing/2014/main" id="{55422540-3734-61F7-53F7-602380429E8F}"/>
+              </a:ext>
+            </a:extLst>
+          </p:cNvPr>
+          <p:cNvSpPr txBox="1">
             <a:spLocks noGrp="1"/>
           </p:cNvSpPr>
           <p:nvPr>
             <p:ph type="title"/>
           </p:nvPr>
         </p:nvSpPr>
-        <p:spPr/>
-        <p:txBody>
-          <a:bodyPr/>
-          <a:lstStyle/>
-          <a:p>
-            <a:r>
-              <a:rPr lang="en-US" dirty="0"/>
-              <a:t>Objectives</a:t>
-            </a:r>
-          </a:p>
-        </p:txBody>
-      </p:sp>
-      <p:sp>
-        <p:nvSpPr>
-          <p:cNvPr id="3" name="Content Placeholder 2">
-            <a:extLst>
-              <a:ext uri="{FF2B5EF4-FFF2-40B4-BE49-F238E27FC236}">
-                <a16:creationId xmlns:a16="http://schemas.microsoft.com/office/drawing/2014/main" id="{E76FF94A-3BCA-070D-C682-367F5F0F327C}"/>
-              </a:ext>
-            </a:extLst>
-          </p:cNvPr>
-          <p:cNvSpPr>
-            <a:spLocks noGrp="1"/>
-          </p:cNvSpPr>
-          <p:nvPr>
-            <p:ph type="body" sz="quarter" idx="11"/>
-          </p:nvPr>
-        </p:nvSpPr>
         <p:spPr>
           <a:xfrm>
-            <a:off x="548640" y="2148840"/>
-            <a:ext cx="10601960" cy="4023360"/>
+            <a:off x="4771235" y="2834482"/>
+            <a:ext cx="8231293" cy="1189037"/>
           </a:xfrm>
+          <a:noFill/>
+          <a:ln>
+            <a:noFill/>
+          </a:ln>
         </p:spPr>
         <p:txBody>
-          <a:bodyPr/>
+          <a:bodyPr spcFirstLastPara="1" vert="horz" wrap="square" lIns="121900" tIns="121900" rIns="121900" bIns="121900" rtlCol="0" anchor="t" anchorCtr="0">
+            <a:normAutofit/>
+          </a:bodyPr>
           <a:lstStyle/>
           <a:p>
-            <a:pPr marL="457200" indent="-457200">
-              <a:buFont typeface="Arial" panose="020B0604020202020204" pitchFamily="34" charset="0"/>
-              <a:buChar char="•"/>
-            </a:pPr>
+            <a:pPr lvl="0"/>
             <a:r>
               <a:rPr lang="en-US" dirty="0"/>
-              <a:t>Know when and how to apply nested lists</a:t>
-            </a:r>
-          </a:p>
-          <a:p>
-            <a:pPr marL="457200" indent="-457200">
-              <a:buFont typeface="Arial" panose="020B0604020202020204" pitchFamily="34" charset="0"/>
-              <a:buChar char="•"/>
-            </a:pPr>
-            <a:endParaRPr lang="en-US" dirty="0"/>
-          </a:p>
-          <a:p>
-            <a:pPr marL="457200" indent="-457200">
-              <a:buFont typeface="Arial" panose="020B0604020202020204" pitchFamily="34" charset="0"/>
-              <a:buChar char="•"/>
-            </a:pPr>
-            <a:r>
-              <a:rPr lang="en-US" dirty="0"/>
-              <a:t>Implement and discuss some basic list manipulation techniques</a:t>
+              <a:t>Review</a:t>
             </a:r>
           </a:p>
         </p:txBody>
@@ -21574,7 +25270,7 @@
     </p:spTree>
     <p:extLst>
       <p:ext uri="{BB962C8B-B14F-4D97-AF65-F5344CB8AC3E}">
-        <p14:creationId xmlns:p14="http://schemas.microsoft.com/office/powerpoint/2010/main" val="3616642083"/>
+        <p14:creationId xmlns:p14="http://schemas.microsoft.com/office/powerpoint/2010/main" val="934622849"/>
       </p:ext>
     </p:extLst>
   </p:cSld>
@@ -21589,7 +25285,13 @@
   <p:cSld>
     <p:spTree>
       <p:nvGrpSpPr>
-        <p:cNvPr id="1" name=""/>
+        <p:cNvPr id="1" name="Shape 470">
+          <a:extLst>
+            <a:ext uri="{FF2B5EF4-FFF2-40B4-BE49-F238E27FC236}">
+              <a16:creationId xmlns:a16="http://schemas.microsoft.com/office/drawing/2014/main" id="{1105E84A-1205-0701-E7F9-9675FAC2D835}"/>
+            </a:ext>
+          </a:extLst>
+        </p:cNvPr>
         <p:cNvGrpSpPr/>
         <p:nvPr/>
       </p:nvGrpSpPr>
@@ -21603,109 +25305,48 @@
       </p:grpSpPr>
       <p:sp>
         <p:nvSpPr>
-          <p:cNvPr id="2" name="Title 1">
-            <a:extLst>
-              <a:ext uri="{FF2B5EF4-FFF2-40B4-BE49-F238E27FC236}">
-                <a16:creationId xmlns:a16="http://schemas.microsoft.com/office/drawing/2014/main" id="{C4A7A857-5BCF-55F5-4639-94263C20FFA4}"/>
-              </a:ext>
-            </a:extLst>
-          </p:cNvPr>
-          <p:cNvSpPr>
+          <p:cNvPr id="471" name="Google Shape;471;p55">
+            <a:extLst>
+              <a:ext uri="{FF2B5EF4-FFF2-40B4-BE49-F238E27FC236}">
+                <a16:creationId xmlns:a16="http://schemas.microsoft.com/office/drawing/2014/main" id="{CEB7E12F-E2C9-500B-63E1-77AA22B0D1BE}"/>
+              </a:ext>
+            </a:extLst>
+          </p:cNvPr>
+          <p:cNvSpPr txBox="1">
             <a:spLocks noGrp="1"/>
           </p:cNvSpPr>
           <p:nvPr>
             <p:ph type="title"/>
           </p:nvPr>
         </p:nvSpPr>
-        <p:spPr/>
-        <p:txBody>
-          <a:bodyPr/>
+        <p:spPr>
+          <a:xfrm>
+            <a:off x="2421602" y="3035881"/>
+            <a:ext cx="8231293" cy="1189037"/>
+          </a:xfrm>
+          <a:noFill/>
+          <a:ln>
+            <a:noFill/>
+          </a:ln>
+        </p:spPr>
+        <p:txBody>
+          <a:bodyPr spcFirstLastPara="1" vert="horz" wrap="square" lIns="121900" tIns="121900" rIns="121900" bIns="121900" rtlCol="0" anchor="t" anchorCtr="0">
+            <a:normAutofit fontScale="90000"/>
+          </a:bodyPr>
           <a:lstStyle/>
           <a:p>
+            <a:pPr lvl="0"/>
             <a:r>
               <a:rPr lang="en-US" dirty="0"/>
-              <a:t>Python review</a:t>
-            </a:r>
-          </a:p>
-        </p:txBody>
-      </p:sp>
-      <p:sp>
-        <p:nvSpPr>
-          <p:cNvPr id="4" name="Text Placeholder 3">
-            <a:extLst>
-              <a:ext uri="{FF2B5EF4-FFF2-40B4-BE49-F238E27FC236}">
-                <a16:creationId xmlns:a16="http://schemas.microsoft.com/office/drawing/2014/main" id="{5A9B9417-5BDA-B527-1D57-66375804CF10}"/>
-              </a:ext>
-            </a:extLst>
-          </p:cNvPr>
-          <p:cNvSpPr>
-            <a:spLocks noGrp="1"/>
-          </p:cNvSpPr>
-          <p:nvPr>
-            <p:ph type="body" sz="quarter" idx="11"/>
-          </p:nvPr>
-        </p:nvSpPr>
-        <p:spPr/>
-        <p:txBody>
-          <a:bodyPr/>
-          <a:lstStyle/>
-          <a:p>
-            <a:endParaRPr lang="en-US"/>
-          </a:p>
-        </p:txBody>
-      </p:sp>
-      <p:pic>
-        <p:nvPicPr>
-          <p:cNvPr id="5" name="Picture 2" descr="I know tuples - Imgflip">
-            <a:extLst>
-              <a:ext uri="{FF2B5EF4-FFF2-40B4-BE49-F238E27FC236}">
-                <a16:creationId xmlns:a16="http://schemas.microsoft.com/office/drawing/2014/main" id="{C2234AAA-033D-3318-B017-3E0276FD2BC6}"/>
-              </a:ext>
-            </a:extLst>
-          </p:cNvPr>
-          <p:cNvPicPr>
-            <a:picLocks noGrp="1" noChangeAspect="1" noChangeArrowheads="1"/>
-          </p:cNvPicPr>
-          <p:nvPr>
-            <p:ph idx="4294967295"/>
-          </p:nvPr>
-        </p:nvPicPr>
-        <p:blipFill>
-          <a:blip r:embed="rId3">
-            <a:extLst>
-              <a:ext uri="{28A0092B-C50C-407E-A947-70E740481C1C}">
-                <a14:useLocalDpi xmlns:a14="http://schemas.microsoft.com/office/drawing/2010/main" val="0"/>
-              </a:ext>
-            </a:extLst>
-          </a:blip>
-          <a:stretch>
-            <a:fillRect/>
-          </a:stretch>
-        </p:blipFill>
-        <p:spPr bwMode="auto">
-          <a:xfrm>
-            <a:off x="435186" y="2046882"/>
-            <a:ext cx="7527714" cy="4227275"/>
-          </a:xfrm>
-          <a:prstGeom prst="rect">
-            <a:avLst/>
-          </a:prstGeom>
-          <a:noFill/>
-          <a:extLst>
-            <a:ext uri="{909E8E84-426E-40DD-AFC4-6F175D3DCCD1}">
-              <a14:hiddenFill xmlns:a14="http://schemas.microsoft.com/office/drawing/2010/main">
-                <a:solidFill>
-                  <a:srgbClr val="FFFFFF"/>
-                </a:solidFill>
-              </a14:hiddenFill>
-            </a:ext>
-          </a:extLst>
-        </p:spPr>
-      </p:pic>
+              <a:t>What did we do last lesson?</a:t>
+            </a:r>
+          </a:p>
+        </p:txBody>
+      </p:sp>
     </p:spTree>
     <p:extLst>
       <p:ext uri="{BB962C8B-B14F-4D97-AF65-F5344CB8AC3E}">
-        <p14:creationId xmlns:p14="http://schemas.microsoft.com/office/powerpoint/2010/main" val="111117613"/>
+        <p14:creationId xmlns:p14="http://schemas.microsoft.com/office/powerpoint/2010/main" val="1808581615"/>
       </p:ext>
     </p:extLst>
   </p:cSld>
@@ -21720,7 +25361,13 @@
   <p:cSld>
     <p:spTree>
       <p:nvGrpSpPr>
-        <p:cNvPr id="1" name=""/>
+        <p:cNvPr id="1" name="Shape 470">
+          <a:extLst>
+            <a:ext uri="{FF2B5EF4-FFF2-40B4-BE49-F238E27FC236}">
+              <a16:creationId xmlns:a16="http://schemas.microsoft.com/office/drawing/2014/main" id="{DDE2D2EB-D5DC-2337-CDF3-57F128747B3D}"/>
+            </a:ext>
+          </a:extLst>
+        </p:cNvPr>
         <p:cNvGrpSpPr/>
         <p:nvPr/>
       </p:nvGrpSpPr>
@@ -21734,61 +25381,346 @@
       </p:grpSpPr>
       <p:sp>
         <p:nvSpPr>
-          <p:cNvPr id="5" name="Title 4">
-            <a:extLst>
-              <a:ext uri="{FF2B5EF4-FFF2-40B4-BE49-F238E27FC236}">
-                <a16:creationId xmlns:a16="http://schemas.microsoft.com/office/drawing/2014/main" id="{C09D6BAA-9655-19E9-C6CF-82D4EC658E94}"/>
-              </a:ext>
-            </a:extLst>
-          </p:cNvPr>
-          <p:cNvSpPr>
+          <p:cNvPr id="471" name="Google Shape;471;p55">
+            <a:extLst>
+              <a:ext uri="{FF2B5EF4-FFF2-40B4-BE49-F238E27FC236}">
+                <a16:creationId xmlns:a16="http://schemas.microsoft.com/office/drawing/2014/main" id="{16074BB9-F153-95B5-1D77-133E1B58EFF7}"/>
+              </a:ext>
+            </a:extLst>
+          </p:cNvPr>
+          <p:cNvSpPr txBox="1">
             <a:spLocks noGrp="1"/>
           </p:cNvSpPr>
           <p:nvPr>
             <p:ph type="title"/>
           </p:nvPr>
         </p:nvSpPr>
-        <p:spPr/>
+        <p:spPr>
+          <a:xfrm>
+            <a:off x="640928" y="629565"/>
+            <a:ext cx="8231293" cy="1189037"/>
+          </a:xfrm>
+          <a:noFill/>
+          <a:ln>
+            <a:noFill/>
+          </a:ln>
+        </p:spPr>
+        <p:txBody>
+          <a:bodyPr spcFirstLastPara="1" vert="horz" wrap="square" lIns="121900" tIns="121900" rIns="121900" bIns="121900" rtlCol="0" anchor="t" anchorCtr="0">
+            <a:normAutofit/>
+          </a:bodyPr>
+          <a:lstStyle/>
+          <a:p>
+            <a:pPr lvl="0"/>
+            <a:r>
+              <a:rPr lang="en-US" dirty="0"/>
+              <a:t>Pre class problem 1</a:t>
+            </a:r>
+          </a:p>
+        </p:txBody>
+      </p:sp>
+      <p:sp>
+        <p:nvSpPr>
+          <p:cNvPr id="2" name="Content Placeholder 2">
+            <a:extLst>
+              <a:ext uri="{FF2B5EF4-FFF2-40B4-BE49-F238E27FC236}">
+                <a16:creationId xmlns:a16="http://schemas.microsoft.com/office/drawing/2014/main" id="{26BFF574-D87F-5665-E149-A6F07BF5762A}"/>
+              </a:ext>
+            </a:extLst>
+          </p:cNvPr>
+          <p:cNvSpPr txBox="1">
+            <a:spLocks/>
+          </p:cNvSpPr>
+          <p:nvPr/>
+        </p:nvSpPr>
+        <p:spPr>
+          <a:xfrm>
+            <a:off x="558265" y="1542449"/>
+            <a:ext cx="10601960" cy="4023360"/>
+          </a:xfrm>
+          <a:prstGeom prst="rect">
+            <a:avLst/>
+          </a:prstGeom>
+        </p:spPr>
         <p:txBody>
           <a:bodyPr/>
-          <a:lstStyle/>
-          <a:p>
-            <a:r>
-              <a:rPr lang="en-US" dirty="0"/>
-              <a:t>Mutable vs Immutable</a:t>
-            </a:r>
-          </a:p>
-        </p:txBody>
-      </p:sp>
-      <p:sp>
-        <p:nvSpPr>
-          <p:cNvPr id="2" name="Text Placeholder 1">
-            <a:extLst>
-              <a:ext uri="{FF2B5EF4-FFF2-40B4-BE49-F238E27FC236}">
-                <a16:creationId xmlns:a16="http://schemas.microsoft.com/office/drawing/2014/main" id="{E92320F4-343B-B70C-FC55-C13769079075}"/>
-              </a:ext>
-            </a:extLst>
-          </p:cNvPr>
-          <p:cNvSpPr>
-            <a:spLocks noGrp="1"/>
-          </p:cNvSpPr>
-          <p:nvPr>
-            <p:ph type="body" sz="quarter" idx="11"/>
-          </p:nvPr>
-        </p:nvSpPr>
-        <p:spPr/>
-        <p:txBody>
-          <a:bodyPr/>
-          <a:lstStyle/>
-          <a:p>
-            <a:endParaRPr lang="en-US"/>
+          <a:lstStyle>
+            <a:lvl1pPr marL="182880" indent="-182880" algn="l" defTabSz="914400" rtl="0" eaLnBrk="1" latinLnBrk="0" hangingPunct="1">
+              <a:lnSpc>
+                <a:spcPct val="95000"/>
+              </a:lnSpc>
+              <a:spcBef>
+                <a:spcPts val="1000"/>
+              </a:spcBef>
+              <a:buFont typeface="Arial" panose="020B0604020202020204" pitchFamily="34" charset="0"/>
+              <a:buChar char="▪"/>
+              <a:defRPr sz="1700" kern="1200">
+                <a:solidFill>
+                  <a:schemeClr val="tx1"/>
+                </a:solidFill>
+                <a:latin typeface="+mn-lt"/>
+                <a:ea typeface="+mn-ea"/>
+                <a:cs typeface="+mn-cs"/>
+              </a:defRPr>
+            </a:lvl1pPr>
+            <a:lvl2pPr marL="365760" indent="-182880" algn="l" defTabSz="914400" rtl="0" eaLnBrk="1" latinLnBrk="0" hangingPunct="1">
+              <a:lnSpc>
+                <a:spcPct val="95000"/>
+              </a:lnSpc>
+              <a:spcBef>
+                <a:spcPts val="500"/>
+              </a:spcBef>
+              <a:buFont typeface="Arial" panose="020B0604020202020204" pitchFamily="34" charset="0"/>
+              <a:buChar char="–"/>
+              <a:defRPr sz="1700" kern="1200">
+                <a:solidFill>
+                  <a:schemeClr val="tx1"/>
+                </a:solidFill>
+                <a:latin typeface="+mn-lt"/>
+                <a:ea typeface="+mn-ea"/>
+                <a:cs typeface="+mn-cs"/>
+              </a:defRPr>
+            </a:lvl2pPr>
+            <a:lvl3pPr marL="548640" indent="-182880" algn="l" defTabSz="914400" rtl="0" eaLnBrk="1" latinLnBrk="0" hangingPunct="1">
+              <a:lnSpc>
+                <a:spcPct val="95000"/>
+              </a:lnSpc>
+              <a:spcBef>
+                <a:spcPts val="500"/>
+              </a:spcBef>
+              <a:buFont typeface="Arial" panose="020B0604020202020204" pitchFamily="34" charset="0"/>
+              <a:buChar char="–"/>
+              <a:defRPr sz="1700" kern="1200">
+                <a:solidFill>
+                  <a:schemeClr val="tx1"/>
+                </a:solidFill>
+                <a:latin typeface="+mn-lt"/>
+                <a:ea typeface="+mn-ea"/>
+                <a:cs typeface="+mn-cs"/>
+              </a:defRPr>
+            </a:lvl3pPr>
+            <a:lvl4pPr marL="731520" indent="-182880" algn="l" defTabSz="914400" rtl="0" eaLnBrk="1" latinLnBrk="0" hangingPunct="1">
+              <a:lnSpc>
+                <a:spcPct val="95000"/>
+              </a:lnSpc>
+              <a:spcBef>
+                <a:spcPts val="500"/>
+              </a:spcBef>
+              <a:buFont typeface="Arial" panose="020B0604020202020204" pitchFamily="34" charset="0"/>
+              <a:buChar char="–"/>
+              <a:defRPr sz="1700" kern="1200">
+                <a:solidFill>
+                  <a:schemeClr val="tx1"/>
+                </a:solidFill>
+                <a:latin typeface="+mn-lt"/>
+                <a:ea typeface="+mn-ea"/>
+                <a:cs typeface="+mn-cs"/>
+              </a:defRPr>
+            </a:lvl4pPr>
+            <a:lvl5pPr marL="914400" indent="-182880" algn="l" defTabSz="914400" rtl="0" eaLnBrk="1" latinLnBrk="0" hangingPunct="1">
+              <a:lnSpc>
+                <a:spcPct val="95000"/>
+              </a:lnSpc>
+              <a:spcBef>
+                <a:spcPts val="500"/>
+              </a:spcBef>
+              <a:buFont typeface="Arial" panose="020B0604020202020204" pitchFamily="34" charset="0"/>
+              <a:buChar char="–"/>
+              <a:defRPr sz="1700" kern="1200">
+                <a:solidFill>
+                  <a:schemeClr val="tx1"/>
+                </a:solidFill>
+                <a:latin typeface="+mn-lt"/>
+                <a:ea typeface="+mn-ea"/>
+                <a:cs typeface="+mn-cs"/>
+              </a:defRPr>
+            </a:lvl5pPr>
+            <a:lvl6pPr marL="1097280" indent="-182880" algn="l" defTabSz="914400" rtl="0" eaLnBrk="1" latinLnBrk="0" hangingPunct="1">
+              <a:lnSpc>
+                <a:spcPct val="95000"/>
+              </a:lnSpc>
+              <a:spcBef>
+                <a:spcPts val="500"/>
+              </a:spcBef>
+              <a:buFont typeface="Arial" panose="020B0604020202020204" pitchFamily="34" charset="0"/>
+              <a:buChar char="–"/>
+              <a:defRPr sz="1700" kern="1200">
+                <a:solidFill>
+                  <a:schemeClr val="tx1"/>
+                </a:solidFill>
+                <a:latin typeface="+mn-lt"/>
+                <a:ea typeface="+mn-ea"/>
+                <a:cs typeface="+mn-cs"/>
+              </a:defRPr>
+            </a:lvl6pPr>
+            <a:lvl7pPr marL="1280160" indent="-182880" algn="l" defTabSz="914400" rtl="0" eaLnBrk="1" latinLnBrk="0" hangingPunct="1">
+              <a:lnSpc>
+                <a:spcPct val="95000"/>
+              </a:lnSpc>
+              <a:spcBef>
+                <a:spcPts val="500"/>
+              </a:spcBef>
+              <a:buFont typeface="Arial" panose="020B0604020202020204" pitchFamily="34" charset="0"/>
+              <a:buChar char="–"/>
+              <a:defRPr sz="1700" kern="1200">
+                <a:solidFill>
+                  <a:schemeClr val="tx1"/>
+                </a:solidFill>
+                <a:latin typeface="+mn-lt"/>
+                <a:ea typeface="+mn-ea"/>
+                <a:cs typeface="+mn-cs"/>
+              </a:defRPr>
+            </a:lvl7pPr>
+            <a:lvl8pPr marL="1463040" indent="-182880" algn="l" defTabSz="914400" rtl="0" eaLnBrk="1" latinLnBrk="0" hangingPunct="1">
+              <a:lnSpc>
+                <a:spcPct val="95000"/>
+              </a:lnSpc>
+              <a:spcBef>
+                <a:spcPts val="500"/>
+              </a:spcBef>
+              <a:buFont typeface="Arial" panose="020B0604020202020204" pitchFamily="34" charset="0"/>
+              <a:buChar char="–"/>
+              <a:defRPr sz="1700" kern="1200">
+                <a:solidFill>
+                  <a:schemeClr val="tx1"/>
+                </a:solidFill>
+                <a:latin typeface="+mn-lt"/>
+                <a:ea typeface="+mn-ea"/>
+                <a:cs typeface="+mn-cs"/>
+              </a:defRPr>
+            </a:lvl8pPr>
+            <a:lvl9pPr marL="1645920" indent="-182880" algn="l" defTabSz="914400" rtl="0" eaLnBrk="1" latinLnBrk="0" hangingPunct="1">
+              <a:lnSpc>
+                <a:spcPct val="95000"/>
+              </a:lnSpc>
+              <a:spcBef>
+                <a:spcPts val="500"/>
+              </a:spcBef>
+              <a:buFont typeface="Arial" panose="020B0604020202020204" pitchFamily="34" charset="0"/>
+              <a:buChar char="–"/>
+              <a:defRPr sz="1700" kern="1200">
+                <a:solidFill>
+                  <a:schemeClr val="tx1"/>
+                </a:solidFill>
+                <a:latin typeface="+mn-lt"/>
+                <a:ea typeface="+mn-ea"/>
+                <a:cs typeface="+mn-cs"/>
+              </a:defRPr>
+            </a:lvl9pPr>
+          </a:lstStyle>
+          <a:p>
+            <a:r>
+              <a:rPr lang="en-US" sz="2800" dirty="0">
+                <a:solidFill>
+                  <a:schemeClr val="bg1"/>
+                </a:solidFill>
+              </a:rPr>
+              <a:t>Intelligence analysts have intercepted a transmission from an enemy outpost. The signal contains </a:t>
+            </a:r>
+            <a:r>
+              <a:rPr lang="en-US" sz="2800" b="1" dirty="0">
+                <a:solidFill>
+                  <a:schemeClr val="bg1"/>
+                </a:solidFill>
+              </a:rPr>
+              <a:t>100 scrambled numeric values</a:t>
+            </a:r>
+            <a:r>
+              <a:rPr lang="en-US" sz="2800" dirty="0">
+                <a:solidFill>
+                  <a:schemeClr val="bg1"/>
+                </a:solidFill>
+              </a:rPr>
+              <a:t> — but buried inside are the </a:t>
+            </a:r>
+            <a:r>
+              <a:rPr lang="en-US" sz="2800" b="1" dirty="0">
+                <a:solidFill>
+                  <a:schemeClr val="bg1"/>
+                </a:solidFill>
+              </a:rPr>
+              <a:t>true coordinates</a:t>
+            </a:r>
+            <a:r>
+              <a:rPr lang="en-US" sz="2800" dirty="0">
+                <a:solidFill>
+                  <a:schemeClr val="bg1"/>
+                </a:solidFill>
+              </a:rPr>
+              <a:t> of the enemy's hidden command center.</a:t>
+            </a:r>
+          </a:p>
+          <a:p>
+            <a:r>
+              <a:rPr lang="en-US" sz="2800" dirty="0">
+                <a:solidFill>
+                  <a:schemeClr val="bg1"/>
+                </a:solidFill>
+              </a:rPr>
+              <a:t>Your commanding officer explains: </a:t>
+            </a:r>
+            <a:r>
+              <a:rPr lang="en-US" sz="2800" i="1" dirty="0">
+                <a:solidFill>
+                  <a:schemeClr val="bg1"/>
+                </a:solidFill>
+              </a:rPr>
+              <a:t>"The enemy encodes their location by hiding it in plain sight. Take the </a:t>
+            </a:r>
+            <a:r>
+              <a:rPr lang="en-US" sz="2800" b="1" i="1" dirty="0">
+                <a:solidFill>
+                  <a:schemeClr val="bg1"/>
+                </a:solidFill>
+              </a:rPr>
+              <a:t>5 highest signal values</a:t>
+            </a:r>
+            <a:r>
+              <a:rPr lang="en-US" sz="2800" i="1" dirty="0">
+                <a:solidFill>
+                  <a:schemeClr val="bg1"/>
+                </a:solidFill>
+              </a:rPr>
+              <a:t>, sum them together, then divide by </a:t>
+            </a:r>
+            <a:r>
+              <a:rPr lang="en-US" sz="2800" b="1" i="1" dirty="0">
+                <a:solidFill>
+                  <a:schemeClr val="bg1"/>
+                </a:solidFill>
+              </a:rPr>
+              <a:t>10</a:t>
+            </a:r>
+            <a:r>
+              <a:rPr lang="en-US" sz="2800" i="1" dirty="0">
+                <a:solidFill>
+                  <a:schemeClr val="bg1"/>
+                </a:solidFill>
+              </a:rPr>
+              <a:t>. The result is the target's grid coordinate."</a:t>
+            </a:r>
+            <a:endParaRPr lang="en-US" sz="2800" dirty="0">
+              <a:solidFill>
+                <a:schemeClr val="bg1"/>
+              </a:solidFill>
+            </a:endParaRPr>
+          </a:p>
+          <a:p>
+            <a:r>
+              <a:rPr lang="en-US" sz="2800" dirty="0">
+                <a:solidFill>
+                  <a:schemeClr val="bg1"/>
+                </a:solidFill>
+              </a:rPr>
+              <a:t>Your mission: write a Python program to decode the transmission and report the coordinates.  You have 20 minutes to finish this before the enemy moves their command post.</a:t>
+            </a:r>
           </a:p>
         </p:txBody>
       </p:sp>
     </p:spTree>
     <p:extLst>
       <p:ext uri="{BB962C8B-B14F-4D97-AF65-F5344CB8AC3E}">
-        <p14:creationId xmlns:p14="http://schemas.microsoft.com/office/powerpoint/2010/main" val="3047554373"/>
+        <p14:creationId xmlns:p14="http://schemas.microsoft.com/office/powerpoint/2010/main" val="750925262"/>
       </p:ext>
     </p:extLst>
   </p:cSld>
@@ -21820,7 +25752,7 @@
           <p:cNvPr id="2" name="Title 1">
             <a:extLst>
               <a:ext uri="{FF2B5EF4-FFF2-40B4-BE49-F238E27FC236}">
-                <a16:creationId xmlns:a16="http://schemas.microsoft.com/office/drawing/2014/main" id="{0D54D348-CAAF-3773-6861-C22AEF86462B}"/>
+                <a16:creationId xmlns:a16="http://schemas.microsoft.com/office/drawing/2014/main" id="{57EB4430-1F71-D899-34E4-0D4105CCE823}"/>
               </a:ext>
             </a:extLst>
           </p:cNvPr>
@@ -21838,17 +25770,17 @@
           <a:p>
             <a:r>
               <a:rPr lang="en-US" dirty="0"/>
-              <a:t>Initializing Tuples and Lists</a:t>
-            </a:r>
-          </a:p>
-        </p:txBody>
-      </p:sp>
-      <p:sp>
-        <p:nvSpPr>
-          <p:cNvPr id="4" name="Text Placeholder 3">
-            <a:extLst>
-              <a:ext uri="{FF2B5EF4-FFF2-40B4-BE49-F238E27FC236}">
-                <a16:creationId xmlns:a16="http://schemas.microsoft.com/office/drawing/2014/main" id="{97A372BF-6DD3-897A-59AA-8F0BA0E394B1}"/>
+              <a:t>Objectives</a:t>
+            </a:r>
+          </a:p>
+        </p:txBody>
+      </p:sp>
+      <p:sp>
+        <p:nvSpPr>
+          <p:cNvPr id="3" name="Content Placeholder 2">
+            <a:extLst>
+              <a:ext uri="{FF2B5EF4-FFF2-40B4-BE49-F238E27FC236}">
+                <a16:creationId xmlns:a16="http://schemas.microsoft.com/office/drawing/2014/main" id="{E76FF94A-3BCA-070D-C682-367F5F0F327C}"/>
               </a:ext>
             </a:extLst>
           </p:cNvPr>
@@ -21859,19 +25791,65 @@
             <p:ph type="body" sz="quarter" idx="11"/>
           </p:nvPr>
         </p:nvSpPr>
-        <p:spPr/>
+        <p:spPr>
+          <a:xfrm>
+            <a:off x="548640" y="2148840"/>
+            <a:ext cx="10601960" cy="4023360"/>
+          </a:xfrm>
+        </p:spPr>
         <p:txBody>
           <a:bodyPr/>
           <a:lstStyle/>
           <a:p>
-            <a:endParaRPr lang="en-US"/>
+            <a:pPr marL="457200" indent="-457200">
+              <a:buFont typeface="Arial" panose="020B0604020202020204" pitchFamily="34" charset="0"/>
+              <a:buChar char="•"/>
+            </a:pPr>
+            <a:r>
+              <a:rPr lang="en-US" dirty="0"/>
+              <a:t>Understand the difference between lists, tuples, dictionaries, and sets.</a:t>
+            </a:r>
+          </a:p>
+          <a:p>
+            <a:pPr marL="457200" indent="-457200">
+              <a:buFont typeface="Arial" panose="020B0604020202020204" pitchFamily="34" charset="0"/>
+              <a:buChar char="•"/>
+            </a:pPr>
+            <a:endParaRPr lang="en-US" dirty="0"/>
+          </a:p>
+          <a:p>
+            <a:pPr marL="457200" indent="-457200">
+              <a:buFont typeface="Arial" panose="020B0604020202020204" pitchFamily="34" charset="0"/>
+              <a:buChar char="•"/>
+            </a:pPr>
+            <a:r>
+              <a:rPr lang="en-US" dirty="0"/>
+              <a:t>Know when and how to apply nested lists</a:t>
+            </a:r>
+          </a:p>
+          <a:p>
+            <a:pPr marL="457200" indent="-457200">
+              <a:buFont typeface="Arial" panose="020B0604020202020204" pitchFamily="34" charset="0"/>
+              <a:buChar char="•"/>
+            </a:pPr>
+            <a:endParaRPr lang="en-US" dirty="0"/>
+          </a:p>
+          <a:p>
+            <a:pPr marL="457200" indent="-457200">
+              <a:buFont typeface="Arial" panose="020B0604020202020204" pitchFamily="34" charset="0"/>
+              <a:buChar char="•"/>
+            </a:pPr>
+            <a:r>
+              <a:rPr lang="en-US" dirty="0"/>
+              <a:t>Implement and discuss some basic list manipulation techniques</a:t>
+            </a:r>
           </a:p>
         </p:txBody>
       </p:sp>
     </p:spTree>
     <p:extLst>
       <p:ext uri="{BB962C8B-B14F-4D97-AF65-F5344CB8AC3E}">
-        <p14:creationId xmlns:p14="http://schemas.microsoft.com/office/powerpoint/2010/main" val="3731398127"/>
+        <p14:creationId xmlns:p14="http://schemas.microsoft.com/office/powerpoint/2010/main" val="3616642083"/>
       </p:ext>
     </p:extLst>
   </p:cSld>
@@ -21900,10 +25878,10 @@
       </p:grpSpPr>
       <p:sp>
         <p:nvSpPr>
-          <p:cNvPr id="2" name="Title 1">
-            <a:extLst>
-              <a:ext uri="{FF2B5EF4-FFF2-40B4-BE49-F238E27FC236}">
-                <a16:creationId xmlns:a16="http://schemas.microsoft.com/office/drawing/2014/main" id="{6D975B9B-792C-0491-2A64-05D2E2B19FD7}"/>
+          <p:cNvPr id="5" name="Title 4">
+            <a:extLst>
+              <a:ext uri="{FF2B5EF4-FFF2-40B4-BE49-F238E27FC236}">
+                <a16:creationId xmlns:a16="http://schemas.microsoft.com/office/drawing/2014/main" id="{C09D6BAA-9655-19E9-C6CF-82D4EC658E94}"/>
               </a:ext>
             </a:extLst>
           </p:cNvPr>
@@ -21914,47 +25892,1317 @@
             <p:ph type="title"/>
           </p:nvPr>
         </p:nvSpPr>
-        <p:spPr/>
+        <p:spPr>
+          <a:xfrm>
+            <a:off x="549275" y="388461"/>
+            <a:ext cx="8231293" cy="1189037"/>
+          </a:xfrm>
+        </p:spPr>
         <p:txBody>
           <a:bodyPr/>
           <a:lstStyle/>
           <a:p>
             <a:r>
               <a:rPr lang="en-US" dirty="0"/>
-              <a:t>Copying Tuples and Lists</a:t>
-            </a:r>
-          </a:p>
-        </p:txBody>
-      </p:sp>
-      <p:sp>
-        <p:nvSpPr>
-          <p:cNvPr id="4" name="Text Placeholder 3">
-            <a:extLst>
-              <a:ext uri="{FF2B5EF4-FFF2-40B4-BE49-F238E27FC236}">
-                <a16:creationId xmlns:a16="http://schemas.microsoft.com/office/drawing/2014/main" id="{B62A6C6D-102A-6534-3B36-95CE30018F7E}"/>
-              </a:ext>
-            </a:extLst>
-          </p:cNvPr>
-          <p:cNvSpPr>
-            <a:spLocks noGrp="1"/>
-          </p:cNvSpPr>
+              <a:t>Lists</a:t>
+            </a:r>
+          </a:p>
+        </p:txBody>
+      </p:sp>
+      <p:graphicFrame>
+        <p:nvGraphicFramePr>
+          <p:cNvPr id="3" name="Table 2">
+            <a:extLst>
+              <a:ext uri="{FF2B5EF4-FFF2-40B4-BE49-F238E27FC236}">
+                <a16:creationId xmlns:a16="http://schemas.microsoft.com/office/drawing/2014/main" id="{19A12711-B623-20A5-8867-310A62CE9F29}"/>
+              </a:ext>
+            </a:extLst>
+          </p:cNvPr>
+          <p:cNvGraphicFramePr>
+            <a:graphicFrameLocks noGrp="1"/>
+          </p:cNvGraphicFramePr>
           <p:nvPr>
-            <p:ph type="body" sz="quarter" idx="11"/>
+            <p:extLst>
+              <p:ext uri="{D42A27DB-BD31-4B8C-83A1-F6EECF244321}">
+                <p14:modId xmlns:p14="http://schemas.microsoft.com/office/powerpoint/2010/main" val="3390121708"/>
+              </p:ext>
+            </p:extLst>
           </p:nvPr>
-        </p:nvSpPr>
-        <p:spPr/>
-        <p:txBody>
-          <a:bodyPr/>
-          <a:lstStyle/>
-          <a:p>
-            <a:endParaRPr lang="en-US"/>
-          </a:p>
-        </p:txBody>
-      </p:sp>
+        </p:nvGraphicFramePr>
+        <p:xfrm>
+          <a:off x="549275" y="2004060"/>
+          <a:ext cx="11093450" cy="3870960"/>
+        </p:xfrm>
+        <a:graphic>
+          <a:graphicData uri="http://schemas.openxmlformats.org/drawingml/2006/table">
+            <a:tbl>
+              <a:tblPr/>
+              <a:tblGrid>
+                <a:gridCol w="5546725">
+                  <a:extLst>
+                    <a:ext uri="{9D8B030D-6E8A-4147-A177-3AD203B41FA5}">
+                      <a16:colId xmlns:a16="http://schemas.microsoft.com/office/drawing/2014/main" val="1581277800"/>
+                    </a:ext>
+                  </a:extLst>
+                </a:gridCol>
+                <a:gridCol w="5546725">
+                  <a:extLst>
+                    <a:ext uri="{9D8B030D-6E8A-4147-A177-3AD203B41FA5}">
+                      <a16:colId xmlns:a16="http://schemas.microsoft.com/office/drawing/2014/main" val="1748122949"/>
+                    </a:ext>
+                  </a:extLst>
+                </a:gridCol>
+              </a:tblGrid>
+              <a:tr h="0">
+                <a:tc>
+                  <a:txBody>
+                    <a:bodyPr/>
+                    <a:lstStyle/>
+                    <a:p>
+                      <a:pPr>
+                        <a:buNone/>
+                      </a:pPr>
+                      <a:r>
+                        <a:rPr lang="en-US" sz="2400" b="1" dirty="0"/>
+                        <a:t>Feature</a:t>
+                      </a:r>
+                    </a:p>
+                  </a:txBody>
+                  <a:tcPr anchor="ctr">
+                    <a:lnL w="12700" cap="flat" cmpd="sng" algn="ctr">
+                      <a:solidFill>
+                        <a:schemeClr val="tx1"/>
+                      </a:solidFill>
+                      <a:prstDash val="solid"/>
+                      <a:round/>
+                      <a:headEnd type="none" w="med" len="med"/>
+                      <a:tailEnd type="none" w="med" len="med"/>
+                    </a:lnL>
+                    <a:lnR w="12700" cap="flat" cmpd="sng" algn="ctr">
+                      <a:solidFill>
+                        <a:schemeClr val="tx1"/>
+                      </a:solidFill>
+                      <a:prstDash val="solid"/>
+                      <a:round/>
+                      <a:headEnd type="none" w="med" len="med"/>
+                      <a:tailEnd type="none" w="med" len="med"/>
+                    </a:lnR>
+                    <a:lnT w="12700" cap="flat" cmpd="sng" algn="ctr">
+                      <a:solidFill>
+                        <a:schemeClr val="tx1"/>
+                      </a:solidFill>
+                      <a:prstDash val="solid"/>
+                      <a:round/>
+                      <a:headEnd type="none" w="med" len="med"/>
+                      <a:tailEnd type="none" w="med" len="med"/>
+                    </a:lnT>
+                    <a:lnB w="12700" cap="flat" cmpd="sng" algn="ctr">
+                      <a:solidFill>
+                        <a:schemeClr val="tx1"/>
+                      </a:solidFill>
+                      <a:prstDash val="solid"/>
+                      <a:round/>
+                      <a:headEnd type="none" w="med" len="med"/>
+                      <a:tailEnd type="none" w="med" len="med"/>
+                    </a:lnB>
+                    <a:noFill/>
+                  </a:tcPr>
+                </a:tc>
+                <a:tc>
+                  <a:txBody>
+                    <a:bodyPr/>
+                    <a:lstStyle/>
+                    <a:p>
+                      <a:pPr>
+                        <a:buNone/>
+                      </a:pPr>
+                      <a:r>
+                        <a:rPr lang="en-US" sz="2400" b="1" dirty="0"/>
+                        <a:t>Detail</a:t>
+                      </a:r>
+                    </a:p>
+                  </a:txBody>
+                  <a:tcPr anchor="ctr">
+                    <a:lnL w="12700" cap="flat" cmpd="sng" algn="ctr">
+                      <a:solidFill>
+                        <a:schemeClr val="tx1"/>
+                      </a:solidFill>
+                      <a:prstDash val="solid"/>
+                      <a:round/>
+                      <a:headEnd type="none" w="med" len="med"/>
+                      <a:tailEnd type="none" w="med" len="med"/>
+                    </a:lnL>
+                    <a:lnR w="12700" cap="flat" cmpd="sng" algn="ctr">
+                      <a:solidFill>
+                        <a:schemeClr val="tx1"/>
+                      </a:solidFill>
+                      <a:prstDash val="solid"/>
+                      <a:round/>
+                      <a:headEnd type="none" w="med" len="med"/>
+                      <a:tailEnd type="none" w="med" len="med"/>
+                    </a:lnR>
+                    <a:lnT w="12700" cap="flat" cmpd="sng" algn="ctr">
+                      <a:solidFill>
+                        <a:schemeClr val="tx1"/>
+                      </a:solidFill>
+                      <a:prstDash val="solid"/>
+                      <a:round/>
+                      <a:headEnd type="none" w="med" len="med"/>
+                      <a:tailEnd type="none" w="med" len="med"/>
+                    </a:lnT>
+                    <a:lnB w="12700" cap="flat" cmpd="sng" algn="ctr">
+                      <a:solidFill>
+                        <a:schemeClr val="tx1"/>
+                      </a:solidFill>
+                      <a:prstDash val="solid"/>
+                      <a:round/>
+                      <a:headEnd type="none" w="med" len="med"/>
+                      <a:tailEnd type="none" w="med" len="med"/>
+                    </a:lnB>
+                    <a:noFill/>
+                  </a:tcPr>
+                </a:tc>
+                <a:extLst>
+                  <a:ext uri="{0D108BD9-81ED-4DB2-BD59-A6C34878D82A}">
+                    <a16:rowId xmlns:a16="http://schemas.microsoft.com/office/drawing/2014/main" val="223099710"/>
+                  </a:ext>
+                </a:extLst>
+              </a:tr>
+              <a:tr h="0">
+                <a:tc>
+                  <a:txBody>
+                    <a:bodyPr/>
+                    <a:lstStyle/>
+                    <a:p>
+                      <a:pPr>
+                        <a:buNone/>
+                      </a:pPr>
+                      <a:r>
+                        <a:rPr lang="en-US" b="1" dirty="0"/>
+                        <a:t>Syntax</a:t>
+                      </a:r>
+                      <a:endParaRPr lang="en-US" dirty="0"/>
+                    </a:p>
+                  </a:txBody>
+                  <a:tcPr anchor="ctr">
+                    <a:lnL w="12700" cap="flat" cmpd="sng" algn="ctr">
+                      <a:solidFill>
+                        <a:schemeClr val="tx1"/>
+                      </a:solidFill>
+                      <a:prstDash val="solid"/>
+                      <a:round/>
+                      <a:headEnd type="none" w="med" len="med"/>
+                      <a:tailEnd type="none" w="med" len="med"/>
+                    </a:lnL>
+                    <a:lnR w="12700" cap="flat" cmpd="sng" algn="ctr">
+                      <a:solidFill>
+                        <a:schemeClr val="tx1"/>
+                      </a:solidFill>
+                      <a:prstDash val="solid"/>
+                      <a:round/>
+                      <a:headEnd type="none" w="med" len="med"/>
+                      <a:tailEnd type="none" w="med" len="med"/>
+                    </a:lnR>
+                    <a:lnT w="12700" cap="flat" cmpd="sng" algn="ctr">
+                      <a:solidFill>
+                        <a:schemeClr val="tx1"/>
+                      </a:solidFill>
+                      <a:prstDash val="solid"/>
+                      <a:round/>
+                      <a:headEnd type="none" w="med" len="med"/>
+                      <a:tailEnd type="none" w="med" len="med"/>
+                    </a:lnT>
+                    <a:lnB w="12700" cap="flat" cmpd="sng" algn="ctr">
+                      <a:solidFill>
+                        <a:schemeClr val="tx1"/>
+                      </a:solidFill>
+                      <a:prstDash val="solid"/>
+                      <a:round/>
+                      <a:headEnd type="none" w="med" len="med"/>
+                      <a:tailEnd type="none" w="med" len="med"/>
+                    </a:lnB>
+                    <a:noFill/>
+                  </a:tcPr>
+                </a:tc>
+                <a:tc>
+                  <a:txBody>
+                    <a:bodyPr/>
+                    <a:lstStyle/>
+                    <a:p>
+                      <a:pPr>
+                        <a:buNone/>
+                      </a:pPr>
+                      <a:r>
+                        <a:rPr lang="en-US">
+                          <a:latin typeface="Courier New" panose="02070309020205020404" pitchFamily="49" charset="0"/>
+                        </a:rPr>
+                        <a:t>my_list = [1, 2, 3]</a:t>
+                      </a:r>
+                      <a:endParaRPr lang="en-US"/>
+                    </a:p>
+                  </a:txBody>
+                  <a:tcPr anchor="ctr">
+                    <a:lnL w="12700" cap="flat" cmpd="sng" algn="ctr">
+                      <a:solidFill>
+                        <a:schemeClr val="tx1"/>
+                      </a:solidFill>
+                      <a:prstDash val="solid"/>
+                      <a:round/>
+                      <a:headEnd type="none" w="med" len="med"/>
+                      <a:tailEnd type="none" w="med" len="med"/>
+                    </a:lnL>
+                    <a:lnR w="12700" cap="flat" cmpd="sng" algn="ctr">
+                      <a:solidFill>
+                        <a:schemeClr val="tx1"/>
+                      </a:solidFill>
+                      <a:prstDash val="solid"/>
+                      <a:round/>
+                      <a:headEnd type="none" w="med" len="med"/>
+                      <a:tailEnd type="none" w="med" len="med"/>
+                    </a:lnR>
+                    <a:lnT w="12700" cap="flat" cmpd="sng" algn="ctr">
+                      <a:solidFill>
+                        <a:schemeClr val="tx1"/>
+                      </a:solidFill>
+                      <a:prstDash val="solid"/>
+                      <a:round/>
+                      <a:headEnd type="none" w="med" len="med"/>
+                      <a:tailEnd type="none" w="med" len="med"/>
+                    </a:lnT>
+                    <a:lnB w="12700" cap="flat" cmpd="sng" algn="ctr">
+                      <a:solidFill>
+                        <a:schemeClr val="tx1"/>
+                      </a:solidFill>
+                      <a:prstDash val="solid"/>
+                      <a:round/>
+                      <a:headEnd type="none" w="med" len="med"/>
+                      <a:tailEnd type="none" w="med" len="med"/>
+                    </a:lnB>
+                    <a:noFill/>
+                  </a:tcPr>
+                </a:tc>
+                <a:extLst>
+                  <a:ext uri="{0D108BD9-81ED-4DB2-BD59-A6C34878D82A}">
+                    <a16:rowId xmlns:a16="http://schemas.microsoft.com/office/drawing/2014/main" val="1484729223"/>
+                  </a:ext>
+                </a:extLst>
+              </a:tr>
+              <a:tr h="0">
+                <a:tc>
+                  <a:txBody>
+                    <a:bodyPr/>
+                    <a:lstStyle/>
+                    <a:p>
+                      <a:pPr>
+                        <a:buNone/>
+                      </a:pPr>
+                      <a:r>
+                        <a:rPr lang="en-US" b="1" dirty="0"/>
+                        <a:t>Ordered</a:t>
+                      </a:r>
+                      <a:endParaRPr lang="en-US" dirty="0"/>
+                    </a:p>
+                  </a:txBody>
+                  <a:tcPr anchor="ctr">
+                    <a:lnL w="12700" cap="flat" cmpd="sng" algn="ctr">
+                      <a:solidFill>
+                        <a:schemeClr val="tx1"/>
+                      </a:solidFill>
+                      <a:prstDash val="solid"/>
+                      <a:round/>
+                      <a:headEnd type="none" w="med" len="med"/>
+                      <a:tailEnd type="none" w="med" len="med"/>
+                    </a:lnL>
+                    <a:lnR w="12700" cap="flat" cmpd="sng" algn="ctr">
+                      <a:solidFill>
+                        <a:schemeClr val="tx1"/>
+                      </a:solidFill>
+                      <a:prstDash val="solid"/>
+                      <a:round/>
+                      <a:headEnd type="none" w="med" len="med"/>
+                      <a:tailEnd type="none" w="med" len="med"/>
+                    </a:lnR>
+                    <a:lnT w="12700" cap="flat" cmpd="sng" algn="ctr">
+                      <a:solidFill>
+                        <a:schemeClr val="tx1"/>
+                      </a:solidFill>
+                      <a:prstDash val="solid"/>
+                      <a:round/>
+                      <a:headEnd type="none" w="med" len="med"/>
+                      <a:tailEnd type="none" w="med" len="med"/>
+                    </a:lnT>
+                    <a:lnB w="12700" cap="flat" cmpd="sng" algn="ctr">
+                      <a:solidFill>
+                        <a:schemeClr val="tx1"/>
+                      </a:solidFill>
+                      <a:prstDash val="solid"/>
+                      <a:round/>
+                      <a:headEnd type="none" w="med" len="med"/>
+                      <a:tailEnd type="none" w="med" len="med"/>
+                    </a:lnB>
+                    <a:noFill/>
+                  </a:tcPr>
+                </a:tc>
+                <a:tc>
+                  <a:txBody>
+                    <a:bodyPr/>
+                    <a:lstStyle/>
+                    <a:p>
+                      <a:pPr>
+                        <a:buNone/>
+                      </a:pPr>
+                      <a:r>
+                        <a:rPr lang="en-US" dirty="0"/>
+                        <a:t>✅ Yes — items maintain insertion order</a:t>
+                      </a:r>
+                    </a:p>
+                  </a:txBody>
+                  <a:tcPr anchor="ctr">
+                    <a:lnL w="12700" cap="flat" cmpd="sng" algn="ctr">
+                      <a:solidFill>
+                        <a:schemeClr val="tx1"/>
+                      </a:solidFill>
+                      <a:prstDash val="solid"/>
+                      <a:round/>
+                      <a:headEnd type="none" w="med" len="med"/>
+                      <a:tailEnd type="none" w="med" len="med"/>
+                    </a:lnL>
+                    <a:lnR w="12700" cap="flat" cmpd="sng" algn="ctr">
+                      <a:solidFill>
+                        <a:schemeClr val="tx1"/>
+                      </a:solidFill>
+                      <a:prstDash val="solid"/>
+                      <a:round/>
+                      <a:headEnd type="none" w="med" len="med"/>
+                      <a:tailEnd type="none" w="med" len="med"/>
+                    </a:lnR>
+                    <a:lnT w="12700" cap="flat" cmpd="sng" algn="ctr">
+                      <a:solidFill>
+                        <a:schemeClr val="tx1"/>
+                      </a:solidFill>
+                      <a:prstDash val="solid"/>
+                      <a:round/>
+                      <a:headEnd type="none" w="med" len="med"/>
+                      <a:tailEnd type="none" w="med" len="med"/>
+                    </a:lnT>
+                    <a:lnB w="12700" cap="flat" cmpd="sng" algn="ctr">
+                      <a:solidFill>
+                        <a:schemeClr val="tx1"/>
+                      </a:solidFill>
+                      <a:prstDash val="solid"/>
+                      <a:round/>
+                      <a:headEnd type="none" w="med" len="med"/>
+                      <a:tailEnd type="none" w="med" len="med"/>
+                    </a:lnB>
+                    <a:noFill/>
+                  </a:tcPr>
+                </a:tc>
+                <a:extLst>
+                  <a:ext uri="{0D108BD9-81ED-4DB2-BD59-A6C34878D82A}">
+                    <a16:rowId xmlns:a16="http://schemas.microsoft.com/office/drawing/2014/main" val="1097650853"/>
+                  </a:ext>
+                </a:extLst>
+              </a:tr>
+              <a:tr h="0">
+                <a:tc>
+                  <a:txBody>
+                    <a:bodyPr/>
+                    <a:lstStyle/>
+                    <a:p>
+                      <a:pPr>
+                        <a:buNone/>
+                      </a:pPr>
+                      <a:r>
+                        <a:rPr lang="en-US" b="1" dirty="0"/>
+                        <a:t>Mutable</a:t>
+                      </a:r>
+                      <a:endParaRPr lang="en-US" dirty="0"/>
+                    </a:p>
+                  </a:txBody>
+                  <a:tcPr anchor="ctr">
+                    <a:lnL w="12700" cap="flat" cmpd="sng" algn="ctr">
+                      <a:solidFill>
+                        <a:schemeClr val="tx1"/>
+                      </a:solidFill>
+                      <a:prstDash val="solid"/>
+                      <a:round/>
+                      <a:headEnd type="none" w="med" len="med"/>
+                      <a:tailEnd type="none" w="med" len="med"/>
+                    </a:lnL>
+                    <a:lnR w="12700" cap="flat" cmpd="sng" algn="ctr">
+                      <a:solidFill>
+                        <a:schemeClr val="tx1"/>
+                      </a:solidFill>
+                      <a:prstDash val="solid"/>
+                      <a:round/>
+                      <a:headEnd type="none" w="med" len="med"/>
+                      <a:tailEnd type="none" w="med" len="med"/>
+                    </a:lnR>
+                    <a:lnT w="12700" cap="flat" cmpd="sng" algn="ctr">
+                      <a:solidFill>
+                        <a:schemeClr val="tx1"/>
+                      </a:solidFill>
+                      <a:prstDash val="solid"/>
+                      <a:round/>
+                      <a:headEnd type="none" w="med" len="med"/>
+                      <a:tailEnd type="none" w="med" len="med"/>
+                    </a:lnT>
+                    <a:lnB w="12700" cap="flat" cmpd="sng" algn="ctr">
+                      <a:solidFill>
+                        <a:schemeClr val="tx1"/>
+                      </a:solidFill>
+                      <a:prstDash val="solid"/>
+                      <a:round/>
+                      <a:headEnd type="none" w="med" len="med"/>
+                      <a:tailEnd type="none" w="med" len="med"/>
+                    </a:lnB>
+                    <a:noFill/>
+                  </a:tcPr>
+                </a:tc>
+                <a:tc>
+                  <a:txBody>
+                    <a:bodyPr/>
+                    <a:lstStyle/>
+                    <a:p>
+                      <a:pPr>
+                        <a:buNone/>
+                      </a:pPr>
+                      <a:r>
+                        <a:rPr lang="en-US"/>
+                        <a:t>✅ Yes — items can be added, removed, or changed</a:t>
+                      </a:r>
+                    </a:p>
+                  </a:txBody>
+                  <a:tcPr anchor="ctr">
+                    <a:lnL w="12700" cap="flat" cmpd="sng" algn="ctr">
+                      <a:solidFill>
+                        <a:schemeClr val="tx1"/>
+                      </a:solidFill>
+                      <a:prstDash val="solid"/>
+                      <a:round/>
+                      <a:headEnd type="none" w="med" len="med"/>
+                      <a:tailEnd type="none" w="med" len="med"/>
+                    </a:lnL>
+                    <a:lnR w="12700" cap="flat" cmpd="sng" algn="ctr">
+                      <a:solidFill>
+                        <a:schemeClr val="tx1"/>
+                      </a:solidFill>
+                      <a:prstDash val="solid"/>
+                      <a:round/>
+                      <a:headEnd type="none" w="med" len="med"/>
+                      <a:tailEnd type="none" w="med" len="med"/>
+                    </a:lnR>
+                    <a:lnT w="12700" cap="flat" cmpd="sng" algn="ctr">
+                      <a:solidFill>
+                        <a:schemeClr val="tx1"/>
+                      </a:solidFill>
+                      <a:prstDash val="solid"/>
+                      <a:round/>
+                      <a:headEnd type="none" w="med" len="med"/>
+                      <a:tailEnd type="none" w="med" len="med"/>
+                    </a:lnT>
+                    <a:lnB w="12700" cap="flat" cmpd="sng" algn="ctr">
+                      <a:solidFill>
+                        <a:schemeClr val="tx1"/>
+                      </a:solidFill>
+                      <a:prstDash val="solid"/>
+                      <a:round/>
+                      <a:headEnd type="none" w="med" len="med"/>
+                      <a:tailEnd type="none" w="med" len="med"/>
+                    </a:lnB>
+                    <a:noFill/>
+                  </a:tcPr>
+                </a:tc>
+                <a:extLst>
+                  <a:ext uri="{0D108BD9-81ED-4DB2-BD59-A6C34878D82A}">
+                    <a16:rowId xmlns:a16="http://schemas.microsoft.com/office/drawing/2014/main" val="4280659298"/>
+                  </a:ext>
+                </a:extLst>
+              </a:tr>
+              <a:tr h="0">
+                <a:tc>
+                  <a:txBody>
+                    <a:bodyPr/>
+                    <a:lstStyle/>
+                    <a:p>
+                      <a:pPr>
+                        <a:buNone/>
+                      </a:pPr>
+                      <a:r>
+                        <a:rPr lang="en-US" b="1"/>
+                        <a:t>Duplicates allowed</a:t>
+                      </a:r>
+                      <a:endParaRPr lang="en-US"/>
+                    </a:p>
+                  </a:txBody>
+                  <a:tcPr anchor="ctr">
+                    <a:lnL w="12700" cap="flat" cmpd="sng" algn="ctr">
+                      <a:solidFill>
+                        <a:schemeClr val="tx1"/>
+                      </a:solidFill>
+                      <a:prstDash val="solid"/>
+                      <a:round/>
+                      <a:headEnd type="none" w="med" len="med"/>
+                      <a:tailEnd type="none" w="med" len="med"/>
+                    </a:lnL>
+                    <a:lnR w="12700" cap="flat" cmpd="sng" algn="ctr">
+                      <a:solidFill>
+                        <a:schemeClr val="tx1"/>
+                      </a:solidFill>
+                      <a:prstDash val="solid"/>
+                      <a:round/>
+                      <a:headEnd type="none" w="med" len="med"/>
+                      <a:tailEnd type="none" w="med" len="med"/>
+                    </a:lnR>
+                    <a:lnT w="12700" cap="flat" cmpd="sng" algn="ctr">
+                      <a:solidFill>
+                        <a:schemeClr val="tx1"/>
+                      </a:solidFill>
+                      <a:prstDash val="solid"/>
+                      <a:round/>
+                      <a:headEnd type="none" w="med" len="med"/>
+                      <a:tailEnd type="none" w="med" len="med"/>
+                    </a:lnT>
+                    <a:lnB w="12700" cap="flat" cmpd="sng" algn="ctr">
+                      <a:solidFill>
+                        <a:schemeClr val="tx1"/>
+                      </a:solidFill>
+                      <a:prstDash val="solid"/>
+                      <a:round/>
+                      <a:headEnd type="none" w="med" len="med"/>
+                      <a:tailEnd type="none" w="med" len="med"/>
+                    </a:lnB>
+                    <a:noFill/>
+                  </a:tcPr>
+                </a:tc>
+                <a:tc>
+                  <a:txBody>
+                    <a:bodyPr/>
+                    <a:lstStyle/>
+                    <a:p>
+                      <a:pPr>
+                        <a:buNone/>
+                      </a:pPr>
+                      <a:r>
+                        <a:rPr lang="en-US"/>
+                        <a:t>✅ Yes</a:t>
+                      </a:r>
+                    </a:p>
+                  </a:txBody>
+                  <a:tcPr anchor="ctr">
+                    <a:lnL w="12700" cap="flat" cmpd="sng" algn="ctr">
+                      <a:solidFill>
+                        <a:schemeClr val="tx1"/>
+                      </a:solidFill>
+                      <a:prstDash val="solid"/>
+                      <a:round/>
+                      <a:headEnd type="none" w="med" len="med"/>
+                      <a:tailEnd type="none" w="med" len="med"/>
+                    </a:lnL>
+                    <a:lnR w="12700" cap="flat" cmpd="sng" algn="ctr">
+                      <a:solidFill>
+                        <a:schemeClr val="tx1"/>
+                      </a:solidFill>
+                      <a:prstDash val="solid"/>
+                      <a:round/>
+                      <a:headEnd type="none" w="med" len="med"/>
+                      <a:tailEnd type="none" w="med" len="med"/>
+                    </a:lnR>
+                    <a:lnT w="12700" cap="flat" cmpd="sng" algn="ctr">
+                      <a:solidFill>
+                        <a:schemeClr val="tx1"/>
+                      </a:solidFill>
+                      <a:prstDash val="solid"/>
+                      <a:round/>
+                      <a:headEnd type="none" w="med" len="med"/>
+                      <a:tailEnd type="none" w="med" len="med"/>
+                    </a:lnT>
+                    <a:lnB w="12700" cap="flat" cmpd="sng" algn="ctr">
+                      <a:solidFill>
+                        <a:schemeClr val="tx1"/>
+                      </a:solidFill>
+                      <a:prstDash val="solid"/>
+                      <a:round/>
+                      <a:headEnd type="none" w="med" len="med"/>
+                      <a:tailEnd type="none" w="med" len="med"/>
+                    </a:lnB>
+                    <a:noFill/>
+                  </a:tcPr>
+                </a:tc>
+                <a:extLst>
+                  <a:ext uri="{0D108BD9-81ED-4DB2-BD59-A6C34878D82A}">
+                    <a16:rowId xmlns:a16="http://schemas.microsoft.com/office/drawing/2014/main" val="3299474594"/>
+                  </a:ext>
+                </a:extLst>
+              </a:tr>
+              <a:tr h="0">
+                <a:tc>
+                  <a:txBody>
+                    <a:bodyPr/>
+                    <a:lstStyle/>
+                    <a:p>
+                      <a:pPr>
+                        <a:buNone/>
+                      </a:pPr>
+                      <a:r>
+                        <a:rPr lang="en-US" b="1"/>
+                        <a:t>Indexable</a:t>
+                      </a:r>
+                      <a:endParaRPr lang="en-US"/>
+                    </a:p>
+                  </a:txBody>
+                  <a:tcPr anchor="ctr">
+                    <a:lnL w="12700" cap="flat" cmpd="sng" algn="ctr">
+                      <a:solidFill>
+                        <a:schemeClr val="tx1"/>
+                      </a:solidFill>
+                      <a:prstDash val="solid"/>
+                      <a:round/>
+                      <a:headEnd type="none" w="med" len="med"/>
+                      <a:tailEnd type="none" w="med" len="med"/>
+                    </a:lnL>
+                    <a:lnR w="12700" cap="flat" cmpd="sng" algn="ctr">
+                      <a:solidFill>
+                        <a:schemeClr val="tx1"/>
+                      </a:solidFill>
+                      <a:prstDash val="solid"/>
+                      <a:round/>
+                      <a:headEnd type="none" w="med" len="med"/>
+                      <a:tailEnd type="none" w="med" len="med"/>
+                    </a:lnR>
+                    <a:lnT w="12700" cap="flat" cmpd="sng" algn="ctr">
+                      <a:solidFill>
+                        <a:schemeClr val="tx1"/>
+                      </a:solidFill>
+                      <a:prstDash val="solid"/>
+                      <a:round/>
+                      <a:headEnd type="none" w="med" len="med"/>
+                      <a:tailEnd type="none" w="med" len="med"/>
+                    </a:lnT>
+                    <a:lnB w="12700" cap="flat" cmpd="sng" algn="ctr">
+                      <a:solidFill>
+                        <a:schemeClr val="tx1"/>
+                      </a:solidFill>
+                      <a:prstDash val="solid"/>
+                      <a:round/>
+                      <a:headEnd type="none" w="med" len="med"/>
+                      <a:tailEnd type="none" w="med" len="med"/>
+                    </a:lnB>
+                    <a:noFill/>
+                  </a:tcPr>
+                </a:tc>
+                <a:tc>
+                  <a:txBody>
+                    <a:bodyPr/>
+                    <a:lstStyle/>
+                    <a:p>
+                      <a:pPr>
+                        <a:buNone/>
+                      </a:pPr>
+                      <a:r>
+                        <a:rPr lang="en-US"/>
+                        <a:t>✅ Yes — zero-based: </a:t>
+                      </a:r>
+                      <a:r>
+                        <a:rPr lang="en-US">
+                          <a:latin typeface="Courier New" panose="02070309020205020404" pitchFamily="49" charset="0"/>
+                        </a:rPr>
+                        <a:t>my_list[0]</a:t>
+                      </a:r>
+                      <a:r>
+                        <a:rPr lang="en-US"/>
+                        <a:t> returns </a:t>
+                      </a:r>
+                      <a:r>
+                        <a:rPr lang="en-US">
+                          <a:latin typeface="Courier New" panose="02070309020205020404" pitchFamily="49" charset="0"/>
+                        </a:rPr>
+                        <a:t>1</a:t>
+                      </a:r>
+                      <a:endParaRPr lang="en-US"/>
+                    </a:p>
+                  </a:txBody>
+                  <a:tcPr anchor="ctr">
+                    <a:lnL w="12700" cap="flat" cmpd="sng" algn="ctr">
+                      <a:solidFill>
+                        <a:schemeClr val="tx1"/>
+                      </a:solidFill>
+                      <a:prstDash val="solid"/>
+                      <a:round/>
+                      <a:headEnd type="none" w="med" len="med"/>
+                      <a:tailEnd type="none" w="med" len="med"/>
+                    </a:lnL>
+                    <a:lnR w="12700" cap="flat" cmpd="sng" algn="ctr">
+                      <a:solidFill>
+                        <a:schemeClr val="tx1"/>
+                      </a:solidFill>
+                      <a:prstDash val="solid"/>
+                      <a:round/>
+                      <a:headEnd type="none" w="med" len="med"/>
+                      <a:tailEnd type="none" w="med" len="med"/>
+                    </a:lnR>
+                    <a:lnT w="12700" cap="flat" cmpd="sng" algn="ctr">
+                      <a:solidFill>
+                        <a:schemeClr val="tx1"/>
+                      </a:solidFill>
+                      <a:prstDash val="solid"/>
+                      <a:round/>
+                      <a:headEnd type="none" w="med" len="med"/>
+                      <a:tailEnd type="none" w="med" len="med"/>
+                    </a:lnT>
+                    <a:lnB w="12700" cap="flat" cmpd="sng" algn="ctr">
+                      <a:solidFill>
+                        <a:schemeClr val="tx1"/>
+                      </a:solidFill>
+                      <a:prstDash val="solid"/>
+                      <a:round/>
+                      <a:headEnd type="none" w="med" len="med"/>
+                      <a:tailEnd type="none" w="med" len="med"/>
+                    </a:lnB>
+                    <a:noFill/>
+                  </a:tcPr>
+                </a:tc>
+                <a:extLst>
+                  <a:ext uri="{0D108BD9-81ED-4DB2-BD59-A6C34878D82A}">
+                    <a16:rowId xmlns:a16="http://schemas.microsoft.com/office/drawing/2014/main" val="104336777"/>
+                  </a:ext>
+                </a:extLst>
+              </a:tr>
+              <a:tr h="0">
+                <a:tc>
+                  <a:txBody>
+                    <a:bodyPr/>
+                    <a:lstStyle/>
+                    <a:p>
+                      <a:pPr>
+                        <a:buNone/>
+                      </a:pPr>
+                      <a:r>
+                        <a:rPr lang="en-US" b="1"/>
+                        <a:t>Can mix data types</a:t>
+                      </a:r>
+                      <a:endParaRPr lang="en-US"/>
+                    </a:p>
+                  </a:txBody>
+                  <a:tcPr anchor="ctr">
+                    <a:lnL w="12700" cap="flat" cmpd="sng" algn="ctr">
+                      <a:solidFill>
+                        <a:schemeClr val="tx1"/>
+                      </a:solidFill>
+                      <a:prstDash val="solid"/>
+                      <a:round/>
+                      <a:headEnd type="none" w="med" len="med"/>
+                      <a:tailEnd type="none" w="med" len="med"/>
+                    </a:lnL>
+                    <a:lnR w="12700" cap="flat" cmpd="sng" algn="ctr">
+                      <a:solidFill>
+                        <a:schemeClr val="tx1"/>
+                      </a:solidFill>
+                      <a:prstDash val="solid"/>
+                      <a:round/>
+                      <a:headEnd type="none" w="med" len="med"/>
+                      <a:tailEnd type="none" w="med" len="med"/>
+                    </a:lnR>
+                    <a:lnT w="12700" cap="flat" cmpd="sng" algn="ctr">
+                      <a:solidFill>
+                        <a:schemeClr val="tx1"/>
+                      </a:solidFill>
+                      <a:prstDash val="solid"/>
+                      <a:round/>
+                      <a:headEnd type="none" w="med" len="med"/>
+                      <a:tailEnd type="none" w="med" len="med"/>
+                    </a:lnT>
+                    <a:lnB w="12700" cap="flat" cmpd="sng" algn="ctr">
+                      <a:solidFill>
+                        <a:schemeClr val="tx1"/>
+                      </a:solidFill>
+                      <a:prstDash val="solid"/>
+                      <a:round/>
+                      <a:headEnd type="none" w="med" len="med"/>
+                      <a:tailEnd type="none" w="med" len="med"/>
+                    </a:lnB>
+                    <a:noFill/>
+                  </a:tcPr>
+                </a:tc>
+                <a:tc>
+                  <a:txBody>
+                    <a:bodyPr/>
+                    <a:lstStyle/>
+                    <a:p>
+                      <a:pPr>
+                        <a:buNone/>
+                      </a:pPr>
+                      <a:r>
+                        <a:rPr lang="en-US"/>
+                        <a:t>✅ Yes — </a:t>
+                      </a:r>
+                      <a:r>
+                        <a:rPr lang="en-US">
+                          <a:latin typeface="Courier New" panose="02070309020205020404" pitchFamily="49" charset="0"/>
+                        </a:rPr>
+                        <a:t>[1, "hello", 3.14, True]</a:t>
+                      </a:r>
+                      <a:r>
+                        <a:rPr lang="en-US"/>
+                        <a:t> is valid</a:t>
+                      </a:r>
+                    </a:p>
+                  </a:txBody>
+                  <a:tcPr anchor="ctr">
+                    <a:lnL w="12700" cap="flat" cmpd="sng" algn="ctr">
+                      <a:solidFill>
+                        <a:schemeClr val="tx1"/>
+                      </a:solidFill>
+                      <a:prstDash val="solid"/>
+                      <a:round/>
+                      <a:headEnd type="none" w="med" len="med"/>
+                      <a:tailEnd type="none" w="med" len="med"/>
+                    </a:lnL>
+                    <a:lnR w="12700" cap="flat" cmpd="sng" algn="ctr">
+                      <a:solidFill>
+                        <a:schemeClr val="tx1"/>
+                      </a:solidFill>
+                      <a:prstDash val="solid"/>
+                      <a:round/>
+                      <a:headEnd type="none" w="med" len="med"/>
+                      <a:tailEnd type="none" w="med" len="med"/>
+                    </a:lnR>
+                    <a:lnT w="12700" cap="flat" cmpd="sng" algn="ctr">
+                      <a:solidFill>
+                        <a:schemeClr val="tx1"/>
+                      </a:solidFill>
+                      <a:prstDash val="solid"/>
+                      <a:round/>
+                      <a:headEnd type="none" w="med" len="med"/>
+                      <a:tailEnd type="none" w="med" len="med"/>
+                    </a:lnT>
+                    <a:lnB w="12700" cap="flat" cmpd="sng" algn="ctr">
+                      <a:solidFill>
+                        <a:schemeClr val="tx1"/>
+                      </a:solidFill>
+                      <a:prstDash val="solid"/>
+                      <a:round/>
+                      <a:headEnd type="none" w="med" len="med"/>
+                      <a:tailEnd type="none" w="med" len="med"/>
+                    </a:lnB>
+                    <a:noFill/>
+                  </a:tcPr>
+                </a:tc>
+                <a:extLst>
+                  <a:ext uri="{0D108BD9-81ED-4DB2-BD59-A6C34878D82A}">
+                    <a16:rowId xmlns:a16="http://schemas.microsoft.com/office/drawing/2014/main" val="3833004813"/>
+                  </a:ext>
+                </a:extLst>
+              </a:tr>
+              <a:tr h="0">
+                <a:tc>
+                  <a:txBody>
+                    <a:bodyPr/>
+                    <a:lstStyle/>
+                    <a:p>
+                      <a:pPr>
+                        <a:buNone/>
+                      </a:pPr>
+                      <a:r>
+                        <a:rPr lang="en-US" b="1"/>
+                        <a:t>Nestable</a:t>
+                      </a:r>
+                      <a:endParaRPr lang="en-US"/>
+                    </a:p>
+                  </a:txBody>
+                  <a:tcPr anchor="ctr">
+                    <a:lnL w="12700" cap="flat" cmpd="sng" algn="ctr">
+                      <a:solidFill>
+                        <a:schemeClr val="tx1"/>
+                      </a:solidFill>
+                      <a:prstDash val="solid"/>
+                      <a:round/>
+                      <a:headEnd type="none" w="med" len="med"/>
+                      <a:tailEnd type="none" w="med" len="med"/>
+                    </a:lnL>
+                    <a:lnR w="12700" cap="flat" cmpd="sng" algn="ctr">
+                      <a:solidFill>
+                        <a:schemeClr val="tx1"/>
+                      </a:solidFill>
+                      <a:prstDash val="solid"/>
+                      <a:round/>
+                      <a:headEnd type="none" w="med" len="med"/>
+                      <a:tailEnd type="none" w="med" len="med"/>
+                    </a:lnR>
+                    <a:lnT w="12700" cap="flat" cmpd="sng" algn="ctr">
+                      <a:solidFill>
+                        <a:schemeClr val="tx1"/>
+                      </a:solidFill>
+                      <a:prstDash val="solid"/>
+                      <a:round/>
+                      <a:headEnd type="none" w="med" len="med"/>
+                      <a:tailEnd type="none" w="med" len="med"/>
+                    </a:lnT>
+                    <a:lnB w="12700" cap="flat" cmpd="sng" algn="ctr">
+                      <a:solidFill>
+                        <a:schemeClr val="tx1"/>
+                      </a:solidFill>
+                      <a:prstDash val="solid"/>
+                      <a:round/>
+                      <a:headEnd type="none" w="med" len="med"/>
+                      <a:tailEnd type="none" w="med" len="med"/>
+                    </a:lnB>
+                    <a:noFill/>
+                  </a:tcPr>
+                </a:tc>
+                <a:tc>
+                  <a:txBody>
+                    <a:bodyPr/>
+                    <a:lstStyle/>
+                    <a:p>
+                      <a:pPr>
+                        <a:buNone/>
+                      </a:pPr>
+                      <a:r>
+                        <a:rPr lang="en-US" dirty="0"/>
+                        <a:t>✅ Yes — lists can contain other lists</a:t>
+                      </a:r>
+                    </a:p>
+                  </a:txBody>
+                  <a:tcPr anchor="ctr">
+                    <a:lnL w="12700" cap="flat" cmpd="sng" algn="ctr">
+                      <a:solidFill>
+                        <a:schemeClr val="tx1"/>
+                      </a:solidFill>
+                      <a:prstDash val="solid"/>
+                      <a:round/>
+                      <a:headEnd type="none" w="med" len="med"/>
+                      <a:tailEnd type="none" w="med" len="med"/>
+                    </a:lnL>
+                    <a:lnR w="12700" cap="flat" cmpd="sng" algn="ctr">
+                      <a:solidFill>
+                        <a:schemeClr val="tx1"/>
+                      </a:solidFill>
+                      <a:prstDash val="solid"/>
+                      <a:round/>
+                      <a:headEnd type="none" w="med" len="med"/>
+                      <a:tailEnd type="none" w="med" len="med"/>
+                    </a:lnR>
+                    <a:lnT w="12700" cap="flat" cmpd="sng" algn="ctr">
+                      <a:solidFill>
+                        <a:schemeClr val="tx1"/>
+                      </a:solidFill>
+                      <a:prstDash val="solid"/>
+                      <a:round/>
+                      <a:headEnd type="none" w="med" len="med"/>
+                      <a:tailEnd type="none" w="med" len="med"/>
+                    </a:lnT>
+                    <a:lnB w="12700" cap="flat" cmpd="sng" algn="ctr">
+                      <a:solidFill>
+                        <a:schemeClr val="tx1"/>
+                      </a:solidFill>
+                      <a:prstDash val="solid"/>
+                      <a:round/>
+                      <a:headEnd type="none" w="med" len="med"/>
+                      <a:tailEnd type="none" w="med" len="med"/>
+                    </a:lnB>
+                    <a:noFill/>
+                  </a:tcPr>
+                </a:tc>
+                <a:extLst>
+                  <a:ext uri="{0D108BD9-81ED-4DB2-BD59-A6C34878D82A}">
+                    <a16:rowId xmlns:a16="http://schemas.microsoft.com/office/drawing/2014/main" val="3374798705"/>
+                  </a:ext>
+                </a:extLst>
+              </a:tr>
+              <a:tr h="0">
+                <a:tc>
+                  <a:txBody>
+                    <a:bodyPr/>
+                    <a:lstStyle/>
+                    <a:p>
+                      <a:pPr>
+                        <a:buNone/>
+                      </a:pPr>
+                      <a:r>
+                        <a:rPr lang="en-US" b="1"/>
+                        <a:t>Common methods</a:t>
+                      </a:r>
+                      <a:endParaRPr lang="en-US"/>
+                    </a:p>
+                  </a:txBody>
+                  <a:tcPr anchor="ctr">
+                    <a:lnL w="12700" cap="flat" cmpd="sng" algn="ctr">
+                      <a:solidFill>
+                        <a:schemeClr val="tx1"/>
+                      </a:solidFill>
+                      <a:prstDash val="solid"/>
+                      <a:round/>
+                      <a:headEnd type="none" w="med" len="med"/>
+                      <a:tailEnd type="none" w="med" len="med"/>
+                    </a:lnL>
+                    <a:lnR w="12700" cap="flat" cmpd="sng" algn="ctr">
+                      <a:solidFill>
+                        <a:schemeClr val="tx1"/>
+                      </a:solidFill>
+                      <a:prstDash val="solid"/>
+                      <a:round/>
+                      <a:headEnd type="none" w="med" len="med"/>
+                      <a:tailEnd type="none" w="med" len="med"/>
+                    </a:lnR>
+                    <a:lnT w="12700" cap="flat" cmpd="sng" algn="ctr">
+                      <a:solidFill>
+                        <a:schemeClr val="tx1"/>
+                      </a:solidFill>
+                      <a:prstDash val="solid"/>
+                      <a:round/>
+                      <a:headEnd type="none" w="med" len="med"/>
+                      <a:tailEnd type="none" w="med" len="med"/>
+                    </a:lnT>
+                    <a:lnB w="12700" cap="flat" cmpd="sng" algn="ctr">
+                      <a:solidFill>
+                        <a:schemeClr val="tx1"/>
+                      </a:solidFill>
+                      <a:prstDash val="solid"/>
+                      <a:round/>
+                      <a:headEnd type="none" w="med" len="med"/>
+                      <a:tailEnd type="none" w="med" len="med"/>
+                    </a:lnB>
+                    <a:noFill/>
+                  </a:tcPr>
+                </a:tc>
+                <a:tc>
+                  <a:txBody>
+                    <a:bodyPr/>
+                    <a:lstStyle/>
+                    <a:p>
+                      <a:pPr>
+                        <a:buNone/>
+                      </a:pPr>
+                      <a:r>
+                        <a:rPr lang="en-US" dirty="0">
+                          <a:latin typeface="Courier New" panose="02070309020205020404" pitchFamily="49" charset="0"/>
+                        </a:rPr>
+                        <a:t>.append()</a:t>
+                      </a:r>
+                      <a:r>
+                        <a:rPr lang="en-US" dirty="0"/>
+                        <a:t>, </a:t>
+                      </a:r>
+                      <a:r>
+                        <a:rPr lang="en-US" dirty="0">
+                          <a:latin typeface="Courier New" panose="02070309020205020404" pitchFamily="49" charset="0"/>
+                        </a:rPr>
+                        <a:t>.remove()</a:t>
+                      </a:r>
+                      <a:r>
+                        <a:rPr lang="en-US" dirty="0"/>
+                        <a:t>, </a:t>
+                      </a:r>
+                      <a:r>
+                        <a:rPr lang="en-US" dirty="0">
+                          <a:latin typeface="Courier New" panose="02070309020205020404" pitchFamily="49" charset="0"/>
+                        </a:rPr>
+                        <a:t>.sort()</a:t>
+                      </a:r>
+                      <a:r>
+                        <a:rPr lang="en-US" dirty="0"/>
+                        <a:t>, </a:t>
+                      </a:r>
+                      <a:r>
+                        <a:rPr lang="en-US" dirty="0">
+                          <a:latin typeface="Courier New" panose="02070309020205020404" pitchFamily="49" charset="0"/>
+                        </a:rPr>
+                        <a:t>.pop()</a:t>
+                      </a:r>
+                      <a:r>
+                        <a:rPr lang="en-US" dirty="0"/>
+                        <a:t>, </a:t>
+                      </a:r>
+                      <a:r>
+                        <a:rPr lang="en-US" dirty="0">
+                          <a:latin typeface="Courier New" panose="02070309020205020404" pitchFamily="49" charset="0"/>
+                        </a:rPr>
+                        <a:t>.reverse()</a:t>
+                      </a:r>
+                      <a:r>
+                        <a:rPr lang="en-US" dirty="0"/>
+                        <a:t>, </a:t>
+                      </a:r>
+                      <a:r>
+                        <a:rPr lang="en-US" dirty="0">
+                          <a:latin typeface="Courier New" panose="02070309020205020404" pitchFamily="49" charset="0"/>
+                        </a:rPr>
+                        <a:t>.extend()</a:t>
+                      </a:r>
+                      <a:endParaRPr lang="en-US" dirty="0"/>
+                    </a:p>
+                  </a:txBody>
+                  <a:tcPr anchor="ctr">
+                    <a:lnL w="12700" cap="flat" cmpd="sng" algn="ctr">
+                      <a:solidFill>
+                        <a:schemeClr val="tx1"/>
+                      </a:solidFill>
+                      <a:prstDash val="solid"/>
+                      <a:round/>
+                      <a:headEnd type="none" w="med" len="med"/>
+                      <a:tailEnd type="none" w="med" len="med"/>
+                    </a:lnL>
+                    <a:lnR w="12700" cap="flat" cmpd="sng" algn="ctr">
+                      <a:solidFill>
+                        <a:schemeClr val="tx1"/>
+                      </a:solidFill>
+                      <a:prstDash val="solid"/>
+                      <a:round/>
+                      <a:headEnd type="none" w="med" len="med"/>
+                      <a:tailEnd type="none" w="med" len="med"/>
+                    </a:lnR>
+                    <a:lnT w="12700" cap="flat" cmpd="sng" algn="ctr">
+                      <a:solidFill>
+                        <a:schemeClr val="tx1"/>
+                      </a:solidFill>
+                      <a:prstDash val="solid"/>
+                      <a:round/>
+                      <a:headEnd type="none" w="med" len="med"/>
+                      <a:tailEnd type="none" w="med" len="med"/>
+                    </a:lnT>
+                    <a:lnB w="12700" cap="flat" cmpd="sng" algn="ctr">
+                      <a:solidFill>
+                        <a:schemeClr val="tx1"/>
+                      </a:solidFill>
+                      <a:prstDash val="solid"/>
+                      <a:round/>
+                      <a:headEnd type="none" w="med" len="med"/>
+                      <a:tailEnd type="none" w="med" len="med"/>
+                    </a:lnB>
+                    <a:noFill/>
+                  </a:tcPr>
+                </a:tc>
+                <a:extLst>
+                  <a:ext uri="{0D108BD9-81ED-4DB2-BD59-A6C34878D82A}">
+                    <a16:rowId xmlns:a16="http://schemas.microsoft.com/office/drawing/2014/main" val="3160114375"/>
+                  </a:ext>
+                </a:extLst>
+              </a:tr>
+              <a:tr h="0">
+                <a:tc>
+                  <a:txBody>
+                    <a:bodyPr/>
+                    <a:lstStyle/>
+                    <a:p>
+                      <a:pPr>
+                        <a:buNone/>
+                      </a:pPr>
+                      <a:r>
+                        <a:rPr lang="en-US" b="1"/>
+                        <a:t>Common use case</a:t>
+                      </a:r>
+                      <a:endParaRPr lang="en-US"/>
+                    </a:p>
+                  </a:txBody>
+                  <a:tcPr anchor="ctr">
+                    <a:lnL w="12700" cap="flat" cmpd="sng" algn="ctr">
+                      <a:solidFill>
+                        <a:schemeClr val="tx1"/>
+                      </a:solidFill>
+                      <a:prstDash val="solid"/>
+                      <a:round/>
+                      <a:headEnd type="none" w="med" len="med"/>
+                      <a:tailEnd type="none" w="med" len="med"/>
+                    </a:lnL>
+                    <a:lnR w="12700" cap="flat" cmpd="sng" algn="ctr">
+                      <a:solidFill>
+                        <a:schemeClr val="tx1"/>
+                      </a:solidFill>
+                      <a:prstDash val="solid"/>
+                      <a:round/>
+                      <a:headEnd type="none" w="med" len="med"/>
+                      <a:tailEnd type="none" w="med" len="med"/>
+                    </a:lnR>
+                    <a:lnT w="12700" cap="flat" cmpd="sng" algn="ctr">
+                      <a:solidFill>
+                        <a:schemeClr val="tx1"/>
+                      </a:solidFill>
+                      <a:prstDash val="solid"/>
+                      <a:round/>
+                      <a:headEnd type="none" w="med" len="med"/>
+                      <a:tailEnd type="none" w="med" len="med"/>
+                    </a:lnT>
+                    <a:lnB w="12700" cap="flat" cmpd="sng" algn="ctr">
+                      <a:solidFill>
+                        <a:schemeClr val="tx1"/>
+                      </a:solidFill>
+                      <a:prstDash val="solid"/>
+                      <a:round/>
+                      <a:headEnd type="none" w="med" len="med"/>
+                      <a:tailEnd type="none" w="med" len="med"/>
+                    </a:lnB>
+                    <a:noFill/>
+                  </a:tcPr>
+                </a:tc>
+                <a:tc>
+                  <a:txBody>
+                    <a:bodyPr/>
+                    <a:lstStyle/>
+                    <a:p>
+                      <a:pPr>
+                        <a:buNone/>
+                      </a:pPr>
+                      <a:r>
+                        <a:rPr lang="en-US" dirty="0"/>
+                        <a:t>Any ordered, changeable collection of items</a:t>
+                      </a:r>
+                    </a:p>
+                  </a:txBody>
+                  <a:tcPr anchor="ctr">
+                    <a:lnL w="12700" cap="flat" cmpd="sng" algn="ctr">
+                      <a:solidFill>
+                        <a:schemeClr val="tx1"/>
+                      </a:solidFill>
+                      <a:prstDash val="solid"/>
+                      <a:round/>
+                      <a:headEnd type="none" w="med" len="med"/>
+                      <a:tailEnd type="none" w="med" len="med"/>
+                    </a:lnL>
+                    <a:lnR w="12700" cap="flat" cmpd="sng" algn="ctr">
+                      <a:solidFill>
+                        <a:schemeClr val="tx1"/>
+                      </a:solidFill>
+                      <a:prstDash val="solid"/>
+                      <a:round/>
+                      <a:headEnd type="none" w="med" len="med"/>
+                      <a:tailEnd type="none" w="med" len="med"/>
+                    </a:lnR>
+                    <a:lnT w="12700" cap="flat" cmpd="sng" algn="ctr">
+                      <a:solidFill>
+                        <a:schemeClr val="tx1"/>
+                      </a:solidFill>
+                      <a:prstDash val="solid"/>
+                      <a:round/>
+                      <a:headEnd type="none" w="med" len="med"/>
+                      <a:tailEnd type="none" w="med" len="med"/>
+                    </a:lnT>
+                    <a:lnB w="12700" cap="flat" cmpd="sng" algn="ctr">
+                      <a:solidFill>
+                        <a:schemeClr val="tx1"/>
+                      </a:solidFill>
+                      <a:prstDash val="solid"/>
+                      <a:round/>
+                      <a:headEnd type="none" w="med" len="med"/>
+                      <a:tailEnd type="none" w="med" len="med"/>
+                    </a:lnB>
+                    <a:noFill/>
+                  </a:tcPr>
+                </a:tc>
+                <a:extLst>
+                  <a:ext uri="{0D108BD9-81ED-4DB2-BD59-A6C34878D82A}">
+                    <a16:rowId xmlns:a16="http://schemas.microsoft.com/office/drawing/2014/main" val="2699245820"/>
+                  </a:ext>
+                </a:extLst>
+              </a:tr>
+            </a:tbl>
+          </a:graphicData>
+        </a:graphic>
+      </p:graphicFrame>
     </p:spTree>
     <p:extLst>
       <p:ext uri="{BB962C8B-B14F-4D97-AF65-F5344CB8AC3E}">
-        <p14:creationId xmlns:p14="http://schemas.microsoft.com/office/powerpoint/2010/main" val="2665607464"/>
+        <p14:creationId xmlns:p14="http://schemas.microsoft.com/office/powerpoint/2010/main" val="3047554373"/>
       </p:ext>
     </p:extLst>
   </p:cSld>
@@ -21969,7 +27217,13 @@
   <p:cSld>
     <p:spTree>
       <p:nvGrpSpPr>
-        <p:cNvPr id="1" name=""/>
+        <p:cNvPr id="1" name="">
+          <a:extLst>
+            <a:ext uri="{FF2B5EF4-FFF2-40B4-BE49-F238E27FC236}">
+              <a16:creationId xmlns:a16="http://schemas.microsoft.com/office/drawing/2014/main" id="{1446238E-FA6F-1A28-F457-4DD6B2A22194}"/>
+            </a:ext>
+          </a:extLst>
+        </p:cNvPr>
         <p:cNvGrpSpPr/>
         <p:nvPr/>
       </p:nvGrpSpPr>
@@ -21983,10 +27237,10 @@
       </p:grpSpPr>
       <p:sp>
         <p:nvSpPr>
-          <p:cNvPr id="7" name="Title 6">
-            <a:extLst>
-              <a:ext uri="{FF2B5EF4-FFF2-40B4-BE49-F238E27FC236}">
-                <a16:creationId xmlns:a16="http://schemas.microsoft.com/office/drawing/2014/main" id="{A0A79DFE-CA6D-199F-1D8F-0A25E480F345}"/>
+          <p:cNvPr id="5" name="Title 4">
+            <a:extLst>
+              <a:ext uri="{FF2B5EF4-FFF2-40B4-BE49-F238E27FC236}">
+                <a16:creationId xmlns:a16="http://schemas.microsoft.com/office/drawing/2014/main" id="{6084C1A7-8084-A931-D59A-D2013912F9A6}"/>
               </a:ext>
             </a:extLst>
           </p:cNvPr>
@@ -22004,65 +27258,1432 @@
           <a:p>
             <a:r>
               <a:rPr lang="en-US" dirty="0"/>
-              <a:t>Hands-On #1</a:t>
-            </a:r>
-          </a:p>
-        </p:txBody>
-      </p:sp>
-      <p:sp>
-        <p:nvSpPr>
-          <p:cNvPr id="8" name="Content Placeholder 7">
-            <a:extLst>
-              <a:ext uri="{FF2B5EF4-FFF2-40B4-BE49-F238E27FC236}">
-                <a16:creationId xmlns:a16="http://schemas.microsoft.com/office/drawing/2014/main" id="{0C8DBF7A-ABA5-7245-19D0-84C717D30964}"/>
-              </a:ext>
-            </a:extLst>
-          </p:cNvPr>
-          <p:cNvSpPr>
-            <a:spLocks noGrp="1"/>
-          </p:cNvSpPr>
+              <a:t>TUPLES</a:t>
+            </a:r>
+          </a:p>
+        </p:txBody>
+      </p:sp>
+      <p:graphicFrame>
+        <p:nvGraphicFramePr>
+          <p:cNvPr id="2" name="Table 1">
+            <a:extLst>
+              <a:ext uri="{FF2B5EF4-FFF2-40B4-BE49-F238E27FC236}">
+                <a16:creationId xmlns:a16="http://schemas.microsoft.com/office/drawing/2014/main" id="{26CB8134-8408-54E9-AD24-56048621053E}"/>
+              </a:ext>
+            </a:extLst>
+          </p:cNvPr>
+          <p:cNvGraphicFramePr>
+            <a:graphicFrameLocks noGrp="1"/>
+          </p:cNvGraphicFramePr>
           <p:nvPr>
-            <p:ph type="body" sz="quarter" idx="11"/>
+            <p:extLst>
+              <p:ext uri="{D42A27DB-BD31-4B8C-83A1-F6EECF244321}">
+                <p14:modId xmlns:p14="http://schemas.microsoft.com/office/powerpoint/2010/main" val="1753340556"/>
+              </p:ext>
+            </p:extLst>
           </p:nvPr>
-        </p:nvSpPr>
-        <p:spPr>
-          <a:xfrm>
-            <a:off x="548640" y="2148840"/>
-            <a:ext cx="11008360" cy="4023360"/>
-          </a:xfrm>
-        </p:spPr>
-        <p:txBody>
-          <a:bodyPr/>
-          <a:lstStyle/>
-          <a:p>
-            <a:pPr marL="457200" indent="-457200">
-              <a:buFont typeface="Arial" panose="020B0604020202020204" pitchFamily="34" charset="0"/>
-              <a:buChar char="•"/>
-            </a:pPr>
-            <a:r>
-              <a:rPr lang="en-US" dirty="0"/>
-              <a:t>Mutable and immutable structures</a:t>
-            </a:r>
-          </a:p>
-          <a:p>
-            <a:pPr marL="457200" indent="-457200">
-              <a:buFont typeface="Arial" panose="020B0604020202020204" pitchFamily="34" charset="0"/>
-              <a:buChar char="•"/>
-            </a:pPr>
-            <a:r>
-              <a:rPr lang="en-US" dirty="0"/>
-              <a:t>Working with tuples and lists</a:t>
-            </a:r>
-          </a:p>
-          <a:p>
-            <a:endParaRPr lang="en-US" dirty="0"/>
-          </a:p>
-        </p:txBody>
-      </p:sp>
+        </p:nvGraphicFramePr>
+        <p:xfrm>
+          <a:off x="752893" y="1005999"/>
+          <a:ext cx="10686214" cy="5346048"/>
+        </p:xfrm>
+        <a:graphic>
+          <a:graphicData uri="http://schemas.openxmlformats.org/drawingml/2006/table">
+            <a:tbl>
+              <a:tblPr>
+                <a:tableStyleId>{2D5ABB26-0587-4C30-8999-92F81FD0307C}</a:tableStyleId>
+              </a:tblPr>
+              <a:tblGrid>
+                <a:gridCol w="5343107">
+                  <a:extLst>
+                    <a:ext uri="{9D8B030D-6E8A-4147-A177-3AD203B41FA5}">
+                      <a16:colId xmlns:a16="http://schemas.microsoft.com/office/drawing/2014/main" val="2504497373"/>
+                    </a:ext>
+                  </a:extLst>
+                </a:gridCol>
+                <a:gridCol w="5343107">
+                  <a:extLst>
+                    <a:ext uri="{9D8B030D-6E8A-4147-A177-3AD203B41FA5}">
+                      <a16:colId xmlns:a16="http://schemas.microsoft.com/office/drawing/2014/main" val="736826440"/>
+                    </a:ext>
+                  </a:extLst>
+                </a:gridCol>
+              </a:tblGrid>
+              <a:tr h="305686">
+                <a:tc>
+                  <a:txBody>
+                    <a:bodyPr/>
+                    <a:lstStyle/>
+                    <a:p>
+                      <a:pPr>
+                        <a:buNone/>
+                      </a:pPr>
+                      <a:r>
+                        <a:rPr lang="en-US" sz="1800"/>
+                        <a:t>Feature</a:t>
+                      </a:r>
+                    </a:p>
+                  </a:txBody>
+                  <a:tcPr marL="79744" marR="79744" marT="39872" marB="39872" anchor="ctr">
+                    <a:lnL w="12700" cap="flat" cmpd="sng" algn="ctr">
+                      <a:solidFill>
+                        <a:schemeClr val="tx1"/>
+                      </a:solidFill>
+                      <a:prstDash val="solid"/>
+                      <a:round/>
+                      <a:headEnd type="none" w="med" len="med"/>
+                      <a:tailEnd type="none" w="med" len="med"/>
+                    </a:lnL>
+                    <a:lnR w="12700" cap="flat" cmpd="sng" algn="ctr">
+                      <a:solidFill>
+                        <a:schemeClr val="tx1"/>
+                      </a:solidFill>
+                      <a:prstDash val="solid"/>
+                      <a:round/>
+                      <a:headEnd type="none" w="med" len="med"/>
+                      <a:tailEnd type="none" w="med" len="med"/>
+                    </a:lnR>
+                    <a:lnT w="12700" cap="flat" cmpd="sng" algn="ctr">
+                      <a:solidFill>
+                        <a:schemeClr val="tx1"/>
+                      </a:solidFill>
+                      <a:prstDash val="solid"/>
+                      <a:round/>
+                      <a:headEnd type="none" w="med" len="med"/>
+                      <a:tailEnd type="none" w="med" len="med"/>
+                    </a:lnT>
+                    <a:lnB w="12700" cap="flat" cmpd="sng" algn="ctr">
+                      <a:solidFill>
+                        <a:schemeClr val="tx1"/>
+                      </a:solidFill>
+                      <a:prstDash val="solid"/>
+                      <a:round/>
+                      <a:headEnd type="none" w="med" len="med"/>
+                      <a:tailEnd type="none" w="med" len="med"/>
+                    </a:lnB>
+                  </a:tcPr>
+                </a:tc>
+                <a:tc>
+                  <a:txBody>
+                    <a:bodyPr/>
+                    <a:lstStyle/>
+                    <a:p>
+                      <a:pPr>
+                        <a:buNone/>
+                      </a:pPr>
+                      <a:r>
+                        <a:rPr lang="en-US" sz="1800"/>
+                        <a:t>Detail</a:t>
+                      </a:r>
+                    </a:p>
+                  </a:txBody>
+                  <a:tcPr marL="79744" marR="79744" marT="39872" marB="39872" anchor="ctr">
+                    <a:lnL w="12700" cap="flat" cmpd="sng" algn="ctr">
+                      <a:solidFill>
+                        <a:schemeClr val="tx1"/>
+                      </a:solidFill>
+                      <a:prstDash val="solid"/>
+                      <a:round/>
+                      <a:headEnd type="none" w="med" len="med"/>
+                      <a:tailEnd type="none" w="med" len="med"/>
+                    </a:lnL>
+                    <a:lnR w="12700" cap="flat" cmpd="sng" algn="ctr">
+                      <a:solidFill>
+                        <a:schemeClr val="tx1"/>
+                      </a:solidFill>
+                      <a:prstDash val="solid"/>
+                      <a:round/>
+                      <a:headEnd type="none" w="med" len="med"/>
+                      <a:tailEnd type="none" w="med" len="med"/>
+                    </a:lnR>
+                    <a:lnT w="12700" cap="flat" cmpd="sng" algn="ctr">
+                      <a:solidFill>
+                        <a:schemeClr val="tx1"/>
+                      </a:solidFill>
+                      <a:prstDash val="solid"/>
+                      <a:round/>
+                      <a:headEnd type="none" w="med" len="med"/>
+                      <a:tailEnd type="none" w="med" len="med"/>
+                    </a:lnT>
+                    <a:lnB w="12700" cap="flat" cmpd="sng" algn="ctr">
+                      <a:solidFill>
+                        <a:schemeClr val="tx1"/>
+                      </a:solidFill>
+                      <a:prstDash val="solid"/>
+                      <a:round/>
+                      <a:headEnd type="none" w="med" len="med"/>
+                      <a:tailEnd type="none" w="med" len="med"/>
+                    </a:lnB>
+                  </a:tcPr>
+                </a:tc>
+                <a:extLst>
+                  <a:ext uri="{0D108BD9-81ED-4DB2-BD59-A6C34878D82A}">
+                    <a16:rowId xmlns:a16="http://schemas.microsoft.com/office/drawing/2014/main" val="831909114"/>
+                  </a:ext>
+                </a:extLst>
+              </a:tr>
+              <a:tr h="305686">
+                <a:tc>
+                  <a:txBody>
+                    <a:bodyPr/>
+                    <a:lstStyle/>
+                    <a:p>
+                      <a:pPr>
+                        <a:buNone/>
+                      </a:pPr>
+                      <a:r>
+                        <a:rPr lang="en-US" sz="1800" b="1"/>
+                        <a:t>Syntax</a:t>
+                      </a:r>
+                      <a:endParaRPr lang="en-US" sz="1800"/>
+                    </a:p>
+                  </a:txBody>
+                  <a:tcPr marL="79744" marR="79744" marT="39872" marB="39872" anchor="ctr">
+                    <a:lnL w="12700" cap="flat" cmpd="sng" algn="ctr">
+                      <a:solidFill>
+                        <a:schemeClr val="tx1"/>
+                      </a:solidFill>
+                      <a:prstDash val="solid"/>
+                      <a:round/>
+                      <a:headEnd type="none" w="med" len="med"/>
+                      <a:tailEnd type="none" w="med" len="med"/>
+                    </a:lnL>
+                    <a:lnR w="12700" cap="flat" cmpd="sng" algn="ctr">
+                      <a:solidFill>
+                        <a:schemeClr val="tx1"/>
+                      </a:solidFill>
+                      <a:prstDash val="solid"/>
+                      <a:round/>
+                      <a:headEnd type="none" w="med" len="med"/>
+                      <a:tailEnd type="none" w="med" len="med"/>
+                    </a:lnR>
+                    <a:lnT w="12700" cap="flat" cmpd="sng" algn="ctr">
+                      <a:solidFill>
+                        <a:schemeClr val="tx1"/>
+                      </a:solidFill>
+                      <a:prstDash val="solid"/>
+                      <a:round/>
+                      <a:headEnd type="none" w="med" len="med"/>
+                      <a:tailEnd type="none" w="med" len="med"/>
+                    </a:lnT>
+                    <a:lnB w="12700" cap="flat" cmpd="sng" algn="ctr">
+                      <a:solidFill>
+                        <a:schemeClr val="tx1"/>
+                      </a:solidFill>
+                      <a:prstDash val="solid"/>
+                      <a:round/>
+                      <a:headEnd type="none" w="med" len="med"/>
+                      <a:tailEnd type="none" w="med" len="med"/>
+                    </a:lnB>
+                  </a:tcPr>
+                </a:tc>
+                <a:tc>
+                  <a:txBody>
+                    <a:bodyPr/>
+                    <a:lstStyle/>
+                    <a:p>
+                      <a:pPr>
+                        <a:buNone/>
+                      </a:pPr>
+                      <a:r>
+                        <a:rPr lang="en-US" sz="1800"/>
+                        <a:t>my_tuple = (1, 2, 3)</a:t>
+                      </a:r>
+                    </a:p>
+                  </a:txBody>
+                  <a:tcPr marL="79744" marR="79744" marT="39872" marB="39872" anchor="ctr">
+                    <a:lnL w="12700" cap="flat" cmpd="sng" algn="ctr">
+                      <a:solidFill>
+                        <a:schemeClr val="tx1"/>
+                      </a:solidFill>
+                      <a:prstDash val="solid"/>
+                      <a:round/>
+                      <a:headEnd type="none" w="med" len="med"/>
+                      <a:tailEnd type="none" w="med" len="med"/>
+                    </a:lnL>
+                    <a:lnR w="12700" cap="flat" cmpd="sng" algn="ctr">
+                      <a:solidFill>
+                        <a:schemeClr val="tx1"/>
+                      </a:solidFill>
+                      <a:prstDash val="solid"/>
+                      <a:round/>
+                      <a:headEnd type="none" w="med" len="med"/>
+                      <a:tailEnd type="none" w="med" len="med"/>
+                    </a:lnR>
+                    <a:lnT w="12700" cap="flat" cmpd="sng" algn="ctr">
+                      <a:solidFill>
+                        <a:schemeClr val="tx1"/>
+                      </a:solidFill>
+                      <a:prstDash val="solid"/>
+                      <a:round/>
+                      <a:headEnd type="none" w="med" len="med"/>
+                      <a:tailEnd type="none" w="med" len="med"/>
+                    </a:lnT>
+                    <a:lnB w="12700" cap="flat" cmpd="sng" algn="ctr">
+                      <a:solidFill>
+                        <a:schemeClr val="tx1"/>
+                      </a:solidFill>
+                      <a:prstDash val="solid"/>
+                      <a:round/>
+                      <a:headEnd type="none" w="med" len="med"/>
+                      <a:tailEnd type="none" w="med" len="med"/>
+                    </a:lnB>
+                  </a:tcPr>
+                </a:tc>
+                <a:extLst>
+                  <a:ext uri="{0D108BD9-81ED-4DB2-BD59-A6C34878D82A}">
+                    <a16:rowId xmlns:a16="http://schemas.microsoft.com/office/drawing/2014/main" val="3639212807"/>
+                  </a:ext>
+                </a:extLst>
+              </a:tr>
+              <a:tr h="305686">
+                <a:tc>
+                  <a:txBody>
+                    <a:bodyPr/>
+                    <a:lstStyle/>
+                    <a:p>
+                      <a:pPr>
+                        <a:buNone/>
+                      </a:pPr>
+                      <a:r>
+                        <a:rPr lang="en-US" sz="1800" b="1"/>
+                        <a:t>Ordered</a:t>
+                      </a:r>
+                      <a:endParaRPr lang="en-US" sz="1800"/>
+                    </a:p>
+                  </a:txBody>
+                  <a:tcPr marL="79744" marR="79744" marT="39872" marB="39872" anchor="ctr">
+                    <a:lnL w="12700" cap="flat" cmpd="sng" algn="ctr">
+                      <a:solidFill>
+                        <a:schemeClr val="tx1"/>
+                      </a:solidFill>
+                      <a:prstDash val="solid"/>
+                      <a:round/>
+                      <a:headEnd type="none" w="med" len="med"/>
+                      <a:tailEnd type="none" w="med" len="med"/>
+                    </a:lnL>
+                    <a:lnR w="12700" cap="flat" cmpd="sng" algn="ctr">
+                      <a:solidFill>
+                        <a:schemeClr val="tx1"/>
+                      </a:solidFill>
+                      <a:prstDash val="solid"/>
+                      <a:round/>
+                      <a:headEnd type="none" w="med" len="med"/>
+                      <a:tailEnd type="none" w="med" len="med"/>
+                    </a:lnR>
+                    <a:lnT w="12700" cap="flat" cmpd="sng" algn="ctr">
+                      <a:solidFill>
+                        <a:schemeClr val="tx1"/>
+                      </a:solidFill>
+                      <a:prstDash val="solid"/>
+                      <a:round/>
+                      <a:headEnd type="none" w="med" len="med"/>
+                      <a:tailEnd type="none" w="med" len="med"/>
+                    </a:lnT>
+                    <a:lnB w="12700" cap="flat" cmpd="sng" algn="ctr">
+                      <a:solidFill>
+                        <a:schemeClr val="tx1"/>
+                      </a:solidFill>
+                      <a:prstDash val="solid"/>
+                      <a:round/>
+                      <a:headEnd type="none" w="med" len="med"/>
+                      <a:tailEnd type="none" w="med" len="med"/>
+                    </a:lnB>
+                  </a:tcPr>
+                </a:tc>
+                <a:tc>
+                  <a:txBody>
+                    <a:bodyPr/>
+                    <a:lstStyle/>
+                    <a:p>
+                      <a:pPr>
+                        <a:buNone/>
+                      </a:pPr>
+                      <a:r>
+                        <a:rPr lang="en-US" sz="1800"/>
+                        <a:t>✅ Yes — items maintain insertion order</a:t>
+                      </a:r>
+                    </a:p>
+                  </a:txBody>
+                  <a:tcPr marL="79744" marR="79744" marT="39872" marB="39872" anchor="ctr">
+                    <a:lnL w="12700" cap="flat" cmpd="sng" algn="ctr">
+                      <a:solidFill>
+                        <a:schemeClr val="tx1"/>
+                      </a:solidFill>
+                      <a:prstDash val="solid"/>
+                      <a:round/>
+                      <a:headEnd type="none" w="med" len="med"/>
+                      <a:tailEnd type="none" w="med" len="med"/>
+                    </a:lnL>
+                    <a:lnR w="12700" cap="flat" cmpd="sng" algn="ctr">
+                      <a:solidFill>
+                        <a:schemeClr val="tx1"/>
+                      </a:solidFill>
+                      <a:prstDash val="solid"/>
+                      <a:round/>
+                      <a:headEnd type="none" w="med" len="med"/>
+                      <a:tailEnd type="none" w="med" len="med"/>
+                    </a:lnR>
+                    <a:lnT w="12700" cap="flat" cmpd="sng" algn="ctr">
+                      <a:solidFill>
+                        <a:schemeClr val="tx1"/>
+                      </a:solidFill>
+                      <a:prstDash val="solid"/>
+                      <a:round/>
+                      <a:headEnd type="none" w="med" len="med"/>
+                      <a:tailEnd type="none" w="med" len="med"/>
+                    </a:lnT>
+                    <a:lnB w="12700" cap="flat" cmpd="sng" algn="ctr">
+                      <a:solidFill>
+                        <a:schemeClr val="tx1"/>
+                      </a:solidFill>
+                      <a:prstDash val="solid"/>
+                      <a:round/>
+                      <a:headEnd type="none" w="med" len="med"/>
+                      <a:tailEnd type="none" w="med" len="med"/>
+                    </a:lnB>
+                  </a:tcPr>
+                </a:tc>
+                <a:extLst>
+                  <a:ext uri="{0D108BD9-81ED-4DB2-BD59-A6C34878D82A}">
+                    <a16:rowId xmlns:a16="http://schemas.microsoft.com/office/drawing/2014/main" val="3663796511"/>
+                  </a:ext>
+                </a:extLst>
+              </a:tr>
+              <a:tr h="305686">
+                <a:tc>
+                  <a:txBody>
+                    <a:bodyPr/>
+                    <a:lstStyle/>
+                    <a:p>
+                      <a:pPr>
+                        <a:buNone/>
+                      </a:pPr>
+                      <a:r>
+                        <a:rPr lang="en-US" sz="1800" b="1"/>
+                        <a:t>Mutable</a:t>
+                      </a:r>
+                      <a:endParaRPr lang="en-US" sz="1800"/>
+                    </a:p>
+                  </a:txBody>
+                  <a:tcPr marL="79744" marR="79744" marT="39872" marB="39872" anchor="ctr">
+                    <a:lnL w="12700" cap="flat" cmpd="sng" algn="ctr">
+                      <a:solidFill>
+                        <a:schemeClr val="tx1"/>
+                      </a:solidFill>
+                      <a:prstDash val="solid"/>
+                      <a:round/>
+                      <a:headEnd type="none" w="med" len="med"/>
+                      <a:tailEnd type="none" w="med" len="med"/>
+                    </a:lnL>
+                    <a:lnR w="12700" cap="flat" cmpd="sng" algn="ctr">
+                      <a:solidFill>
+                        <a:schemeClr val="tx1"/>
+                      </a:solidFill>
+                      <a:prstDash val="solid"/>
+                      <a:round/>
+                      <a:headEnd type="none" w="med" len="med"/>
+                      <a:tailEnd type="none" w="med" len="med"/>
+                    </a:lnR>
+                    <a:lnT w="12700" cap="flat" cmpd="sng" algn="ctr">
+                      <a:solidFill>
+                        <a:schemeClr val="tx1"/>
+                      </a:solidFill>
+                      <a:prstDash val="solid"/>
+                      <a:round/>
+                      <a:headEnd type="none" w="med" len="med"/>
+                      <a:tailEnd type="none" w="med" len="med"/>
+                    </a:lnT>
+                    <a:lnB w="12700" cap="flat" cmpd="sng" algn="ctr">
+                      <a:solidFill>
+                        <a:schemeClr val="tx1"/>
+                      </a:solidFill>
+                      <a:prstDash val="solid"/>
+                      <a:round/>
+                      <a:headEnd type="none" w="med" len="med"/>
+                      <a:tailEnd type="none" w="med" len="med"/>
+                    </a:lnB>
+                  </a:tcPr>
+                </a:tc>
+                <a:tc>
+                  <a:txBody>
+                    <a:bodyPr/>
+                    <a:lstStyle/>
+                    <a:p>
+                      <a:pPr>
+                        <a:buNone/>
+                      </a:pPr>
+                      <a:r>
+                        <a:rPr lang="en-US" sz="1800"/>
+                        <a:t>❌ No — once created, items cannot be changed</a:t>
+                      </a:r>
+                    </a:p>
+                  </a:txBody>
+                  <a:tcPr marL="79744" marR="79744" marT="39872" marB="39872" anchor="ctr">
+                    <a:lnL w="12700" cap="flat" cmpd="sng" algn="ctr">
+                      <a:solidFill>
+                        <a:schemeClr val="tx1"/>
+                      </a:solidFill>
+                      <a:prstDash val="solid"/>
+                      <a:round/>
+                      <a:headEnd type="none" w="med" len="med"/>
+                      <a:tailEnd type="none" w="med" len="med"/>
+                    </a:lnL>
+                    <a:lnR w="12700" cap="flat" cmpd="sng" algn="ctr">
+                      <a:solidFill>
+                        <a:schemeClr val="tx1"/>
+                      </a:solidFill>
+                      <a:prstDash val="solid"/>
+                      <a:round/>
+                      <a:headEnd type="none" w="med" len="med"/>
+                      <a:tailEnd type="none" w="med" len="med"/>
+                    </a:lnR>
+                    <a:lnT w="12700" cap="flat" cmpd="sng" algn="ctr">
+                      <a:solidFill>
+                        <a:schemeClr val="tx1"/>
+                      </a:solidFill>
+                      <a:prstDash val="solid"/>
+                      <a:round/>
+                      <a:headEnd type="none" w="med" len="med"/>
+                      <a:tailEnd type="none" w="med" len="med"/>
+                    </a:lnT>
+                    <a:lnB w="12700" cap="flat" cmpd="sng" algn="ctr">
+                      <a:solidFill>
+                        <a:schemeClr val="tx1"/>
+                      </a:solidFill>
+                      <a:prstDash val="solid"/>
+                      <a:round/>
+                      <a:headEnd type="none" w="med" len="med"/>
+                      <a:tailEnd type="none" w="med" len="med"/>
+                    </a:lnB>
+                  </a:tcPr>
+                </a:tc>
+                <a:extLst>
+                  <a:ext uri="{0D108BD9-81ED-4DB2-BD59-A6C34878D82A}">
+                    <a16:rowId xmlns:a16="http://schemas.microsoft.com/office/drawing/2014/main" val="1935976023"/>
+                  </a:ext>
+                </a:extLst>
+              </a:tr>
+              <a:tr h="305686">
+                <a:tc>
+                  <a:txBody>
+                    <a:bodyPr/>
+                    <a:lstStyle/>
+                    <a:p>
+                      <a:pPr>
+                        <a:buNone/>
+                      </a:pPr>
+                      <a:r>
+                        <a:rPr lang="en-US" sz="1800" b="1"/>
+                        <a:t>Duplicates allowed</a:t>
+                      </a:r>
+                      <a:endParaRPr lang="en-US" sz="1800"/>
+                    </a:p>
+                  </a:txBody>
+                  <a:tcPr marL="79744" marR="79744" marT="39872" marB="39872" anchor="ctr">
+                    <a:lnL w="12700" cap="flat" cmpd="sng" algn="ctr">
+                      <a:solidFill>
+                        <a:schemeClr val="tx1"/>
+                      </a:solidFill>
+                      <a:prstDash val="solid"/>
+                      <a:round/>
+                      <a:headEnd type="none" w="med" len="med"/>
+                      <a:tailEnd type="none" w="med" len="med"/>
+                    </a:lnL>
+                    <a:lnR w="12700" cap="flat" cmpd="sng" algn="ctr">
+                      <a:solidFill>
+                        <a:schemeClr val="tx1"/>
+                      </a:solidFill>
+                      <a:prstDash val="solid"/>
+                      <a:round/>
+                      <a:headEnd type="none" w="med" len="med"/>
+                      <a:tailEnd type="none" w="med" len="med"/>
+                    </a:lnR>
+                    <a:lnT w="12700" cap="flat" cmpd="sng" algn="ctr">
+                      <a:solidFill>
+                        <a:schemeClr val="tx1"/>
+                      </a:solidFill>
+                      <a:prstDash val="solid"/>
+                      <a:round/>
+                      <a:headEnd type="none" w="med" len="med"/>
+                      <a:tailEnd type="none" w="med" len="med"/>
+                    </a:lnT>
+                    <a:lnB w="12700" cap="flat" cmpd="sng" algn="ctr">
+                      <a:solidFill>
+                        <a:schemeClr val="tx1"/>
+                      </a:solidFill>
+                      <a:prstDash val="solid"/>
+                      <a:round/>
+                      <a:headEnd type="none" w="med" len="med"/>
+                      <a:tailEnd type="none" w="med" len="med"/>
+                    </a:lnB>
+                  </a:tcPr>
+                </a:tc>
+                <a:tc>
+                  <a:txBody>
+                    <a:bodyPr/>
+                    <a:lstStyle/>
+                    <a:p>
+                      <a:pPr>
+                        <a:buNone/>
+                      </a:pPr>
+                      <a:r>
+                        <a:rPr lang="en-US" sz="1800"/>
+                        <a:t>✅ Yes</a:t>
+                      </a:r>
+                    </a:p>
+                  </a:txBody>
+                  <a:tcPr marL="79744" marR="79744" marT="39872" marB="39872" anchor="ctr">
+                    <a:lnL w="12700" cap="flat" cmpd="sng" algn="ctr">
+                      <a:solidFill>
+                        <a:schemeClr val="tx1"/>
+                      </a:solidFill>
+                      <a:prstDash val="solid"/>
+                      <a:round/>
+                      <a:headEnd type="none" w="med" len="med"/>
+                      <a:tailEnd type="none" w="med" len="med"/>
+                    </a:lnL>
+                    <a:lnR w="12700" cap="flat" cmpd="sng" algn="ctr">
+                      <a:solidFill>
+                        <a:schemeClr val="tx1"/>
+                      </a:solidFill>
+                      <a:prstDash val="solid"/>
+                      <a:round/>
+                      <a:headEnd type="none" w="med" len="med"/>
+                      <a:tailEnd type="none" w="med" len="med"/>
+                    </a:lnR>
+                    <a:lnT w="12700" cap="flat" cmpd="sng" algn="ctr">
+                      <a:solidFill>
+                        <a:schemeClr val="tx1"/>
+                      </a:solidFill>
+                      <a:prstDash val="solid"/>
+                      <a:round/>
+                      <a:headEnd type="none" w="med" len="med"/>
+                      <a:tailEnd type="none" w="med" len="med"/>
+                    </a:lnT>
+                    <a:lnB w="12700" cap="flat" cmpd="sng" algn="ctr">
+                      <a:solidFill>
+                        <a:schemeClr val="tx1"/>
+                      </a:solidFill>
+                      <a:prstDash val="solid"/>
+                      <a:round/>
+                      <a:headEnd type="none" w="med" len="med"/>
+                      <a:tailEnd type="none" w="med" len="med"/>
+                    </a:lnB>
+                  </a:tcPr>
+                </a:tc>
+                <a:extLst>
+                  <a:ext uri="{0D108BD9-81ED-4DB2-BD59-A6C34878D82A}">
+                    <a16:rowId xmlns:a16="http://schemas.microsoft.com/office/drawing/2014/main" val="82771696"/>
+                  </a:ext>
+                </a:extLst>
+              </a:tr>
+              <a:tr h="305686">
+                <a:tc>
+                  <a:txBody>
+                    <a:bodyPr/>
+                    <a:lstStyle/>
+                    <a:p>
+                      <a:pPr>
+                        <a:buNone/>
+                      </a:pPr>
+                      <a:r>
+                        <a:rPr lang="en-US" sz="1800" b="1"/>
+                        <a:t>Indexable</a:t>
+                      </a:r>
+                      <a:endParaRPr lang="en-US" sz="1800"/>
+                    </a:p>
+                  </a:txBody>
+                  <a:tcPr marL="79744" marR="79744" marT="39872" marB="39872" anchor="ctr">
+                    <a:lnL w="12700" cap="flat" cmpd="sng" algn="ctr">
+                      <a:solidFill>
+                        <a:schemeClr val="tx1"/>
+                      </a:solidFill>
+                      <a:prstDash val="solid"/>
+                      <a:round/>
+                      <a:headEnd type="none" w="med" len="med"/>
+                      <a:tailEnd type="none" w="med" len="med"/>
+                    </a:lnL>
+                    <a:lnR w="12700" cap="flat" cmpd="sng" algn="ctr">
+                      <a:solidFill>
+                        <a:schemeClr val="tx1"/>
+                      </a:solidFill>
+                      <a:prstDash val="solid"/>
+                      <a:round/>
+                      <a:headEnd type="none" w="med" len="med"/>
+                      <a:tailEnd type="none" w="med" len="med"/>
+                    </a:lnR>
+                    <a:lnT w="12700" cap="flat" cmpd="sng" algn="ctr">
+                      <a:solidFill>
+                        <a:schemeClr val="tx1"/>
+                      </a:solidFill>
+                      <a:prstDash val="solid"/>
+                      <a:round/>
+                      <a:headEnd type="none" w="med" len="med"/>
+                      <a:tailEnd type="none" w="med" len="med"/>
+                    </a:lnT>
+                    <a:lnB w="12700" cap="flat" cmpd="sng" algn="ctr">
+                      <a:solidFill>
+                        <a:schemeClr val="tx1"/>
+                      </a:solidFill>
+                      <a:prstDash val="solid"/>
+                      <a:round/>
+                      <a:headEnd type="none" w="med" len="med"/>
+                      <a:tailEnd type="none" w="med" len="med"/>
+                    </a:lnB>
+                  </a:tcPr>
+                </a:tc>
+                <a:tc>
+                  <a:txBody>
+                    <a:bodyPr/>
+                    <a:lstStyle/>
+                    <a:p>
+                      <a:pPr>
+                        <a:buNone/>
+                      </a:pPr>
+                      <a:r>
+                        <a:rPr lang="en-US" sz="1800"/>
+                        <a:t>✅ Yes — zero-based: my_tuple[0] returns 1</a:t>
+                      </a:r>
+                    </a:p>
+                  </a:txBody>
+                  <a:tcPr marL="79744" marR="79744" marT="39872" marB="39872" anchor="ctr">
+                    <a:lnL w="12700" cap="flat" cmpd="sng" algn="ctr">
+                      <a:solidFill>
+                        <a:schemeClr val="tx1"/>
+                      </a:solidFill>
+                      <a:prstDash val="solid"/>
+                      <a:round/>
+                      <a:headEnd type="none" w="med" len="med"/>
+                      <a:tailEnd type="none" w="med" len="med"/>
+                    </a:lnL>
+                    <a:lnR w="12700" cap="flat" cmpd="sng" algn="ctr">
+                      <a:solidFill>
+                        <a:schemeClr val="tx1"/>
+                      </a:solidFill>
+                      <a:prstDash val="solid"/>
+                      <a:round/>
+                      <a:headEnd type="none" w="med" len="med"/>
+                      <a:tailEnd type="none" w="med" len="med"/>
+                    </a:lnR>
+                    <a:lnT w="12700" cap="flat" cmpd="sng" algn="ctr">
+                      <a:solidFill>
+                        <a:schemeClr val="tx1"/>
+                      </a:solidFill>
+                      <a:prstDash val="solid"/>
+                      <a:round/>
+                      <a:headEnd type="none" w="med" len="med"/>
+                      <a:tailEnd type="none" w="med" len="med"/>
+                    </a:lnT>
+                    <a:lnB w="12700" cap="flat" cmpd="sng" algn="ctr">
+                      <a:solidFill>
+                        <a:schemeClr val="tx1"/>
+                      </a:solidFill>
+                      <a:prstDash val="solid"/>
+                      <a:round/>
+                      <a:headEnd type="none" w="med" len="med"/>
+                      <a:tailEnd type="none" w="med" len="med"/>
+                    </a:lnB>
+                  </a:tcPr>
+                </a:tc>
+                <a:extLst>
+                  <a:ext uri="{0D108BD9-81ED-4DB2-BD59-A6C34878D82A}">
+                    <a16:rowId xmlns:a16="http://schemas.microsoft.com/office/drawing/2014/main" val="980597134"/>
+                  </a:ext>
+                </a:extLst>
+              </a:tr>
+              <a:tr h="305686">
+                <a:tc>
+                  <a:txBody>
+                    <a:bodyPr/>
+                    <a:lstStyle/>
+                    <a:p>
+                      <a:pPr>
+                        <a:buNone/>
+                      </a:pPr>
+                      <a:r>
+                        <a:rPr lang="en-US" sz="1800" b="1"/>
+                        <a:t>Can mix data types</a:t>
+                      </a:r>
+                      <a:endParaRPr lang="en-US" sz="1800"/>
+                    </a:p>
+                  </a:txBody>
+                  <a:tcPr marL="79744" marR="79744" marT="39872" marB="39872" anchor="ctr">
+                    <a:lnL w="12700" cap="flat" cmpd="sng" algn="ctr">
+                      <a:solidFill>
+                        <a:schemeClr val="tx1"/>
+                      </a:solidFill>
+                      <a:prstDash val="solid"/>
+                      <a:round/>
+                      <a:headEnd type="none" w="med" len="med"/>
+                      <a:tailEnd type="none" w="med" len="med"/>
+                    </a:lnL>
+                    <a:lnR w="12700" cap="flat" cmpd="sng" algn="ctr">
+                      <a:solidFill>
+                        <a:schemeClr val="tx1"/>
+                      </a:solidFill>
+                      <a:prstDash val="solid"/>
+                      <a:round/>
+                      <a:headEnd type="none" w="med" len="med"/>
+                      <a:tailEnd type="none" w="med" len="med"/>
+                    </a:lnR>
+                    <a:lnT w="12700" cap="flat" cmpd="sng" algn="ctr">
+                      <a:solidFill>
+                        <a:schemeClr val="tx1"/>
+                      </a:solidFill>
+                      <a:prstDash val="solid"/>
+                      <a:round/>
+                      <a:headEnd type="none" w="med" len="med"/>
+                      <a:tailEnd type="none" w="med" len="med"/>
+                    </a:lnT>
+                    <a:lnB w="12700" cap="flat" cmpd="sng" algn="ctr">
+                      <a:solidFill>
+                        <a:schemeClr val="tx1"/>
+                      </a:solidFill>
+                      <a:prstDash val="solid"/>
+                      <a:round/>
+                      <a:headEnd type="none" w="med" len="med"/>
+                      <a:tailEnd type="none" w="med" len="med"/>
+                    </a:lnB>
+                  </a:tcPr>
+                </a:tc>
+                <a:tc>
+                  <a:txBody>
+                    <a:bodyPr/>
+                    <a:lstStyle/>
+                    <a:p>
+                      <a:pPr>
+                        <a:buNone/>
+                      </a:pPr>
+                      <a:r>
+                        <a:rPr lang="en-US" sz="1800"/>
+                        <a:t>✅ Yes — (1, "hello", 3.14, True) is valid</a:t>
+                      </a:r>
+                    </a:p>
+                  </a:txBody>
+                  <a:tcPr marL="79744" marR="79744" marT="39872" marB="39872" anchor="ctr">
+                    <a:lnL w="12700" cap="flat" cmpd="sng" algn="ctr">
+                      <a:solidFill>
+                        <a:schemeClr val="tx1"/>
+                      </a:solidFill>
+                      <a:prstDash val="solid"/>
+                      <a:round/>
+                      <a:headEnd type="none" w="med" len="med"/>
+                      <a:tailEnd type="none" w="med" len="med"/>
+                    </a:lnL>
+                    <a:lnR w="12700" cap="flat" cmpd="sng" algn="ctr">
+                      <a:solidFill>
+                        <a:schemeClr val="tx1"/>
+                      </a:solidFill>
+                      <a:prstDash val="solid"/>
+                      <a:round/>
+                      <a:headEnd type="none" w="med" len="med"/>
+                      <a:tailEnd type="none" w="med" len="med"/>
+                    </a:lnR>
+                    <a:lnT w="12700" cap="flat" cmpd="sng" algn="ctr">
+                      <a:solidFill>
+                        <a:schemeClr val="tx1"/>
+                      </a:solidFill>
+                      <a:prstDash val="solid"/>
+                      <a:round/>
+                      <a:headEnd type="none" w="med" len="med"/>
+                      <a:tailEnd type="none" w="med" len="med"/>
+                    </a:lnT>
+                    <a:lnB w="12700" cap="flat" cmpd="sng" algn="ctr">
+                      <a:solidFill>
+                        <a:schemeClr val="tx1"/>
+                      </a:solidFill>
+                      <a:prstDash val="solid"/>
+                      <a:round/>
+                      <a:headEnd type="none" w="med" len="med"/>
+                      <a:tailEnd type="none" w="med" len="med"/>
+                    </a:lnB>
+                  </a:tcPr>
+                </a:tc>
+                <a:extLst>
+                  <a:ext uri="{0D108BD9-81ED-4DB2-BD59-A6C34878D82A}">
+                    <a16:rowId xmlns:a16="http://schemas.microsoft.com/office/drawing/2014/main" val="1254669246"/>
+                  </a:ext>
+                </a:extLst>
+              </a:tr>
+              <a:tr h="305686">
+                <a:tc>
+                  <a:txBody>
+                    <a:bodyPr/>
+                    <a:lstStyle/>
+                    <a:p>
+                      <a:pPr>
+                        <a:buNone/>
+                      </a:pPr>
+                      <a:r>
+                        <a:rPr lang="en-US" sz="1800" b="1"/>
+                        <a:t>Nestable</a:t>
+                      </a:r>
+                      <a:endParaRPr lang="en-US" sz="1800"/>
+                    </a:p>
+                  </a:txBody>
+                  <a:tcPr marL="79744" marR="79744" marT="39872" marB="39872" anchor="ctr">
+                    <a:lnL w="12700" cap="flat" cmpd="sng" algn="ctr">
+                      <a:solidFill>
+                        <a:schemeClr val="tx1"/>
+                      </a:solidFill>
+                      <a:prstDash val="solid"/>
+                      <a:round/>
+                      <a:headEnd type="none" w="med" len="med"/>
+                      <a:tailEnd type="none" w="med" len="med"/>
+                    </a:lnL>
+                    <a:lnR w="12700" cap="flat" cmpd="sng" algn="ctr">
+                      <a:solidFill>
+                        <a:schemeClr val="tx1"/>
+                      </a:solidFill>
+                      <a:prstDash val="solid"/>
+                      <a:round/>
+                      <a:headEnd type="none" w="med" len="med"/>
+                      <a:tailEnd type="none" w="med" len="med"/>
+                    </a:lnR>
+                    <a:lnT w="12700" cap="flat" cmpd="sng" algn="ctr">
+                      <a:solidFill>
+                        <a:schemeClr val="tx1"/>
+                      </a:solidFill>
+                      <a:prstDash val="solid"/>
+                      <a:round/>
+                      <a:headEnd type="none" w="med" len="med"/>
+                      <a:tailEnd type="none" w="med" len="med"/>
+                    </a:lnT>
+                    <a:lnB w="12700" cap="flat" cmpd="sng" algn="ctr">
+                      <a:solidFill>
+                        <a:schemeClr val="tx1"/>
+                      </a:solidFill>
+                      <a:prstDash val="solid"/>
+                      <a:round/>
+                      <a:headEnd type="none" w="med" len="med"/>
+                      <a:tailEnd type="none" w="med" len="med"/>
+                    </a:lnB>
+                  </a:tcPr>
+                </a:tc>
+                <a:tc>
+                  <a:txBody>
+                    <a:bodyPr/>
+                    <a:lstStyle/>
+                    <a:p>
+                      <a:pPr>
+                        <a:buNone/>
+                      </a:pPr>
+                      <a:r>
+                        <a:rPr lang="en-US" sz="1800"/>
+                        <a:t>✅ Yes — tuples can contain other tuples</a:t>
+                      </a:r>
+                    </a:p>
+                  </a:txBody>
+                  <a:tcPr marL="79744" marR="79744" marT="39872" marB="39872" anchor="ctr">
+                    <a:lnL w="12700" cap="flat" cmpd="sng" algn="ctr">
+                      <a:solidFill>
+                        <a:schemeClr val="tx1"/>
+                      </a:solidFill>
+                      <a:prstDash val="solid"/>
+                      <a:round/>
+                      <a:headEnd type="none" w="med" len="med"/>
+                      <a:tailEnd type="none" w="med" len="med"/>
+                    </a:lnL>
+                    <a:lnR w="12700" cap="flat" cmpd="sng" algn="ctr">
+                      <a:solidFill>
+                        <a:schemeClr val="tx1"/>
+                      </a:solidFill>
+                      <a:prstDash val="solid"/>
+                      <a:round/>
+                      <a:headEnd type="none" w="med" len="med"/>
+                      <a:tailEnd type="none" w="med" len="med"/>
+                    </a:lnR>
+                    <a:lnT w="12700" cap="flat" cmpd="sng" algn="ctr">
+                      <a:solidFill>
+                        <a:schemeClr val="tx1"/>
+                      </a:solidFill>
+                      <a:prstDash val="solid"/>
+                      <a:round/>
+                      <a:headEnd type="none" w="med" len="med"/>
+                      <a:tailEnd type="none" w="med" len="med"/>
+                    </a:lnT>
+                    <a:lnB w="12700" cap="flat" cmpd="sng" algn="ctr">
+                      <a:solidFill>
+                        <a:schemeClr val="tx1"/>
+                      </a:solidFill>
+                      <a:prstDash val="solid"/>
+                      <a:round/>
+                      <a:headEnd type="none" w="med" len="med"/>
+                      <a:tailEnd type="none" w="med" len="med"/>
+                    </a:lnB>
+                  </a:tcPr>
+                </a:tc>
+                <a:extLst>
+                  <a:ext uri="{0D108BD9-81ED-4DB2-BD59-A6C34878D82A}">
+                    <a16:rowId xmlns:a16="http://schemas.microsoft.com/office/drawing/2014/main" val="1899166140"/>
+                  </a:ext>
+                </a:extLst>
+              </a:tr>
+              <a:tr h="531628">
+                <a:tc>
+                  <a:txBody>
+                    <a:bodyPr/>
+                    <a:lstStyle/>
+                    <a:p>
+                      <a:pPr>
+                        <a:buNone/>
+                      </a:pPr>
+                      <a:r>
+                        <a:rPr lang="en-US" sz="1800" b="1"/>
+                        <a:t>Common methods</a:t>
+                      </a:r>
+                      <a:endParaRPr lang="en-US" sz="1800"/>
+                    </a:p>
+                  </a:txBody>
+                  <a:tcPr marL="79744" marR="79744" marT="39872" marB="39872" anchor="ctr">
+                    <a:lnL w="12700" cap="flat" cmpd="sng" algn="ctr">
+                      <a:solidFill>
+                        <a:schemeClr val="tx1"/>
+                      </a:solidFill>
+                      <a:prstDash val="solid"/>
+                      <a:round/>
+                      <a:headEnd type="none" w="med" len="med"/>
+                      <a:tailEnd type="none" w="med" len="med"/>
+                    </a:lnL>
+                    <a:lnR w="12700" cap="flat" cmpd="sng" algn="ctr">
+                      <a:solidFill>
+                        <a:schemeClr val="tx1"/>
+                      </a:solidFill>
+                      <a:prstDash val="solid"/>
+                      <a:round/>
+                      <a:headEnd type="none" w="med" len="med"/>
+                      <a:tailEnd type="none" w="med" len="med"/>
+                    </a:lnR>
+                    <a:lnT w="12700" cap="flat" cmpd="sng" algn="ctr">
+                      <a:solidFill>
+                        <a:schemeClr val="tx1"/>
+                      </a:solidFill>
+                      <a:prstDash val="solid"/>
+                      <a:round/>
+                      <a:headEnd type="none" w="med" len="med"/>
+                      <a:tailEnd type="none" w="med" len="med"/>
+                    </a:lnT>
+                    <a:lnB w="12700" cap="flat" cmpd="sng" algn="ctr">
+                      <a:solidFill>
+                        <a:schemeClr val="tx1"/>
+                      </a:solidFill>
+                      <a:prstDash val="solid"/>
+                      <a:round/>
+                      <a:headEnd type="none" w="med" len="med"/>
+                      <a:tailEnd type="none" w="med" len="med"/>
+                    </a:lnB>
+                  </a:tcPr>
+                </a:tc>
+                <a:tc>
+                  <a:txBody>
+                    <a:bodyPr/>
+                    <a:lstStyle/>
+                    <a:p>
+                      <a:pPr>
+                        <a:buNone/>
+                      </a:pPr>
+                      <a:r>
+                        <a:rPr lang="en-US" sz="1800"/>
+                        <a:t>.count(), .index() (only 2 — immutability limits options)</a:t>
+                      </a:r>
+                    </a:p>
+                  </a:txBody>
+                  <a:tcPr marL="79744" marR="79744" marT="39872" marB="39872" anchor="ctr">
+                    <a:lnL w="12700" cap="flat" cmpd="sng" algn="ctr">
+                      <a:solidFill>
+                        <a:schemeClr val="tx1"/>
+                      </a:solidFill>
+                      <a:prstDash val="solid"/>
+                      <a:round/>
+                      <a:headEnd type="none" w="med" len="med"/>
+                      <a:tailEnd type="none" w="med" len="med"/>
+                    </a:lnL>
+                    <a:lnR w="12700" cap="flat" cmpd="sng" algn="ctr">
+                      <a:solidFill>
+                        <a:schemeClr val="tx1"/>
+                      </a:solidFill>
+                      <a:prstDash val="solid"/>
+                      <a:round/>
+                      <a:headEnd type="none" w="med" len="med"/>
+                      <a:tailEnd type="none" w="med" len="med"/>
+                    </a:lnR>
+                    <a:lnT w="12700" cap="flat" cmpd="sng" algn="ctr">
+                      <a:solidFill>
+                        <a:schemeClr val="tx1"/>
+                      </a:solidFill>
+                      <a:prstDash val="solid"/>
+                      <a:round/>
+                      <a:headEnd type="none" w="med" len="med"/>
+                      <a:tailEnd type="none" w="med" len="med"/>
+                    </a:lnT>
+                    <a:lnB w="12700" cap="flat" cmpd="sng" algn="ctr">
+                      <a:solidFill>
+                        <a:schemeClr val="tx1"/>
+                      </a:solidFill>
+                      <a:prstDash val="solid"/>
+                      <a:round/>
+                      <a:headEnd type="none" w="med" len="med"/>
+                      <a:tailEnd type="none" w="med" len="med"/>
+                    </a:lnB>
+                  </a:tcPr>
+                </a:tc>
+                <a:extLst>
+                  <a:ext uri="{0D108BD9-81ED-4DB2-BD59-A6C34878D82A}">
+                    <a16:rowId xmlns:a16="http://schemas.microsoft.com/office/drawing/2014/main" val="4114083954"/>
+                  </a:ext>
+                </a:extLst>
+              </a:tr>
+              <a:tr h="531628">
+                <a:tc>
+                  <a:txBody>
+                    <a:bodyPr/>
+                    <a:lstStyle/>
+                    <a:p>
+                      <a:pPr>
+                        <a:buNone/>
+                      </a:pPr>
+                      <a:r>
+                        <a:rPr lang="en-US" sz="1800" b="1"/>
+                        <a:t>Common use case</a:t>
+                      </a:r>
+                      <a:endParaRPr lang="en-US" sz="1800"/>
+                    </a:p>
+                  </a:txBody>
+                  <a:tcPr marL="79744" marR="79744" marT="39872" marB="39872" anchor="ctr">
+                    <a:lnL w="12700" cap="flat" cmpd="sng" algn="ctr">
+                      <a:solidFill>
+                        <a:schemeClr val="tx1"/>
+                      </a:solidFill>
+                      <a:prstDash val="solid"/>
+                      <a:round/>
+                      <a:headEnd type="none" w="med" len="med"/>
+                      <a:tailEnd type="none" w="med" len="med"/>
+                    </a:lnL>
+                    <a:lnR w="12700" cap="flat" cmpd="sng" algn="ctr">
+                      <a:solidFill>
+                        <a:schemeClr val="tx1"/>
+                      </a:solidFill>
+                      <a:prstDash val="solid"/>
+                      <a:round/>
+                      <a:headEnd type="none" w="med" len="med"/>
+                      <a:tailEnd type="none" w="med" len="med"/>
+                    </a:lnR>
+                    <a:lnT w="12700" cap="flat" cmpd="sng" algn="ctr">
+                      <a:solidFill>
+                        <a:schemeClr val="tx1"/>
+                      </a:solidFill>
+                      <a:prstDash val="solid"/>
+                      <a:round/>
+                      <a:headEnd type="none" w="med" len="med"/>
+                      <a:tailEnd type="none" w="med" len="med"/>
+                    </a:lnT>
+                    <a:lnB w="12700" cap="flat" cmpd="sng" algn="ctr">
+                      <a:solidFill>
+                        <a:schemeClr val="tx1"/>
+                      </a:solidFill>
+                      <a:prstDash val="solid"/>
+                      <a:round/>
+                      <a:headEnd type="none" w="med" len="med"/>
+                      <a:tailEnd type="none" w="med" len="med"/>
+                    </a:lnB>
+                  </a:tcPr>
+                </a:tc>
+                <a:tc>
+                  <a:txBody>
+                    <a:bodyPr/>
+                    <a:lstStyle/>
+                    <a:p>
+                      <a:pPr>
+                        <a:buNone/>
+                      </a:pPr>
+                      <a:r>
+                        <a:rPr lang="en-US" sz="1800"/>
+                        <a:t>Fixed data that shouldn't change: coordinates, RGB values, database records</a:t>
+                      </a:r>
+                    </a:p>
+                  </a:txBody>
+                  <a:tcPr marL="79744" marR="79744" marT="39872" marB="39872" anchor="ctr">
+                    <a:lnL w="12700" cap="flat" cmpd="sng" algn="ctr">
+                      <a:solidFill>
+                        <a:schemeClr val="tx1"/>
+                      </a:solidFill>
+                      <a:prstDash val="solid"/>
+                      <a:round/>
+                      <a:headEnd type="none" w="med" len="med"/>
+                      <a:tailEnd type="none" w="med" len="med"/>
+                    </a:lnL>
+                    <a:lnR w="12700" cap="flat" cmpd="sng" algn="ctr">
+                      <a:solidFill>
+                        <a:schemeClr val="tx1"/>
+                      </a:solidFill>
+                      <a:prstDash val="solid"/>
+                      <a:round/>
+                      <a:headEnd type="none" w="med" len="med"/>
+                      <a:tailEnd type="none" w="med" len="med"/>
+                    </a:lnR>
+                    <a:lnT w="12700" cap="flat" cmpd="sng" algn="ctr">
+                      <a:solidFill>
+                        <a:schemeClr val="tx1"/>
+                      </a:solidFill>
+                      <a:prstDash val="solid"/>
+                      <a:round/>
+                      <a:headEnd type="none" w="med" len="med"/>
+                      <a:tailEnd type="none" w="med" len="med"/>
+                    </a:lnT>
+                    <a:lnB w="12700" cap="flat" cmpd="sng" algn="ctr">
+                      <a:solidFill>
+                        <a:schemeClr val="tx1"/>
+                      </a:solidFill>
+                      <a:prstDash val="solid"/>
+                      <a:round/>
+                      <a:headEnd type="none" w="med" len="med"/>
+                      <a:tailEnd type="none" w="med" len="med"/>
+                    </a:lnB>
+                  </a:tcPr>
+                </a:tc>
+                <a:extLst>
+                  <a:ext uri="{0D108BD9-81ED-4DB2-BD59-A6C34878D82A}">
+                    <a16:rowId xmlns:a16="http://schemas.microsoft.com/office/drawing/2014/main" val="1784693684"/>
+                  </a:ext>
+                </a:extLst>
+              </a:tr>
+              <a:tr h="531628">
+                <a:tc>
+                  <a:txBody>
+                    <a:bodyPr/>
+                    <a:lstStyle/>
+                    <a:p>
+                      <a:pPr>
+                        <a:buNone/>
+                      </a:pPr>
+                      <a:r>
+                        <a:rPr lang="en-US" sz="1800" b="1"/>
+                        <a:t>Unpacking</a:t>
+                      </a:r>
+                      <a:endParaRPr lang="en-US" sz="1800"/>
+                    </a:p>
+                  </a:txBody>
+                  <a:tcPr marL="79744" marR="79744" marT="39872" marB="39872" anchor="ctr">
+                    <a:lnL w="12700" cap="flat" cmpd="sng" algn="ctr">
+                      <a:solidFill>
+                        <a:schemeClr val="tx1"/>
+                      </a:solidFill>
+                      <a:prstDash val="solid"/>
+                      <a:round/>
+                      <a:headEnd type="none" w="med" len="med"/>
+                      <a:tailEnd type="none" w="med" len="med"/>
+                    </a:lnL>
+                    <a:lnR w="12700" cap="flat" cmpd="sng" algn="ctr">
+                      <a:solidFill>
+                        <a:schemeClr val="tx1"/>
+                      </a:solidFill>
+                      <a:prstDash val="solid"/>
+                      <a:round/>
+                      <a:headEnd type="none" w="med" len="med"/>
+                      <a:tailEnd type="none" w="med" len="med"/>
+                    </a:lnR>
+                    <a:lnT w="12700" cap="flat" cmpd="sng" algn="ctr">
+                      <a:solidFill>
+                        <a:schemeClr val="tx1"/>
+                      </a:solidFill>
+                      <a:prstDash val="solid"/>
+                      <a:round/>
+                      <a:headEnd type="none" w="med" len="med"/>
+                      <a:tailEnd type="none" w="med" len="med"/>
+                    </a:lnT>
+                    <a:lnB w="12700" cap="flat" cmpd="sng" algn="ctr">
+                      <a:solidFill>
+                        <a:schemeClr val="tx1"/>
+                      </a:solidFill>
+                      <a:prstDash val="solid"/>
+                      <a:round/>
+                      <a:headEnd type="none" w="med" len="med"/>
+                      <a:tailEnd type="none" w="med" len="med"/>
+                    </a:lnB>
+                  </a:tcPr>
+                </a:tc>
+                <a:tc>
+                  <a:txBody>
+                    <a:bodyPr/>
+                    <a:lstStyle/>
+                    <a:p>
+                      <a:pPr>
+                        <a:buNone/>
+                      </a:pPr>
+                      <a:r>
+                        <a:rPr lang="en-US" sz="1800"/>
+                        <a:t>✅ Yes — x, y, z = (1, 2, 3) assigns each value to a variable</a:t>
+                      </a:r>
+                    </a:p>
+                  </a:txBody>
+                  <a:tcPr marL="79744" marR="79744" marT="39872" marB="39872" anchor="ctr">
+                    <a:lnL w="12700" cap="flat" cmpd="sng" algn="ctr">
+                      <a:solidFill>
+                        <a:schemeClr val="tx1"/>
+                      </a:solidFill>
+                      <a:prstDash val="solid"/>
+                      <a:round/>
+                      <a:headEnd type="none" w="med" len="med"/>
+                      <a:tailEnd type="none" w="med" len="med"/>
+                    </a:lnL>
+                    <a:lnR w="12700" cap="flat" cmpd="sng" algn="ctr">
+                      <a:solidFill>
+                        <a:schemeClr val="tx1"/>
+                      </a:solidFill>
+                      <a:prstDash val="solid"/>
+                      <a:round/>
+                      <a:headEnd type="none" w="med" len="med"/>
+                      <a:tailEnd type="none" w="med" len="med"/>
+                    </a:lnR>
+                    <a:lnT w="12700" cap="flat" cmpd="sng" algn="ctr">
+                      <a:solidFill>
+                        <a:schemeClr val="tx1"/>
+                      </a:solidFill>
+                      <a:prstDash val="solid"/>
+                      <a:round/>
+                      <a:headEnd type="none" w="med" len="med"/>
+                      <a:tailEnd type="none" w="med" len="med"/>
+                    </a:lnT>
+                    <a:lnB w="12700" cap="flat" cmpd="sng" algn="ctr">
+                      <a:solidFill>
+                        <a:schemeClr val="tx1"/>
+                      </a:solidFill>
+                      <a:prstDash val="solid"/>
+                      <a:round/>
+                      <a:headEnd type="none" w="med" len="med"/>
+                      <a:tailEnd type="none" w="med" len="med"/>
+                    </a:lnB>
+                  </a:tcPr>
+                </a:tc>
+                <a:extLst>
+                  <a:ext uri="{0D108BD9-81ED-4DB2-BD59-A6C34878D82A}">
+                    <a16:rowId xmlns:a16="http://schemas.microsoft.com/office/drawing/2014/main" val="480746709"/>
+                  </a:ext>
+                </a:extLst>
+              </a:tr>
+              <a:tr h="531628">
+                <a:tc>
+                  <a:txBody>
+                    <a:bodyPr/>
+                    <a:lstStyle/>
+                    <a:p>
+                      <a:pPr>
+                        <a:buNone/>
+                      </a:pPr>
+                      <a:r>
+                        <a:rPr lang="en-US" sz="1800" b="1"/>
+                        <a:t>Single-item syntax</a:t>
+                      </a:r>
+                      <a:endParaRPr lang="en-US" sz="1800"/>
+                    </a:p>
+                  </a:txBody>
+                  <a:tcPr marL="79744" marR="79744" marT="39872" marB="39872" anchor="ctr">
+                    <a:lnL w="12700" cap="flat" cmpd="sng" algn="ctr">
+                      <a:solidFill>
+                        <a:schemeClr val="tx1"/>
+                      </a:solidFill>
+                      <a:prstDash val="solid"/>
+                      <a:round/>
+                      <a:headEnd type="none" w="med" len="med"/>
+                      <a:tailEnd type="none" w="med" len="med"/>
+                    </a:lnL>
+                    <a:lnR w="12700" cap="flat" cmpd="sng" algn="ctr">
+                      <a:solidFill>
+                        <a:schemeClr val="tx1"/>
+                      </a:solidFill>
+                      <a:prstDash val="solid"/>
+                      <a:round/>
+                      <a:headEnd type="none" w="med" len="med"/>
+                      <a:tailEnd type="none" w="med" len="med"/>
+                    </a:lnR>
+                    <a:lnT w="12700" cap="flat" cmpd="sng" algn="ctr">
+                      <a:solidFill>
+                        <a:schemeClr val="tx1"/>
+                      </a:solidFill>
+                      <a:prstDash val="solid"/>
+                      <a:round/>
+                      <a:headEnd type="none" w="med" len="med"/>
+                      <a:tailEnd type="none" w="med" len="med"/>
+                    </a:lnT>
+                    <a:lnB w="12700" cap="flat" cmpd="sng" algn="ctr">
+                      <a:solidFill>
+                        <a:schemeClr val="tx1"/>
+                      </a:solidFill>
+                      <a:prstDash val="solid"/>
+                      <a:round/>
+                      <a:headEnd type="none" w="med" len="med"/>
+                      <a:tailEnd type="none" w="med" len="med"/>
+                    </a:lnB>
+                  </a:tcPr>
+                </a:tc>
+                <a:tc>
+                  <a:txBody>
+                    <a:bodyPr/>
+                    <a:lstStyle/>
+                    <a:p>
+                      <a:pPr>
+                        <a:buNone/>
+                      </a:pPr>
+                      <a:r>
+                        <a:rPr lang="en-US" sz="1800" dirty="0"/>
+                        <a:t>Requires trailing comma — (5,) is a tuple; (5) is just an integer</a:t>
+                      </a:r>
+                    </a:p>
+                  </a:txBody>
+                  <a:tcPr marL="79744" marR="79744" marT="39872" marB="39872" anchor="ctr">
+                    <a:lnL w="12700" cap="flat" cmpd="sng" algn="ctr">
+                      <a:solidFill>
+                        <a:schemeClr val="tx1"/>
+                      </a:solidFill>
+                      <a:prstDash val="solid"/>
+                      <a:round/>
+                      <a:headEnd type="none" w="med" len="med"/>
+                      <a:tailEnd type="none" w="med" len="med"/>
+                    </a:lnL>
+                    <a:lnR w="12700" cap="flat" cmpd="sng" algn="ctr">
+                      <a:solidFill>
+                        <a:schemeClr val="tx1"/>
+                      </a:solidFill>
+                      <a:prstDash val="solid"/>
+                      <a:round/>
+                      <a:headEnd type="none" w="med" len="med"/>
+                      <a:tailEnd type="none" w="med" len="med"/>
+                    </a:lnR>
+                    <a:lnT w="12700" cap="flat" cmpd="sng" algn="ctr">
+                      <a:solidFill>
+                        <a:schemeClr val="tx1"/>
+                      </a:solidFill>
+                      <a:prstDash val="solid"/>
+                      <a:round/>
+                      <a:headEnd type="none" w="med" len="med"/>
+                      <a:tailEnd type="none" w="med" len="med"/>
+                    </a:lnT>
+                    <a:lnB w="12700" cap="flat" cmpd="sng" algn="ctr">
+                      <a:solidFill>
+                        <a:schemeClr val="tx1"/>
+                      </a:solidFill>
+                      <a:prstDash val="solid"/>
+                      <a:round/>
+                      <a:headEnd type="none" w="med" len="med"/>
+                      <a:tailEnd type="none" w="med" len="med"/>
+                    </a:lnB>
+                  </a:tcPr>
+                </a:tc>
+                <a:extLst>
+                  <a:ext uri="{0D108BD9-81ED-4DB2-BD59-A6C34878D82A}">
+                    <a16:rowId xmlns:a16="http://schemas.microsoft.com/office/drawing/2014/main" val="3334407494"/>
+                  </a:ext>
+                </a:extLst>
+              </a:tr>
+            </a:tbl>
+          </a:graphicData>
+        </a:graphic>
+      </p:graphicFrame>
     </p:spTree>
     <p:extLst>
       <p:ext uri="{BB962C8B-B14F-4D97-AF65-F5344CB8AC3E}">
-        <p14:creationId xmlns:p14="http://schemas.microsoft.com/office/powerpoint/2010/main" val="4018436934"/>
+        <p14:creationId xmlns:p14="http://schemas.microsoft.com/office/powerpoint/2010/main" val="2815048294"/>
       </p:ext>
     </p:extLst>
   </p:cSld>
@@ -22094,7 +28715,7 @@
           <p:cNvPr id="2" name="Title 1">
             <a:extLst>
               <a:ext uri="{FF2B5EF4-FFF2-40B4-BE49-F238E27FC236}">
-                <a16:creationId xmlns:a16="http://schemas.microsoft.com/office/drawing/2014/main" id="{3469CDD8-6080-6002-43DF-A45AE5E3FD8C}"/>
+                <a16:creationId xmlns:a16="http://schemas.microsoft.com/office/drawing/2014/main" id="{0D54D348-CAAF-3773-6861-C22AEF86462B}"/>
               </a:ext>
             </a:extLst>
           </p:cNvPr>
@@ -22112,46 +28733,486 @@
           <a:p>
             <a:r>
               <a:rPr lang="en-US" dirty="0"/>
-              <a:t>Nested lists</a:t>
-            </a:r>
-          </a:p>
-        </p:txBody>
-      </p:sp>
-      <p:sp>
-        <p:nvSpPr>
-          <p:cNvPr id="3" name="Text Placeholder 2">
-            <a:extLst>
-              <a:ext uri="{FF2B5EF4-FFF2-40B4-BE49-F238E27FC236}">
-                <a16:creationId xmlns:a16="http://schemas.microsoft.com/office/drawing/2014/main" id="{9555F037-DF18-29BE-925F-B4AE1337F992}"/>
-              </a:ext>
-            </a:extLst>
-          </p:cNvPr>
-          <p:cNvSpPr>
-            <a:spLocks noGrp="1"/>
-          </p:cNvSpPr>
-          <p:nvPr>
-            <p:ph type="body" sz="quarter" idx="11"/>
-          </p:nvPr>
-        </p:nvSpPr>
-        <p:spPr/>
-        <p:txBody>
-          <a:bodyPr/>
+              <a:t>MUTABLE VS IMMUTABLE</a:t>
+            </a:r>
+          </a:p>
+        </p:txBody>
+      </p:sp>
+      <p:sp>
+        <p:nvSpPr>
+          <p:cNvPr id="5" name="TextBox 4">
+            <a:extLst>
+              <a:ext uri="{FF2B5EF4-FFF2-40B4-BE49-F238E27FC236}">
+                <a16:creationId xmlns:a16="http://schemas.microsoft.com/office/drawing/2014/main" id="{3F2AB114-1471-32DD-621A-08AAFB643586}"/>
+              </a:ext>
+            </a:extLst>
+          </p:cNvPr>
+          <p:cNvSpPr txBox="1"/>
+          <p:nvPr/>
+        </p:nvSpPr>
+        <p:spPr>
+          <a:xfrm>
+            <a:off x="847023" y="1185019"/>
+            <a:ext cx="10087276" cy="830997"/>
+          </a:xfrm>
+          <a:prstGeom prst="rect">
+            <a:avLst/>
+          </a:prstGeom>
+          <a:noFill/>
+        </p:spPr>
+        <p:txBody>
+          <a:bodyPr wrap="square">
+            <a:spAutoFit/>
+          </a:bodyPr>
           <a:lstStyle/>
           <a:p>
-            <a:endParaRPr lang="en-US"/>
+            <a:r>
+              <a:rPr lang="en-US" sz="2400" b="1" dirty="0"/>
+              <a:t>Mutable</a:t>
+            </a:r>
+            <a:r>
+              <a:rPr lang="en-US" sz="2400" dirty="0"/>
+              <a:t> means you can change an object after it's created. </a:t>
+            </a:r>
+            <a:r>
+              <a:rPr lang="en-US" sz="2400" b="1" dirty="0"/>
+              <a:t>Immutable</a:t>
+            </a:r>
+            <a:r>
+              <a:rPr lang="en-US" sz="2400" dirty="0"/>
+              <a:t> means you cannot.</a:t>
+            </a:r>
+          </a:p>
+        </p:txBody>
+      </p:sp>
+      <p:sp>
+        <p:nvSpPr>
+          <p:cNvPr id="7" name="TextBox 6">
+            <a:extLst>
+              <a:ext uri="{FF2B5EF4-FFF2-40B4-BE49-F238E27FC236}">
+                <a16:creationId xmlns:a16="http://schemas.microsoft.com/office/drawing/2014/main" id="{803F51FA-9B33-7C87-C0E2-8368433DC3C8}"/>
+              </a:ext>
+            </a:extLst>
+          </p:cNvPr>
+          <p:cNvSpPr txBox="1"/>
+          <p:nvPr/>
+        </p:nvSpPr>
+        <p:spPr>
+          <a:xfrm>
+            <a:off x="2095900" y="4442134"/>
+            <a:ext cx="7384983" cy="1938992"/>
+          </a:xfrm>
+          <a:prstGeom prst="rect">
+            <a:avLst/>
+          </a:prstGeom>
+          <a:noFill/>
+        </p:spPr>
+        <p:txBody>
+          <a:bodyPr wrap="square">
+            <a:spAutoFit/>
+          </a:bodyPr>
+          <a:lstStyle/>
+          <a:p>
+            <a:endParaRPr lang="en-US" sz="2400" dirty="0"/>
+          </a:p>
+          <a:p>
+            <a:r>
+              <a:rPr lang="en-US" sz="2400" dirty="0"/>
+              <a:t># Tuple (immutable) — you CANNOT change it</a:t>
+            </a:r>
+          </a:p>
+          <a:p>
+            <a:r>
+              <a:rPr lang="en-US" sz="2400" dirty="0" err="1"/>
+              <a:t>my_tuple</a:t>
+            </a:r>
+            <a:r>
+              <a:rPr lang="en-US" sz="2400" dirty="0"/>
+              <a:t> = (1, 2, 3)</a:t>
+            </a:r>
+          </a:p>
+          <a:p>
+            <a:r>
+              <a:rPr lang="en-US" sz="2400" dirty="0" err="1"/>
+              <a:t>my_tuple</a:t>
+            </a:r>
+            <a:r>
+              <a:rPr lang="en-US" sz="2400" dirty="0"/>
+              <a:t>[0] = 99  # ❌ </a:t>
+            </a:r>
+            <a:r>
+              <a:rPr lang="en-US" sz="2400" dirty="0" err="1"/>
+              <a:t>TypeError</a:t>
+            </a:r>
+            <a:r>
+              <a:rPr lang="en-US" sz="2400" dirty="0"/>
+              <a:t>: 'tuple' object does not support item assignment</a:t>
+            </a:r>
+          </a:p>
+        </p:txBody>
+      </p:sp>
+      <p:sp>
+        <p:nvSpPr>
+          <p:cNvPr id="9" name="TextBox 8">
+            <a:extLst>
+              <a:ext uri="{FF2B5EF4-FFF2-40B4-BE49-F238E27FC236}">
+                <a16:creationId xmlns:a16="http://schemas.microsoft.com/office/drawing/2014/main" id="{E4B6598D-D7BC-7556-9253-029C84CC8E6D}"/>
+              </a:ext>
+            </a:extLst>
+          </p:cNvPr>
+          <p:cNvSpPr txBox="1"/>
+          <p:nvPr/>
+        </p:nvSpPr>
+        <p:spPr>
+          <a:xfrm>
+            <a:off x="2095900" y="2789554"/>
+            <a:ext cx="6097604" cy="1569660"/>
+          </a:xfrm>
+          <a:prstGeom prst="rect">
+            <a:avLst/>
+          </a:prstGeom>
+          <a:noFill/>
+        </p:spPr>
+        <p:txBody>
+          <a:bodyPr wrap="square">
+            <a:spAutoFit/>
+          </a:bodyPr>
+          <a:lstStyle/>
+          <a:p>
+            <a:r>
+              <a:rPr lang="en-US" sz="2400" dirty="0"/>
+              <a:t># List (mutable) — you CAN change it</a:t>
+            </a:r>
+          </a:p>
+          <a:p>
+            <a:r>
+              <a:rPr lang="en-US" sz="2400" dirty="0" err="1"/>
+              <a:t>my_list</a:t>
+            </a:r>
+            <a:r>
+              <a:rPr lang="en-US" sz="2400" dirty="0"/>
+              <a:t> = [1, 2, 3]</a:t>
+            </a:r>
+          </a:p>
+          <a:p>
+            <a:r>
+              <a:rPr lang="en-US" sz="2400" dirty="0" err="1"/>
+              <a:t>my_list</a:t>
+            </a:r>
+            <a:r>
+              <a:rPr lang="en-US" sz="2400" dirty="0"/>
+              <a:t>[0] = 99</a:t>
+            </a:r>
+          </a:p>
+          <a:p>
+            <a:r>
+              <a:rPr lang="en-US" sz="2400" dirty="0"/>
+              <a:t>print(</a:t>
+            </a:r>
+            <a:r>
+              <a:rPr lang="en-US" sz="2400" dirty="0" err="1"/>
+              <a:t>my_list</a:t>
+            </a:r>
+            <a:r>
+              <a:rPr lang="en-US" sz="2400" dirty="0"/>
+              <a:t>)  # [99, 2, 3]  ✅</a:t>
+            </a:r>
           </a:p>
         </p:txBody>
       </p:sp>
     </p:spTree>
     <p:extLst>
       <p:ext uri="{BB962C8B-B14F-4D97-AF65-F5344CB8AC3E}">
-        <p14:creationId xmlns:p14="http://schemas.microsoft.com/office/powerpoint/2010/main" val="2862347507"/>
+        <p14:creationId xmlns:p14="http://schemas.microsoft.com/office/powerpoint/2010/main" val="3731398127"/>
       </p:ext>
     </p:extLst>
   </p:cSld>
   <p:clrMapOvr>
     <a:masterClrMapping/>
   </p:clrMapOvr>
+  <p:timing>
+    <p:tnLst>
+      <p:par>
+        <p:cTn id="1" dur="indefinite" restart="never" nodeType="tmRoot">
+          <p:childTnLst>
+            <p:seq concurrent="1" nextAc="seek">
+              <p:cTn id="2" dur="indefinite" nodeType="mainSeq">
+                <p:childTnLst>
+                  <p:par>
+                    <p:cTn id="3" fill="hold">
+                      <p:stCondLst>
+                        <p:cond delay="indefinite"/>
+                      </p:stCondLst>
+                      <p:childTnLst>
+                        <p:par>
+                          <p:cTn id="4" fill="hold">
+                            <p:stCondLst>
+                              <p:cond delay="0"/>
+                            </p:stCondLst>
+                            <p:childTnLst>
+                              <p:par>
+                                <p:cTn id="5" presetID="1" presetClass="entr" presetSubtype="0" fill="hold" nodeType="clickEffect">
+                                  <p:stCondLst>
+                                    <p:cond delay="0"/>
+                                  </p:stCondLst>
+                                  <p:childTnLst>
+                                    <p:set>
+                                      <p:cBhvr>
+                                        <p:cTn id="6" dur="1" fill="hold">
+                                          <p:stCondLst>
+                                            <p:cond delay="0"/>
+                                          </p:stCondLst>
+                                        </p:cTn>
+                                        <p:tgtEl>
+                                          <p:spTgt spid="9">
+                                            <p:txEl>
+                                              <p:pRg st="0" end="0"/>
+                                            </p:txEl>
+                                          </p:spTgt>
+                                        </p:tgtEl>
+                                        <p:attrNameLst>
+                                          <p:attrName>style.visibility</p:attrName>
+                                        </p:attrNameLst>
+                                      </p:cBhvr>
+                                      <p:to>
+                                        <p:strVal val="visible"/>
+                                      </p:to>
+                                    </p:set>
+                                  </p:childTnLst>
+                                </p:cTn>
+                              </p:par>
+                              <p:par>
+                                <p:cTn id="7" presetID="1" presetClass="entr" presetSubtype="0" fill="hold" nodeType="withEffect">
+                                  <p:stCondLst>
+                                    <p:cond delay="0"/>
+                                  </p:stCondLst>
+                                  <p:childTnLst>
+                                    <p:set>
+                                      <p:cBhvr>
+                                        <p:cTn id="8" dur="1" fill="hold">
+                                          <p:stCondLst>
+                                            <p:cond delay="0"/>
+                                          </p:stCondLst>
+                                        </p:cTn>
+                                        <p:tgtEl>
+                                          <p:spTgt spid="9">
+                                            <p:txEl>
+                                              <p:pRg st="1" end="1"/>
+                                            </p:txEl>
+                                          </p:spTgt>
+                                        </p:tgtEl>
+                                        <p:attrNameLst>
+                                          <p:attrName>style.visibility</p:attrName>
+                                        </p:attrNameLst>
+                                      </p:cBhvr>
+                                      <p:to>
+                                        <p:strVal val="visible"/>
+                                      </p:to>
+                                    </p:set>
+                                  </p:childTnLst>
+                                </p:cTn>
+                              </p:par>
+                              <p:par>
+                                <p:cTn id="9" presetID="1" presetClass="entr" presetSubtype="0" fill="hold" nodeType="withEffect">
+                                  <p:stCondLst>
+                                    <p:cond delay="0"/>
+                                  </p:stCondLst>
+                                  <p:childTnLst>
+                                    <p:set>
+                                      <p:cBhvr>
+                                        <p:cTn id="10" dur="1" fill="hold">
+                                          <p:stCondLst>
+                                            <p:cond delay="0"/>
+                                          </p:stCondLst>
+                                        </p:cTn>
+                                        <p:tgtEl>
+                                          <p:spTgt spid="9">
+                                            <p:txEl>
+                                              <p:pRg st="2" end="2"/>
+                                            </p:txEl>
+                                          </p:spTgt>
+                                        </p:tgtEl>
+                                        <p:attrNameLst>
+                                          <p:attrName>style.visibility</p:attrName>
+                                        </p:attrNameLst>
+                                      </p:cBhvr>
+                                      <p:to>
+                                        <p:strVal val="visible"/>
+                                      </p:to>
+                                    </p:set>
+                                  </p:childTnLst>
+                                </p:cTn>
+                              </p:par>
+                              <p:par>
+                                <p:cTn id="11" presetID="1" presetClass="entr" presetSubtype="0" fill="hold" nodeType="withEffect">
+                                  <p:stCondLst>
+                                    <p:cond delay="0"/>
+                                  </p:stCondLst>
+                                  <p:childTnLst>
+                                    <p:set>
+                                      <p:cBhvr>
+                                        <p:cTn id="12" dur="1" fill="hold">
+                                          <p:stCondLst>
+                                            <p:cond delay="0"/>
+                                          </p:stCondLst>
+                                        </p:cTn>
+                                        <p:tgtEl>
+                                          <p:spTgt spid="9">
+                                            <p:txEl>
+                                              <p:pRg st="3" end="3"/>
+                                            </p:txEl>
+                                          </p:spTgt>
+                                        </p:tgtEl>
+                                        <p:attrNameLst>
+                                          <p:attrName>style.visibility</p:attrName>
+                                        </p:attrNameLst>
+                                      </p:cBhvr>
+                                      <p:to>
+                                        <p:strVal val="visible"/>
+                                      </p:to>
+                                    </p:set>
+                                  </p:childTnLst>
+                                </p:cTn>
+                              </p:par>
+                            </p:childTnLst>
+                          </p:cTn>
+                        </p:par>
+                      </p:childTnLst>
+                    </p:cTn>
+                  </p:par>
+                  <p:par>
+                    <p:cTn id="13" fill="hold">
+                      <p:stCondLst>
+                        <p:cond delay="indefinite"/>
+                      </p:stCondLst>
+                      <p:childTnLst>
+                        <p:par>
+                          <p:cTn id="14" fill="hold">
+                            <p:stCondLst>
+                              <p:cond delay="0"/>
+                            </p:stCondLst>
+                            <p:childTnLst>
+                              <p:par>
+                                <p:cTn id="15" presetID="1" presetClass="entr" presetSubtype="0" fill="hold" nodeType="clickEffect">
+                                  <p:stCondLst>
+                                    <p:cond delay="0"/>
+                                  </p:stCondLst>
+                                  <p:childTnLst>
+                                    <p:set>
+                                      <p:cBhvr>
+                                        <p:cTn id="16" dur="1" fill="hold">
+                                          <p:stCondLst>
+                                            <p:cond delay="0"/>
+                                          </p:stCondLst>
+                                        </p:cTn>
+                                        <p:tgtEl>
+                                          <p:spTgt spid="7">
+                                            <p:txEl>
+                                              <p:pRg st="1" end="1"/>
+                                            </p:txEl>
+                                          </p:spTgt>
+                                        </p:tgtEl>
+                                        <p:attrNameLst>
+                                          <p:attrName>style.visibility</p:attrName>
+                                        </p:attrNameLst>
+                                      </p:cBhvr>
+                                      <p:to>
+                                        <p:strVal val="visible"/>
+                                      </p:to>
+                                    </p:set>
+                                  </p:childTnLst>
+                                </p:cTn>
+                              </p:par>
+                              <p:par>
+                                <p:cTn id="17" presetID="1" presetClass="entr" presetSubtype="0" fill="hold" nodeType="withEffect">
+                                  <p:stCondLst>
+                                    <p:cond delay="0"/>
+                                  </p:stCondLst>
+                                  <p:childTnLst>
+                                    <p:set>
+                                      <p:cBhvr>
+                                        <p:cTn id="18" dur="1" fill="hold">
+                                          <p:stCondLst>
+                                            <p:cond delay="0"/>
+                                          </p:stCondLst>
+                                        </p:cTn>
+                                        <p:tgtEl>
+                                          <p:spTgt spid="7">
+                                            <p:txEl>
+                                              <p:pRg st="2" end="2"/>
+                                            </p:txEl>
+                                          </p:spTgt>
+                                        </p:tgtEl>
+                                        <p:attrNameLst>
+                                          <p:attrName>style.visibility</p:attrName>
+                                        </p:attrNameLst>
+                                      </p:cBhvr>
+                                      <p:to>
+                                        <p:strVal val="visible"/>
+                                      </p:to>
+                                    </p:set>
+                                  </p:childTnLst>
+                                </p:cTn>
+                              </p:par>
+                              <p:par>
+                                <p:cTn id="19" presetID="1" presetClass="entr" presetSubtype="0" fill="hold" nodeType="withEffect">
+                                  <p:stCondLst>
+                                    <p:cond delay="0"/>
+                                  </p:stCondLst>
+                                  <p:childTnLst>
+                                    <p:set>
+                                      <p:cBhvr>
+                                        <p:cTn id="20" dur="1" fill="hold">
+                                          <p:stCondLst>
+                                            <p:cond delay="0"/>
+                                          </p:stCondLst>
+                                        </p:cTn>
+                                        <p:tgtEl>
+                                          <p:spTgt spid="7">
+                                            <p:txEl>
+                                              <p:pRg st="3" end="3"/>
+                                            </p:txEl>
+                                          </p:spTgt>
+                                        </p:tgtEl>
+                                        <p:attrNameLst>
+                                          <p:attrName>style.visibility</p:attrName>
+                                        </p:attrNameLst>
+                                      </p:cBhvr>
+                                      <p:to>
+                                        <p:strVal val="visible"/>
+                                      </p:to>
+                                    </p:set>
+                                  </p:childTnLst>
+                                </p:cTn>
+                              </p:par>
+                            </p:childTnLst>
+                          </p:cTn>
+                        </p:par>
+                      </p:childTnLst>
+                    </p:cTn>
+                  </p:par>
+                </p:childTnLst>
+              </p:cTn>
+              <p:prevCondLst>
+                <p:cond evt="onPrev" delay="0">
+                  <p:tgtEl>
+                    <p:sldTgt/>
+                  </p:tgtEl>
+                </p:cond>
+              </p:prevCondLst>
+              <p:nextCondLst>
+                <p:cond evt="onNext" delay="0">
+                  <p:tgtEl>
+                    <p:sldTgt/>
+                  </p:tgtEl>
+                </p:cond>
+              </p:nextCondLst>
+            </p:seq>
+          </p:childTnLst>
+        </p:cTn>
+      </p:par>
+    </p:tnLst>
+  </p:timing>
 </p:sld>
 </file>
 
